--- a/slide/Final_KLTN_PhanManhTan_NguyenVanThuong.pptx
+++ b/slide/Final_KLTN_PhanManhTan_NguyenVanThuong.pptx
@@ -22,17 +22,27 @@
     <p:sldId id="270" r:id="rId20"/>
     <p:sldId id="271" r:id="rId21"/>
     <p:sldId id="272" r:id="rId22"/>
+    <p:sldId id="273" r:id="rId23"/>
+    <p:sldId id="274" r:id="rId24"/>
   </p:sldIdLst>
   <p:sldSz cx="18288000" cy="10287000"/>
   <p:notesSz cx="6858000" cy="9144000"/>
   <p:embeddedFontLst>
     <p:embeddedFont>
       <p:font typeface="Amaranth Bold" charset="1" panose="02000500000000020004"/>
-      <p:regular r:id="rId23"/>
+      <p:regular r:id="rId25"/>
+    </p:embeddedFont>
+    <p:embeddedFont>
+      <p:font typeface="Amaranth" charset="1" panose="02000503050000020004"/>
+      <p:regular r:id="rId26"/>
     </p:embeddedFont>
     <p:embeddedFont>
       <p:font typeface="Faustina Bold" charset="1" panose="00000800000000000000"/>
-      <p:regular r:id="rId24"/>
+      <p:regular r:id="rId27"/>
+    </p:embeddedFont>
+    <p:embeddedFont>
+      <p:font typeface="เอฟซี เดซี่ Bold" charset="1" panose="020B0500040200020003"/>
+      <p:regular r:id="rId28"/>
     </p:embeddedFont>
   </p:embeddedFontLst>
   <p:defaultTextStyle>
@@ -3100,7 +3110,7 @@
         </p:nvSpPr>
         <p:spPr>
           <a:xfrm flipH="false" flipV="false" rot="0">
-            <a:off x="1028700" y="-3600450"/>
+            <a:off x="-3062817" y="-3336980"/>
             <a:ext cx="7200900" cy="7200900"/>
           </a:xfrm>
           <a:custGeom>
@@ -3362,7 +3372,7 @@
         </p:nvSpPr>
         <p:spPr>
           <a:xfrm flipH="false" flipV="true" rot="0">
-            <a:off x="9496560" y="-1052381"/>
+            <a:off x="16436186" y="4264918"/>
             <a:ext cx="3303970" cy="1910295"/>
           </a:xfrm>
           <a:custGeom>
@@ -3374,19 +3384,19 @@
             <a:pathLst>
               <a:path h="1910295" w="3303970">
                 <a:moveTo>
-                  <a:pt x="0" y="1910296"/>
+                  <a:pt x="0" y="1910295"/>
                 </a:moveTo>
                 <a:lnTo>
-                  <a:pt x="3303969" y="1910296"/>
-                </a:lnTo>
-                <a:lnTo>
-                  <a:pt x="3303969" y="0"/>
-                </a:lnTo>
-                <a:lnTo>
-                  <a:pt x="0" y="0"/>
-                </a:lnTo>
-                <a:lnTo>
-                  <a:pt x="0" y="1910296"/>
+                  <a:pt x="3303970" y="1910295"/>
+                </a:lnTo>
+                <a:lnTo>
+                  <a:pt x="3303970" y="0"/>
+                </a:lnTo>
+                <a:lnTo>
+                  <a:pt x="0" y="0"/>
+                </a:lnTo>
+                <a:lnTo>
+                  <a:pt x="0" y="1910295"/>
                 </a:lnTo>
                 <a:close/>
               </a:path>
@@ -3604,7 +3614,7 @@
         </p:nvSpPr>
         <p:spPr>
           <a:xfrm flipH="false" flipV="true" rot="0">
-            <a:off x="5543550" y="-283247"/>
+            <a:off x="4509558" y="-438980"/>
             <a:ext cx="1877989" cy="877960"/>
           </a:xfrm>
           <a:custGeom>
@@ -3644,14 +3654,226 @@
       </p:sp>
       <p:sp>
         <p:nvSpPr>
-          <p:cNvPr name="Freeform 13" id="13"/>
+          <p:cNvPr name="TextBox 13" id="13"/>
+          <p:cNvSpPr txBox="true"/>
+          <p:nvPr/>
+        </p:nvSpPr>
+        <p:spPr>
+          <a:xfrm rot="0">
+            <a:off x="2793766" y="2755617"/>
+            <a:ext cx="12700467" cy="1712114"/>
+          </a:xfrm>
+          <a:prstGeom prst="rect">
+            <a:avLst/>
+          </a:prstGeom>
+        </p:spPr>
+        <p:txBody>
+          <a:bodyPr anchor="t" rtlCol="false" tIns="0" lIns="0" bIns="0" rIns="0">
+            <a:spAutoFit/>
+          </a:bodyPr>
+          <a:lstStyle/>
+          <a:p>
+            <a:pPr algn="ctr">
+              <a:lnSpc>
+                <a:spcPts val="6693"/>
+              </a:lnSpc>
+            </a:pPr>
+            <a:r>
+              <a:rPr lang="en-US" b="true" sz="6374">
+                <a:solidFill>
+                  <a:srgbClr val="7DB2FF"/>
+                </a:solidFill>
+                <a:latin typeface="Amaranth Bold"/>
+                <a:ea typeface="Amaranth Bold"/>
+                <a:cs typeface="Amaranth Bold"/>
+                <a:sym typeface="Amaranth Bold"/>
+              </a:rPr>
+              <a:t>PHÂN ĐOẠN KHỐI U GLIOMA TỪ MRI ĐA KÊNH BẰNG U-NET</a:t>
+            </a:r>
+          </a:p>
+        </p:txBody>
+      </p:sp>
+      <p:sp>
+        <p:nvSpPr>
+          <p:cNvPr name="TextBox 14" id="14"/>
+          <p:cNvSpPr txBox="true"/>
+          <p:nvPr/>
+        </p:nvSpPr>
+        <p:spPr>
+          <a:xfrm rot="0">
+            <a:off x="4846953" y="6241888"/>
+            <a:ext cx="9107775" cy="533400"/>
+          </a:xfrm>
+          <a:prstGeom prst="rect">
+            <a:avLst/>
+          </a:prstGeom>
+        </p:spPr>
+        <p:txBody>
+          <a:bodyPr anchor="t" rtlCol="false" tIns="0" lIns="0" bIns="0" rIns="0">
+            <a:spAutoFit/>
+          </a:bodyPr>
+          <a:lstStyle/>
+          <a:p>
+            <a:pPr algn="ctr">
+              <a:lnSpc>
+                <a:spcPts val="4199"/>
+              </a:lnSpc>
+            </a:pPr>
+            <a:r>
+              <a:rPr lang="en-US" sz="3999">
+                <a:solidFill>
+                  <a:srgbClr val="7DB2FF"/>
+                </a:solidFill>
+                <a:latin typeface="Amaranth"/>
+                <a:ea typeface="Amaranth"/>
+                <a:cs typeface="Amaranth"/>
+                <a:sym typeface="Amaranth"/>
+              </a:rPr>
+              <a:t>21114061 - Phan Mạnh Tân</a:t>
+            </a:r>
+          </a:p>
+        </p:txBody>
+      </p:sp>
+      <p:sp>
+        <p:nvSpPr>
+          <p:cNvPr name="TextBox 15" id="15"/>
+          <p:cNvSpPr txBox="true"/>
+          <p:nvPr/>
+        </p:nvSpPr>
+        <p:spPr>
+          <a:xfrm rot="0">
+            <a:off x="5038391" y="7108663"/>
+            <a:ext cx="9107775" cy="533400"/>
+          </a:xfrm>
+          <a:prstGeom prst="rect">
+            <a:avLst/>
+          </a:prstGeom>
+        </p:spPr>
+        <p:txBody>
+          <a:bodyPr anchor="t" rtlCol="false" tIns="0" lIns="0" bIns="0" rIns="0">
+            <a:spAutoFit/>
+          </a:bodyPr>
+          <a:lstStyle/>
+          <a:p>
+            <a:pPr algn="ctr">
+              <a:lnSpc>
+                <a:spcPts val="4199"/>
+              </a:lnSpc>
+            </a:pPr>
+            <a:r>
+              <a:rPr lang="en-US" sz="3999">
+                <a:solidFill>
+                  <a:srgbClr val="7DB2FF"/>
+                </a:solidFill>
+                <a:latin typeface="Amaranth"/>
+                <a:ea typeface="Amaranth"/>
+                <a:cs typeface="Amaranth"/>
+                <a:sym typeface="Amaranth"/>
+              </a:rPr>
+              <a:t>21121741 - Nguyễn Văn Thương</a:t>
+            </a:r>
+          </a:p>
+        </p:txBody>
+      </p:sp>
+      <p:sp>
+        <p:nvSpPr>
+          <p:cNvPr name="TextBox 16" id="16"/>
+          <p:cNvSpPr txBox="true"/>
+          <p:nvPr/>
+        </p:nvSpPr>
+        <p:spPr>
+          <a:xfrm rot="0">
+            <a:off x="4903373" y="8604731"/>
+            <a:ext cx="9580188" cy="1057275"/>
+          </a:xfrm>
+          <a:prstGeom prst="rect">
+            <a:avLst/>
+          </a:prstGeom>
+        </p:spPr>
+        <p:txBody>
+          <a:bodyPr anchor="t" rtlCol="false" tIns="0" lIns="0" bIns="0" rIns="0">
+            <a:spAutoFit/>
+          </a:bodyPr>
+          <a:lstStyle/>
+          <a:p>
+            <a:pPr algn="ctr">
+              <a:lnSpc>
+                <a:spcPts val="4199"/>
+              </a:lnSpc>
+            </a:pPr>
+            <a:r>
+              <a:rPr lang="en-US" sz="3999">
+                <a:solidFill>
+                  <a:srgbClr val="7DB2FF"/>
+                </a:solidFill>
+                <a:latin typeface="Amaranth"/>
+                <a:ea typeface="Amaranth"/>
+                <a:cs typeface="Amaranth"/>
+                <a:sym typeface="Amaranth"/>
+              </a:rPr>
+              <a:t>GIẢNG VIÊN : ThS.Võ Quang Hoàng Khang</a:t>
+            </a:r>
+          </a:p>
+          <a:p>
+            <a:pPr algn="ctr">
+              <a:lnSpc>
+                <a:spcPts val="4199"/>
+              </a:lnSpc>
+            </a:pPr>
+          </a:p>
+        </p:txBody>
+      </p:sp>
+      <p:sp>
+        <p:nvSpPr>
+          <p:cNvPr name="TextBox 17" id="17"/>
+          <p:cNvSpPr txBox="true"/>
+          <p:nvPr/>
+        </p:nvSpPr>
+        <p:spPr>
+          <a:xfrm rot="0">
+            <a:off x="6763199" y="1687728"/>
+            <a:ext cx="5466721" cy="475332"/>
+          </a:xfrm>
+          <a:prstGeom prst="rect">
+            <a:avLst/>
+          </a:prstGeom>
+        </p:spPr>
+        <p:txBody>
+          <a:bodyPr anchor="t" rtlCol="false" tIns="0" lIns="0" bIns="0" rIns="0">
+            <a:spAutoFit/>
+          </a:bodyPr>
+          <a:lstStyle/>
+          <a:p>
+            <a:pPr algn="ctr">
+              <a:lnSpc>
+                <a:spcPts val="3668"/>
+              </a:lnSpc>
+            </a:pPr>
+            <a:r>
+              <a:rPr lang="en-US" b="true" sz="3493">
+                <a:solidFill>
+                  <a:srgbClr val="7DB2FF"/>
+                </a:solidFill>
+                <a:latin typeface="Amaranth Bold"/>
+                <a:ea typeface="Amaranth Bold"/>
+                <a:cs typeface="Amaranth Bold"/>
+                <a:sym typeface="Amaranth Bold"/>
+              </a:rPr>
+              <a:t>Khoa Công Nghệ Thông Tin</a:t>
+            </a:r>
+          </a:p>
+        </p:txBody>
+      </p:sp>
+      <p:sp>
+        <p:nvSpPr>
+          <p:cNvPr name="Freeform 18" id="18"/>
           <p:cNvSpPr/>
           <p:nvPr/>
         </p:nvSpPr>
         <p:spPr>
           <a:xfrm flipH="false" flipV="false" rot="0">
-            <a:off x="323370" y="264889"/>
-            <a:ext cx="4458180" cy="1271278"/>
+            <a:off x="247041" y="263470"/>
+            <a:ext cx="2683548" cy="765230"/>
           </a:xfrm>
           <a:custGeom>
             <a:avLst/>
@@ -3660,18 +3882,18 @@
             <a:cxnLst/>
             <a:rect r="r" b="b" t="t" l="l"/>
             <a:pathLst>
-              <a:path h="1271278" w="4458180">
+              <a:path h="765230" w="2683548">
                 <a:moveTo>
                   <a:pt x="0" y="0"/>
                 </a:moveTo>
                 <a:lnTo>
-                  <a:pt x="4458180" y="0"/>
-                </a:lnTo>
-                <a:lnTo>
-                  <a:pt x="4458180" y="1271278"/>
-                </a:lnTo>
-                <a:lnTo>
-                  <a:pt x="0" y="1271278"/>
+                  <a:pt x="2683548" y="0"/>
+                </a:lnTo>
+                <a:lnTo>
+                  <a:pt x="2683548" y="765230"/>
+                </a:lnTo>
+                <a:lnTo>
+                  <a:pt x="0" y="765230"/>
                 </a:lnTo>
                 <a:lnTo>
                   <a:pt x="0" y="0"/>
@@ -3690,14 +3912,14 @@
       </p:sp>
       <p:sp>
         <p:nvSpPr>
-          <p:cNvPr name="TextBox 14" id="14"/>
+          <p:cNvPr name="TextBox 19" id="19"/>
           <p:cNvSpPr txBox="true"/>
           <p:nvPr/>
         </p:nvSpPr>
         <p:spPr>
           <a:xfrm rot="0">
-            <a:off x="4509558" y="2272511"/>
-            <a:ext cx="9974003" cy="2566879"/>
+            <a:off x="4627479" y="823411"/>
+            <a:ext cx="9738162" cy="476250"/>
           </a:xfrm>
           <a:prstGeom prst="rect">
             <a:avLst/>
@@ -3711,11 +3933,11 @@
           <a:p>
             <a:pPr algn="ctr">
               <a:lnSpc>
-                <a:spcPts val="6693"/>
+                <a:spcPts val="3675"/>
               </a:lnSpc>
             </a:pPr>
             <a:r>
-              <a:rPr lang="en-US" b="true" sz="6374">
+              <a:rPr lang="en-US" sz="3500" b="true">
                 <a:solidFill>
                   <a:srgbClr val="7DB2FF"/>
                 </a:solidFill>
@@ -3724,20 +3946,20 @@
                 <a:cs typeface="Amaranth Bold"/>
                 <a:sym typeface="Amaranth Bold"/>
               </a:rPr>
-              <a:t>PHÂN ĐOẠN KHỐI U GLIOMA TỪ MRI ĐA KÊNH BẰNG U-NET</a:t>
+              <a:t>Trường Đại học Công nghiệp TP. HCM</a:t>
             </a:r>
           </a:p>
         </p:txBody>
       </p:sp>
       <p:sp>
         <p:nvSpPr>
-          <p:cNvPr name="TextBox 15" id="15"/>
+          <p:cNvPr name="TextBox 20" id="20"/>
           <p:cNvSpPr txBox="true"/>
           <p:nvPr/>
         </p:nvSpPr>
         <p:spPr>
           <a:xfrm rot="0">
-            <a:off x="4846953" y="5739096"/>
+            <a:off x="4846953" y="5020181"/>
             <a:ext cx="9107775" cy="533400"/>
           </a:xfrm>
           <a:prstGeom prst="rect">
@@ -3756,146 +3978,16 @@
               </a:lnSpc>
             </a:pPr>
             <a:r>
-              <a:rPr lang="en-US" b="true" sz="3999">
+              <a:rPr lang="en-US" sz="3999">
                 <a:solidFill>
                   <a:srgbClr val="7DB2FF"/>
                 </a:solidFill>
-                <a:latin typeface="Amaranth Bold"/>
-                <a:ea typeface="Amaranth Bold"/>
-                <a:cs typeface="Amaranth Bold"/>
-                <a:sym typeface="Amaranth Bold"/>
-              </a:rPr>
-              <a:t>21114061 - Phan Mạnh Tân</a:t>
-            </a:r>
-          </a:p>
-        </p:txBody>
-      </p:sp>
-      <p:sp>
-        <p:nvSpPr>
-          <p:cNvPr name="TextBox 16" id="16"/>
-          <p:cNvSpPr txBox="true"/>
-          <p:nvPr/>
-        </p:nvSpPr>
-        <p:spPr>
-          <a:xfrm rot="0">
-            <a:off x="5038391" y="6605871"/>
-            <a:ext cx="9107775" cy="533400"/>
-          </a:xfrm>
-          <a:prstGeom prst="rect">
-            <a:avLst/>
-          </a:prstGeom>
-        </p:spPr>
-        <p:txBody>
-          <a:bodyPr anchor="t" rtlCol="false" tIns="0" lIns="0" bIns="0" rIns="0">
-            <a:spAutoFit/>
-          </a:bodyPr>
-          <a:lstStyle/>
-          <a:p>
-            <a:pPr algn="ctr">
-              <a:lnSpc>
-                <a:spcPts val="4199"/>
-              </a:lnSpc>
-            </a:pPr>
-            <a:r>
-              <a:rPr lang="en-US" b="true" sz="3999">
-                <a:solidFill>
-                  <a:srgbClr val="7DB2FF"/>
-                </a:solidFill>
-                <a:latin typeface="Amaranth Bold"/>
-                <a:ea typeface="Amaranth Bold"/>
-                <a:cs typeface="Amaranth Bold"/>
-                <a:sym typeface="Amaranth Bold"/>
-              </a:rPr>
-              <a:t>21121741 - Nguyễn Văn Thương</a:t>
-            </a:r>
-          </a:p>
-        </p:txBody>
-      </p:sp>
-      <p:sp>
-        <p:nvSpPr>
-          <p:cNvPr name="TextBox 17" id="17"/>
-          <p:cNvSpPr txBox="true"/>
-          <p:nvPr/>
-        </p:nvSpPr>
-        <p:spPr>
-          <a:xfrm rot="0">
-            <a:off x="4903373" y="8101939"/>
-            <a:ext cx="9580188" cy="1057275"/>
-          </a:xfrm>
-          <a:prstGeom prst="rect">
-            <a:avLst/>
-          </a:prstGeom>
-        </p:spPr>
-        <p:txBody>
-          <a:bodyPr anchor="t" rtlCol="false" tIns="0" lIns="0" bIns="0" rIns="0">
-            <a:spAutoFit/>
-          </a:bodyPr>
-          <a:lstStyle/>
-          <a:p>
-            <a:pPr algn="ctr">
-              <a:lnSpc>
-                <a:spcPts val="4199"/>
-              </a:lnSpc>
-            </a:pPr>
-            <a:r>
-              <a:rPr lang="en-US" b="true" sz="3999">
-                <a:solidFill>
-                  <a:srgbClr val="7DB2FF"/>
-                </a:solidFill>
-                <a:latin typeface="Amaranth Bold"/>
-                <a:ea typeface="Amaranth Bold"/>
-                <a:cs typeface="Amaranth Bold"/>
-                <a:sym typeface="Amaranth Bold"/>
-              </a:rPr>
-              <a:t>GIẢNG VIÊN : ThS.Võ Quang Hoàng Khang</a:t>
-            </a:r>
-          </a:p>
-          <a:p>
-            <a:pPr algn="ctr">
-              <a:lnSpc>
-                <a:spcPts val="4199"/>
-              </a:lnSpc>
-            </a:pPr>
-          </a:p>
-        </p:txBody>
-      </p:sp>
-      <p:sp>
-        <p:nvSpPr>
-          <p:cNvPr name="TextBox 18" id="18"/>
-          <p:cNvSpPr txBox="true"/>
-          <p:nvPr/>
-        </p:nvSpPr>
-        <p:spPr>
-          <a:xfrm rot="0">
-            <a:off x="6763199" y="1184936"/>
-            <a:ext cx="5466721" cy="475332"/>
-          </a:xfrm>
-          <a:prstGeom prst="rect">
-            <a:avLst/>
-          </a:prstGeom>
-        </p:spPr>
-        <p:txBody>
-          <a:bodyPr anchor="t" rtlCol="false" tIns="0" lIns="0" bIns="0" rIns="0">
-            <a:spAutoFit/>
-          </a:bodyPr>
-          <a:lstStyle/>
-          <a:p>
-            <a:pPr algn="ctr">
-              <a:lnSpc>
-                <a:spcPts val="3668"/>
-              </a:lnSpc>
-            </a:pPr>
-            <a:r>
-              <a:rPr lang="en-US" b="true" sz="3493">
-                <a:solidFill>
-                  <a:srgbClr val="7DB2FF"/>
-                </a:solidFill>
-                <a:latin typeface="Amaranth Bold"/>
-                <a:ea typeface="Amaranth Bold"/>
-                <a:cs typeface="Amaranth Bold"/>
-                <a:sym typeface="Amaranth Bold"/>
-              </a:rPr>
-              <a:t>Khoa Công Nghệ Thông Tin</a:t>
+                <a:latin typeface="Amaranth"/>
+                <a:ea typeface="Amaranth"/>
+                <a:cs typeface="Amaranth"/>
+                <a:sym typeface="Amaranth"/>
+              </a:rPr>
+              <a:t>Mã nhóm: 069</a:t>
             </a:r>
           </a:p>
         </p:txBody>
@@ -3993,7 +4085,7 @@
         </p:nvSpPr>
         <p:spPr>
           <a:xfrm flipH="false" flipV="false" rot="0">
-            <a:off x="-1242152" y="-1510729"/>
+            <a:off x="-1632185" y="-1480712"/>
             <a:ext cx="3758453" cy="3758453"/>
           </a:xfrm>
           <a:custGeom>
@@ -4150,8 +4242,8 @@
         </p:nvSpPr>
         <p:spPr>
           <a:xfrm flipH="false" flipV="true" rot="0">
-            <a:off x="-746708" y="-439976"/>
-            <a:ext cx="3131075" cy="1810331"/>
+            <a:off x="15635604" y="9222587"/>
+            <a:ext cx="2870265" cy="1317378"/>
           </a:xfrm>
           <a:custGeom>
             <a:avLst/>
@@ -4160,21 +4252,21 @@
             <a:cxnLst/>
             <a:rect r="r" b="b" t="t" l="l"/>
             <a:pathLst>
-              <a:path h="1810331" w="3131075">
+              <a:path h="1317378" w="2870265">
                 <a:moveTo>
-                  <a:pt x="0" y="1810331"/>
+                  <a:pt x="0" y="1317378"/>
                 </a:moveTo>
                 <a:lnTo>
-                  <a:pt x="3131075" y="1810331"/>
-                </a:lnTo>
-                <a:lnTo>
-                  <a:pt x="3131075" y="0"/>
-                </a:lnTo>
-                <a:lnTo>
-                  <a:pt x="0" y="0"/>
-                </a:lnTo>
-                <a:lnTo>
-                  <a:pt x="0" y="1810331"/>
+                  <a:pt x="2870265" y="1317378"/>
+                </a:lnTo>
+                <a:lnTo>
+                  <a:pt x="2870265" y="0"/>
+                </a:lnTo>
+                <a:lnTo>
+                  <a:pt x="0" y="0"/>
+                </a:lnTo>
+                <a:lnTo>
+                  <a:pt x="0" y="1317378"/>
                 </a:lnTo>
                 <a:close/>
               </a:path>
@@ -4201,9 +4293,9 @@
           <p:nvPr/>
         </p:nvSpPr>
         <p:spPr>
-          <a:xfrm flipH="false" flipV="true" rot="0">
-            <a:off x="15635604" y="9222587"/>
-            <a:ext cx="2870265" cy="1317378"/>
+          <a:xfrm flipH="false" flipV="false" rot="0">
+            <a:off x="8953681" y="1462260"/>
+            <a:ext cx="8115300" cy="2034264"/>
           </a:xfrm>
           <a:custGeom>
             <a:avLst/>
@@ -4212,34 +4304,28 @@
             <a:cxnLst/>
             <a:rect r="r" b="b" t="t" l="l"/>
             <a:pathLst>
-              <a:path h="1317378" w="2870265">
+              <a:path h="2034264" w="8115300">
                 <a:moveTo>
-                  <a:pt x="0" y="1317378"/>
+                  <a:pt x="0" y="0"/>
                 </a:moveTo>
                 <a:lnTo>
-                  <a:pt x="2870265" y="1317378"/>
-                </a:lnTo>
-                <a:lnTo>
-                  <a:pt x="2870265" y="0"/>
-                </a:lnTo>
-                <a:lnTo>
-                  <a:pt x="0" y="0"/>
-                </a:lnTo>
-                <a:lnTo>
-                  <a:pt x="0" y="1317378"/>
+                  <a:pt x="8115300" y="0"/>
+                </a:lnTo>
+                <a:lnTo>
+                  <a:pt x="8115300" y="2034264"/>
+                </a:lnTo>
+                <a:lnTo>
+                  <a:pt x="0" y="2034264"/>
+                </a:lnTo>
+                <a:lnTo>
+                  <a:pt x="0" y="0"/>
                 </a:lnTo>
                 <a:close/>
               </a:path>
             </a:pathLst>
           </a:custGeom>
           <a:blipFill>
-            <a:blip r:embed="rId10">
-              <a:extLst>
-                <a:ext uri="{96DAC541-7B7A-43D3-8B79-37D633B846F1}">
-                  <asvg:svgBlip xmlns:asvg="http://schemas.microsoft.com/office/drawing/2016/SVG/main" r:embed="rId11"/>
-                </a:ext>
-              </a:extLst>
-            </a:blip>
+            <a:blip r:embed="rId10"/>
             <a:stretch>
               <a:fillRect l="0" t="0" r="0" b="0"/>
             </a:stretch>
@@ -4254,8 +4340,8 @@
         </p:nvSpPr>
         <p:spPr>
           <a:xfrm flipH="false" flipV="false" rot="0">
-            <a:off x="2384367" y="2216629"/>
-            <a:ext cx="6076915" cy="7410871"/>
+            <a:off x="8953681" y="3905916"/>
+            <a:ext cx="8117056" cy="5316671"/>
           </a:xfrm>
           <a:custGeom>
             <a:avLst/>
@@ -4264,18 +4350,164 @@
             <a:cxnLst/>
             <a:rect r="r" b="b" t="t" l="l"/>
             <a:pathLst>
-              <a:path h="7410871" w="6076915">
+              <a:path h="5316671" w="8117056">
                 <a:moveTo>
                   <a:pt x="0" y="0"/>
                 </a:moveTo>
                 <a:lnTo>
-                  <a:pt x="6076914" y="0"/>
-                </a:lnTo>
-                <a:lnTo>
-                  <a:pt x="6076914" y="7410871"/>
-                </a:lnTo>
-                <a:lnTo>
-                  <a:pt x="0" y="7410871"/>
+                  <a:pt x="8117056" y="0"/>
+                </a:lnTo>
+                <a:lnTo>
+                  <a:pt x="8117056" y="5316671"/>
+                </a:lnTo>
+                <a:lnTo>
+                  <a:pt x="0" y="5316671"/>
+                </a:lnTo>
+                <a:lnTo>
+                  <a:pt x="0" y="0"/>
+                </a:lnTo>
+                <a:close/>
+              </a:path>
+            </a:pathLst>
+          </a:custGeom>
+          <a:blipFill>
+            <a:blip r:embed="rId11"/>
+            <a:stretch>
+              <a:fillRect l="0" t="0" r="0" b="0"/>
+            </a:stretch>
+          </a:blipFill>
+        </p:spPr>
+      </p:sp>
+      <p:sp>
+        <p:nvSpPr>
+          <p:cNvPr name="TextBox 9" id="9"/>
+          <p:cNvSpPr txBox="true"/>
+          <p:nvPr/>
+        </p:nvSpPr>
+        <p:spPr>
+          <a:xfrm rot="0">
+            <a:off x="1689540" y="122410"/>
+            <a:ext cx="14908919" cy="936625"/>
+          </a:xfrm>
+          <a:prstGeom prst="rect">
+            <a:avLst/>
+          </a:prstGeom>
+        </p:spPr>
+        <p:txBody>
+          <a:bodyPr anchor="t" rtlCol="false" tIns="0" lIns="0" bIns="0" rIns="0">
+            <a:spAutoFit/>
+          </a:bodyPr>
+          <a:lstStyle/>
+          <a:p>
+            <a:pPr algn="ctr">
+              <a:lnSpc>
+                <a:spcPts val="7699"/>
+              </a:lnSpc>
+              <a:spcBef>
+                <a:spcPct val="0"/>
+              </a:spcBef>
+            </a:pPr>
+            <a:r>
+              <a:rPr lang="en-US" b="true" sz="5499">
+                <a:solidFill>
+                  <a:srgbClr val="17548F"/>
+                </a:solidFill>
+                <a:latin typeface="Faustina Bold"/>
+                <a:ea typeface="Faustina Bold"/>
+                <a:cs typeface="Faustina Bold"/>
+                <a:sym typeface="Faustina Bold"/>
+              </a:rPr>
+              <a:t>7</a:t>
+            </a:r>
+            <a:r>
+              <a:rPr lang="en-US" b="true" sz="5499">
+                <a:solidFill>
+                  <a:srgbClr val="17548F"/>
+                </a:solidFill>
+                <a:latin typeface="Faustina Bold"/>
+                <a:ea typeface="Faustina Bold"/>
+                <a:cs typeface="Faustina Bold"/>
+                <a:sym typeface="Faustina Bold"/>
+              </a:rPr>
+              <a:t>. Thực nghiệm - Kết quả </a:t>
+            </a:r>
+          </a:p>
+        </p:txBody>
+      </p:sp>
+      <p:sp>
+        <p:nvSpPr>
+          <p:cNvPr name="TextBox 10" id="10"/>
+          <p:cNvSpPr txBox="true"/>
+          <p:nvPr/>
+        </p:nvSpPr>
+        <p:spPr>
+          <a:xfrm rot="0">
+            <a:off x="1449652" y="2309573"/>
+            <a:ext cx="6550323" cy="1462405"/>
+          </a:xfrm>
+          <a:prstGeom prst="rect">
+            <a:avLst/>
+          </a:prstGeom>
+        </p:spPr>
+        <p:txBody>
+          <a:bodyPr anchor="t" rtlCol="false" tIns="0" lIns="0" bIns="0" rIns="0">
+            <a:spAutoFit/>
+          </a:bodyPr>
+          <a:lstStyle/>
+          <a:p>
+            <a:pPr algn="just">
+              <a:lnSpc>
+                <a:spcPts val="3919"/>
+              </a:lnSpc>
+              <a:spcBef>
+                <a:spcPct val="0"/>
+              </a:spcBef>
+            </a:pPr>
+            <a:r>
+              <a:rPr lang="en-US" b="true" sz="2799">
+                <a:solidFill>
+                  <a:srgbClr val="17548F"/>
+                </a:solidFill>
+                <a:latin typeface="Faustina Bold"/>
+                <a:ea typeface="Faustina Bold"/>
+                <a:cs typeface="Faustina Bold"/>
+                <a:sym typeface="Faustina Bold"/>
+              </a:rPr>
+              <a:t>Dữ liệu: Gồm 1000 tập brats được chuyển thành .h5 Chia tập 70% Train - 20% Val - 10% Test. </a:t>
+            </a:r>
+          </a:p>
+        </p:txBody>
+      </p:sp>
+      <p:sp>
+        <p:nvSpPr>
+          <p:cNvPr name="Freeform 11" id="11"/>
+          <p:cNvSpPr/>
+          <p:nvPr/>
+        </p:nvSpPr>
+        <p:spPr>
+          <a:xfrm flipH="false" flipV="false" rot="0">
+            <a:off x="247041" y="263470"/>
+            <a:ext cx="2683548" cy="765230"/>
+          </a:xfrm>
+          <a:custGeom>
+            <a:avLst/>
+            <a:gdLst/>
+            <a:ahLst/>
+            <a:cxnLst/>
+            <a:rect r="r" b="b" t="t" l="l"/>
+            <a:pathLst>
+              <a:path h="765230" w="2683548">
+                <a:moveTo>
+                  <a:pt x="0" y="0"/>
+                </a:moveTo>
+                <a:lnTo>
+                  <a:pt x="2683548" y="0"/>
+                </a:lnTo>
+                <a:lnTo>
+                  <a:pt x="2683548" y="765230"/>
+                </a:lnTo>
+                <a:lnTo>
+                  <a:pt x="0" y="765230"/>
                 </a:lnTo>
                 <a:lnTo>
                   <a:pt x="0" y="0"/>
@@ -4294,60 +4526,14 @@
       </p:sp>
       <p:sp>
         <p:nvSpPr>
-          <p:cNvPr name="Freeform 9" id="9"/>
-          <p:cNvSpPr/>
-          <p:nvPr/>
-        </p:nvSpPr>
-        <p:spPr>
-          <a:xfrm flipH="false" flipV="false" rot="0">
-            <a:off x="9144000" y="2275221"/>
-            <a:ext cx="6397339" cy="7410871"/>
-          </a:xfrm>
-          <a:custGeom>
-            <a:avLst/>
-            <a:gdLst/>
-            <a:ahLst/>
-            <a:cxnLst/>
-            <a:rect r="r" b="b" t="t" l="l"/>
-            <a:pathLst>
-              <a:path h="7410871" w="6397339">
-                <a:moveTo>
-                  <a:pt x="0" y="0"/>
-                </a:moveTo>
-                <a:lnTo>
-                  <a:pt x="6397339" y="0"/>
-                </a:lnTo>
-                <a:lnTo>
-                  <a:pt x="6397339" y="7410872"/>
-                </a:lnTo>
-                <a:lnTo>
-                  <a:pt x="0" y="7410872"/>
-                </a:lnTo>
-                <a:lnTo>
-                  <a:pt x="0" y="0"/>
-                </a:lnTo>
-                <a:close/>
-              </a:path>
-            </a:pathLst>
-          </a:custGeom>
-          <a:blipFill>
-            <a:blip r:embed="rId13"/>
-            <a:stretch>
-              <a:fillRect l="0" t="0" r="0" b="0"/>
-            </a:stretch>
-          </a:blipFill>
-        </p:spPr>
-      </p:sp>
-      <p:sp>
-        <p:nvSpPr>
-          <p:cNvPr name="TextBox 10" id="10"/>
+          <p:cNvPr name="TextBox 12" id="12"/>
           <p:cNvSpPr txBox="true"/>
           <p:nvPr/>
         </p:nvSpPr>
         <p:spPr>
           <a:xfrm rot="0">
-            <a:off x="1860180" y="-133350"/>
-            <a:ext cx="14567640" cy="1193800"/>
+            <a:off x="1449652" y="4190349"/>
+            <a:ext cx="6550323" cy="4929505"/>
           </a:xfrm>
           <a:prstGeom prst="rect">
             <a:avLst/>
@@ -4359,51 +4545,130 @@
           </a:bodyPr>
           <a:lstStyle/>
           <a:p>
-            <a:pPr algn="ctr">
+            <a:pPr algn="just">
               <a:lnSpc>
-                <a:spcPts val="9799"/>
+                <a:spcPts val="3919"/>
+              </a:lnSpc>
+            </a:pPr>
+            <a:r>
+              <a:rPr lang="en-US" sz="2799" b="true">
+                <a:solidFill>
+                  <a:srgbClr val="17548F"/>
+                </a:solidFill>
+                <a:latin typeface="Faustina Bold"/>
+                <a:ea typeface="Faustina Bold"/>
+                <a:cs typeface="Faustina Bold"/>
+                <a:sym typeface="Faustina Bold"/>
+              </a:rPr>
+              <a:t>Segmentation labels:</a:t>
+            </a:r>
+          </a:p>
+          <a:p>
+            <a:pPr algn="just" marL="604519" indent="-302260" lvl="1">
+              <a:lnSpc>
+                <a:spcPts val="3919"/>
+              </a:lnSpc>
+              <a:buFont typeface="Arial"/>
+              <a:buChar char="•"/>
+            </a:pPr>
+            <a:r>
+              <a:rPr lang="en-US" b="true" sz="2799">
+                <a:solidFill>
+                  <a:srgbClr val="17548F"/>
+                </a:solidFill>
+                <a:latin typeface="Faustina Bold"/>
+                <a:ea typeface="Faustina Bold"/>
+                <a:cs typeface="Faustina Bold"/>
+                <a:sym typeface="Faustina Bold"/>
+              </a:rPr>
+              <a:t>Tumor core (TC): Khu vực của khối u chính.</a:t>
+            </a:r>
+          </a:p>
+          <a:p>
+            <a:pPr algn="just" marL="604519" indent="-302260" lvl="1">
+              <a:lnSpc>
+                <a:spcPts val="3919"/>
+              </a:lnSpc>
+              <a:buFont typeface="Arial"/>
+              <a:buChar char="•"/>
+            </a:pPr>
+            <a:r>
+              <a:rPr lang="en-US" b="true" sz="2799">
+                <a:solidFill>
+                  <a:srgbClr val="17548F"/>
+                </a:solidFill>
+                <a:latin typeface="Faustina Bold"/>
+                <a:ea typeface="Faustina Bold"/>
+                <a:cs typeface="Faustina Bold"/>
+                <a:sym typeface="Faustina Bold"/>
+              </a:rPr>
+              <a:t>Enhancing tumor (ET): Khu vực của khối u sau khi tiêm thuốc tương phản.</a:t>
+            </a:r>
+          </a:p>
+          <a:p>
+            <a:pPr algn="just" marL="604519" indent="-302260" lvl="1">
+              <a:lnSpc>
+                <a:spcPts val="3919"/>
+              </a:lnSpc>
+              <a:buFont typeface="Arial"/>
+              <a:buChar char="•"/>
+            </a:pPr>
+            <a:r>
+              <a:rPr lang="en-US" b="true" sz="2799">
+                <a:solidFill>
+                  <a:srgbClr val="17548F"/>
+                </a:solidFill>
+                <a:latin typeface="Faustina Bold"/>
+                <a:ea typeface="Faustina Bold"/>
+                <a:cs typeface="Faustina Bold"/>
+                <a:sym typeface="Faustina Bold"/>
+              </a:rPr>
+              <a:t>Peritumoral edema (ED): Khu vực sưng tấy xung quanh khối u.</a:t>
+            </a:r>
+          </a:p>
+          <a:p>
+            <a:pPr algn="just" marL="604519" indent="-302260" lvl="1">
+              <a:lnSpc>
+                <a:spcPts val="3919"/>
+              </a:lnSpc>
+              <a:buFont typeface="Arial"/>
+              <a:buChar char="•"/>
+            </a:pPr>
+            <a:r>
+              <a:rPr lang="en-US" b="true" sz="2799">
+                <a:solidFill>
+                  <a:srgbClr val="17548F"/>
+                </a:solidFill>
+                <a:latin typeface="Faustina Bold"/>
+                <a:ea typeface="Faustina Bold"/>
+                <a:cs typeface="Faustina Bold"/>
+                <a:sym typeface="Faustina Bold"/>
+              </a:rPr>
+              <a:t>Background: Các khu vực không phải khối u.</a:t>
+            </a:r>
+          </a:p>
+          <a:p>
+            <a:pPr algn="just">
+              <a:lnSpc>
+                <a:spcPts val="3919"/>
               </a:lnSpc>
               <a:spcBef>
                 <a:spcPct val="0"/>
               </a:spcBef>
             </a:pPr>
-            <a:r>
-              <a:rPr lang="en-US" b="true" sz="6999">
-                <a:solidFill>
-                  <a:srgbClr val="17548F"/>
-                </a:solidFill>
-                <a:latin typeface="Faustina Bold"/>
-                <a:ea typeface="Faustina Bold"/>
-                <a:cs typeface="Faustina Bold"/>
-                <a:sym typeface="Faustina Bold"/>
-              </a:rPr>
-              <a:t>6</a:t>
-            </a:r>
-            <a:r>
-              <a:rPr lang="en-US" b="true" sz="6999">
-                <a:solidFill>
-                  <a:srgbClr val="17548F"/>
-                </a:solidFill>
-                <a:latin typeface="Faustina Bold"/>
-                <a:ea typeface="Faustina Bold"/>
-                <a:cs typeface="Faustina Bold"/>
-                <a:sym typeface="Faustina Bold"/>
-              </a:rPr>
-              <a:t>. Thực nghiệm - Kết quả </a:t>
-            </a:r>
           </a:p>
         </p:txBody>
       </p:sp>
       <p:sp>
         <p:nvSpPr>
-          <p:cNvPr name="TextBox 11" id="11"/>
+          <p:cNvPr name="TextBox 13" id="13"/>
           <p:cNvSpPr txBox="true"/>
           <p:nvPr/>
         </p:nvSpPr>
         <p:spPr>
           <a:xfrm rot="0">
-            <a:off x="1997711" y="1323808"/>
-            <a:ext cx="6564621" cy="645171"/>
+            <a:off x="1449652" y="1386060"/>
+            <a:ext cx="6550323" cy="606425"/>
           </a:xfrm>
           <a:prstGeom prst="rect">
             <a:avLst/>
@@ -4415,69 +4680,25 @@
           </a:bodyPr>
           <a:lstStyle/>
           <a:p>
-            <a:pPr algn="ctr">
+            <a:pPr algn="just">
               <a:lnSpc>
-                <a:spcPts val="5389"/>
+                <a:spcPts val="4900"/>
               </a:lnSpc>
               <a:spcBef>
                 <a:spcPct val="0"/>
               </a:spcBef>
             </a:pPr>
             <a:r>
-              <a:rPr lang="en-US" b="true" sz="3849">
-                <a:solidFill>
-                  <a:srgbClr val="17548F"/>
-                </a:solidFill>
-                <a:latin typeface="Faustina Bold"/>
-                <a:ea typeface="Faustina Bold"/>
-                <a:cs typeface="Faustina Bold"/>
-                <a:sym typeface="Faustina Bold"/>
-              </a:rPr>
-              <a:t>Thông số train</a:t>
-            </a:r>
-          </a:p>
-        </p:txBody>
-      </p:sp>
-      <p:sp>
-        <p:nvSpPr>
-          <p:cNvPr name="TextBox 12" id="12"/>
-          <p:cNvSpPr txBox="true"/>
-          <p:nvPr/>
-        </p:nvSpPr>
-        <p:spPr>
-          <a:xfrm rot="0">
-            <a:off x="8898652" y="1353825"/>
-            <a:ext cx="6564621" cy="645171"/>
-          </a:xfrm>
-          <a:prstGeom prst="rect">
-            <a:avLst/>
-          </a:prstGeom>
-        </p:spPr>
-        <p:txBody>
-          <a:bodyPr anchor="t" rtlCol="false" tIns="0" lIns="0" bIns="0" rIns="0">
-            <a:spAutoFit/>
-          </a:bodyPr>
-          <a:lstStyle/>
-          <a:p>
-            <a:pPr algn="ctr">
-              <a:lnSpc>
-                <a:spcPts val="5389"/>
-              </a:lnSpc>
-              <a:spcBef>
-                <a:spcPct val="0"/>
-              </a:spcBef>
-            </a:pPr>
-            <a:r>
-              <a:rPr lang="en-US" b="true" sz="3849">
-                <a:solidFill>
-                  <a:srgbClr val="17548F"/>
-                </a:solidFill>
-                <a:latin typeface="Faustina Bold"/>
-                <a:ea typeface="Faustina Bold"/>
-                <a:cs typeface="Faustina Bold"/>
-                <a:sym typeface="Faustina Bold"/>
-              </a:rPr>
-              <a:t>Kết quả train</a:t>
+              <a:rPr lang="en-US" b="true" sz="3500">
+                <a:solidFill>
+                  <a:srgbClr val="17548F"/>
+                </a:solidFill>
+                <a:latin typeface="Faustina Bold"/>
+                <a:ea typeface="Faustina Bold"/>
+                <a:cs typeface="Faustina Bold"/>
+                <a:sym typeface="Faustina Bold"/>
+              </a:rPr>
+              <a:t>Bộ dữ liệu</a:t>
             </a:r>
           </a:p>
         </p:txBody>
@@ -4575,7 +4796,7 @@
         </p:nvSpPr>
         <p:spPr>
           <a:xfrm flipH="false" flipV="false" rot="0">
-            <a:off x="-1632185" y="-1480712"/>
+            <a:off x="-1242152" y="-1510729"/>
             <a:ext cx="3758453" cy="3758453"/>
           </a:xfrm>
           <a:custGeom>
@@ -4732,8 +4953,8 @@
         </p:nvSpPr>
         <p:spPr>
           <a:xfrm flipH="false" flipV="true" rot="0">
-            <a:off x="-746708" y="-439976"/>
-            <a:ext cx="3131075" cy="1810331"/>
+            <a:off x="15635604" y="9222587"/>
+            <a:ext cx="2870265" cy="1317378"/>
           </a:xfrm>
           <a:custGeom>
             <a:avLst/>
@@ -4742,21 +4963,21 @@
             <a:cxnLst/>
             <a:rect r="r" b="b" t="t" l="l"/>
             <a:pathLst>
-              <a:path h="1810331" w="3131075">
+              <a:path h="1317378" w="2870265">
                 <a:moveTo>
-                  <a:pt x="0" y="1810331"/>
+                  <a:pt x="0" y="1317378"/>
                 </a:moveTo>
                 <a:lnTo>
-                  <a:pt x="3131075" y="1810331"/>
-                </a:lnTo>
-                <a:lnTo>
-                  <a:pt x="3131075" y="0"/>
-                </a:lnTo>
-                <a:lnTo>
-                  <a:pt x="0" y="0"/>
-                </a:lnTo>
-                <a:lnTo>
-                  <a:pt x="0" y="1810331"/>
+                  <a:pt x="2870265" y="1317378"/>
+                </a:lnTo>
+                <a:lnTo>
+                  <a:pt x="2870265" y="0"/>
+                </a:lnTo>
+                <a:lnTo>
+                  <a:pt x="0" y="0"/>
+                </a:lnTo>
+                <a:lnTo>
+                  <a:pt x="0" y="1317378"/>
                 </a:lnTo>
                 <a:close/>
               </a:path>
@@ -4783,9 +5004,9 @@
           <p:nvPr/>
         </p:nvSpPr>
         <p:spPr>
-          <a:xfrm flipH="false" flipV="true" rot="0">
-            <a:off x="15635604" y="9222587"/>
-            <a:ext cx="2870265" cy="1317378"/>
+          <a:xfrm flipH="false" flipV="false" rot="0">
+            <a:off x="2384367" y="2444846"/>
+            <a:ext cx="6076915" cy="7410871"/>
           </a:xfrm>
           <a:custGeom>
             <a:avLst/>
@@ -4794,34 +5015,28 @@
             <a:cxnLst/>
             <a:rect r="r" b="b" t="t" l="l"/>
             <a:pathLst>
-              <a:path h="1317378" w="2870265">
+              <a:path h="7410871" w="6076915">
                 <a:moveTo>
-                  <a:pt x="0" y="1317378"/>
+                  <a:pt x="0" y="0"/>
                 </a:moveTo>
                 <a:lnTo>
-                  <a:pt x="2870265" y="1317378"/>
-                </a:lnTo>
-                <a:lnTo>
-                  <a:pt x="2870265" y="0"/>
-                </a:lnTo>
-                <a:lnTo>
-                  <a:pt x="0" y="0"/>
-                </a:lnTo>
-                <a:lnTo>
-                  <a:pt x="0" y="1317378"/>
+                  <a:pt x="6076914" y="0"/>
+                </a:lnTo>
+                <a:lnTo>
+                  <a:pt x="6076914" y="7410872"/>
+                </a:lnTo>
+                <a:lnTo>
+                  <a:pt x="0" y="7410872"/>
+                </a:lnTo>
+                <a:lnTo>
+                  <a:pt x="0" y="0"/>
                 </a:lnTo>
                 <a:close/>
               </a:path>
             </a:pathLst>
           </a:custGeom>
           <a:blipFill>
-            <a:blip r:embed="rId10">
-              <a:extLst>
-                <a:ext uri="{96DAC541-7B7A-43D3-8B79-37D633B846F1}">
-                  <asvg:svgBlip xmlns:asvg="http://schemas.microsoft.com/office/drawing/2016/SVG/main" r:embed="rId11"/>
-                </a:ext>
-              </a:extLst>
-            </a:blip>
+            <a:blip r:embed="rId10"/>
             <a:stretch>
               <a:fillRect l="0" t="0" r="0" b="0"/>
             </a:stretch>
@@ -4836,8 +5051,8 @@
         </p:nvSpPr>
         <p:spPr>
           <a:xfrm flipH="false" flipV="false" rot="0">
-            <a:off x="248934" y="1226844"/>
-            <a:ext cx="5780370" cy="3843531"/>
+            <a:off x="9144000" y="2444846"/>
+            <a:ext cx="6397339" cy="7410871"/>
           </a:xfrm>
           <a:custGeom>
             <a:avLst/>
@@ -4846,18 +5061,208 @@
             <a:cxnLst/>
             <a:rect r="r" b="b" t="t" l="l"/>
             <a:pathLst>
-              <a:path h="3843531" w="5780370">
+              <a:path h="7410871" w="6397339">
                 <a:moveTo>
                   <a:pt x="0" y="0"/>
                 </a:moveTo>
                 <a:lnTo>
-                  <a:pt x="5780370" y="0"/>
-                </a:lnTo>
-                <a:lnTo>
-                  <a:pt x="5780370" y="3843531"/>
-                </a:lnTo>
-                <a:lnTo>
-                  <a:pt x="0" y="3843531"/>
+                  <a:pt x="6397339" y="0"/>
+                </a:lnTo>
+                <a:lnTo>
+                  <a:pt x="6397339" y="7410872"/>
+                </a:lnTo>
+                <a:lnTo>
+                  <a:pt x="0" y="7410872"/>
+                </a:lnTo>
+                <a:lnTo>
+                  <a:pt x="0" y="0"/>
+                </a:lnTo>
+                <a:close/>
+              </a:path>
+            </a:pathLst>
+          </a:custGeom>
+          <a:blipFill>
+            <a:blip r:embed="rId11"/>
+            <a:stretch>
+              <a:fillRect l="0" t="0" r="0" b="0"/>
+            </a:stretch>
+          </a:blipFill>
+        </p:spPr>
+      </p:sp>
+      <p:sp>
+        <p:nvSpPr>
+          <p:cNvPr name="TextBox 9" id="9"/>
+          <p:cNvSpPr txBox="true"/>
+          <p:nvPr/>
+        </p:nvSpPr>
+        <p:spPr>
+          <a:xfrm rot="0">
+            <a:off x="1860180" y="250658"/>
+            <a:ext cx="14567640" cy="936625"/>
+          </a:xfrm>
+          <a:prstGeom prst="rect">
+            <a:avLst/>
+          </a:prstGeom>
+        </p:spPr>
+        <p:txBody>
+          <a:bodyPr anchor="t" rtlCol="false" tIns="0" lIns="0" bIns="0" rIns="0">
+            <a:spAutoFit/>
+          </a:bodyPr>
+          <a:lstStyle/>
+          <a:p>
+            <a:pPr algn="ctr">
+              <a:lnSpc>
+                <a:spcPts val="7699"/>
+              </a:lnSpc>
+              <a:spcBef>
+                <a:spcPct val="0"/>
+              </a:spcBef>
+            </a:pPr>
+            <a:r>
+              <a:rPr lang="en-US" b="true" sz="5499">
+                <a:solidFill>
+                  <a:srgbClr val="17548F"/>
+                </a:solidFill>
+                <a:latin typeface="Faustina Bold"/>
+                <a:ea typeface="Faustina Bold"/>
+                <a:cs typeface="Faustina Bold"/>
+                <a:sym typeface="Faustina Bold"/>
+              </a:rPr>
+              <a:t>7</a:t>
+            </a:r>
+            <a:r>
+              <a:rPr lang="en-US" b="true" sz="5499">
+                <a:solidFill>
+                  <a:srgbClr val="17548F"/>
+                </a:solidFill>
+                <a:latin typeface="Faustina Bold"/>
+                <a:ea typeface="Faustina Bold"/>
+                <a:cs typeface="Faustina Bold"/>
+                <a:sym typeface="Faustina Bold"/>
+              </a:rPr>
+              <a:t>. Thực nghiệm - Kết quả </a:t>
+            </a:r>
+          </a:p>
+        </p:txBody>
+      </p:sp>
+      <p:sp>
+        <p:nvSpPr>
+          <p:cNvPr name="TextBox 10" id="10"/>
+          <p:cNvSpPr txBox="true"/>
+          <p:nvPr/>
+        </p:nvSpPr>
+        <p:spPr>
+          <a:xfrm rot="0">
+            <a:off x="1997711" y="1323808"/>
+            <a:ext cx="6564621" cy="645171"/>
+          </a:xfrm>
+          <a:prstGeom prst="rect">
+            <a:avLst/>
+          </a:prstGeom>
+        </p:spPr>
+        <p:txBody>
+          <a:bodyPr anchor="t" rtlCol="false" tIns="0" lIns="0" bIns="0" rIns="0">
+            <a:spAutoFit/>
+          </a:bodyPr>
+          <a:lstStyle/>
+          <a:p>
+            <a:pPr algn="ctr">
+              <a:lnSpc>
+                <a:spcPts val="5389"/>
+              </a:lnSpc>
+              <a:spcBef>
+                <a:spcPct val="0"/>
+              </a:spcBef>
+            </a:pPr>
+            <a:r>
+              <a:rPr lang="en-US" b="true" sz="3849">
+                <a:solidFill>
+                  <a:srgbClr val="17548F"/>
+                </a:solidFill>
+                <a:latin typeface="Faustina Bold"/>
+                <a:ea typeface="Faustina Bold"/>
+                <a:cs typeface="Faustina Bold"/>
+                <a:sym typeface="Faustina Bold"/>
+              </a:rPr>
+              <a:t>Thông số train</a:t>
+            </a:r>
+          </a:p>
+        </p:txBody>
+      </p:sp>
+      <p:sp>
+        <p:nvSpPr>
+          <p:cNvPr name="TextBox 11" id="11"/>
+          <p:cNvSpPr txBox="true"/>
+          <p:nvPr/>
+        </p:nvSpPr>
+        <p:spPr>
+          <a:xfrm rot="0">
+            <a:off x="8898652" y="1353825"/>
+            <a:ext cx="6564621" cy="645171"/>
+          </a:xfrm>
+          <a:prstGeom prst="rect">
+            <a:avLst/>
+          </a:prstGeom>
+        </p:spPr>
+        <p:txBody>
+          <a:bodyPr anchor="t" rtlCol="false" tIns="0" lIns="0" bIns="0" rIns="0">
+            <a:spAutoFit/>
+          </a:bodyPr>
+          <a:lstStyle/>
+          <a:p>
+            <a:pPr algn="ctr">
+              <a:lnSpc>
+                <a:spcPts val="5389"/>
+              </a:lnSpc>
+              <a:spcBef>
+                <a:spcPct val="0"/>
+              </a:spcBef>
+            </a:pPr>
+            <a:r>
+              <a:rPr lang="en-US" b="true" sz="3849">
+                <a:solidFill>
+                  <a:srgbClr val="17548F"/>
+                </a:solidFill>
+                <a:latin typeface="Faustina Bold"/>
+                <a:ea typeface="Faustina Bold"/>
+                <a:cs typeface="Faustina Bold"/>
+                <a:sym typeface="Faustina Bold"/>
+              </a:rPr>
+              <a:t>Kết quả train</a:t>
+            </a:r>
+          </a:p>
+        </p:txBody>
+      </p:sp>
+      <p:sp>
+        <p:nvSpPr>
+          <p:cNvPr name="Freeform 12" id="12"/>
+          <p:cNvSpPr/>
+          <p:nvPr/>
+        </p:nvSpPr>
+        <p:spPr>
+          <a:xfrm flipH="false" flipV="false" rot="0">
+            <a:off x="247041" y="263470"/>
+            <a:ext cx="2683548" cy="765230"/>
+          </a:xfrm>
+          <a:custGeom>
+            <a:avLst/>
+            <a:gdLst/>
+            <a:ahLst/>
+            <a:cxnLst/>
+            <a:rect r="r" b="b" t="t" l="l"/>
+            <a:pathLst>
+              <a:path h="765230" w="2683548">
+                <a:moveTo>
+                  <a:pt x="0" y="0"/>
+                </a:moveTo>
+                <a:lnTo>
+                  <a:pt x="2683548" y="0"/>
+                </a:lnTo>
+                <a:lnTo>
+                  <a:pt x="2683548" y="765230"/>
+                </a:lnTo>
+                <a:lnTo>
+                  <a:pt x="0" y="765230"/>
                 </a:lnTo>
                 <a:lnTo>
                   <a:pt x="0" y="0"/>
@@ -4873,286 +5278,6 @@
             </a:stretch>
           </a:blipFill>
         </p:spPr>
-      </p:sp>
-      <p:sp>
-        <p:nvSpPr>
-          <p:cNvPr name="Freeform 9" id="9"/>
-          <p:cNvSpPr/>
-          <p:nvPr/>
-        </p:nvSpPr>
-        <p:spPr>
-          <a:xfrm flipH="false" flipV="false" rot="0">
-            <a:off x="12222999" y="1226844"/>
-            <a:ext cx="5833638" cy="3916656"/>
-          </a:xfrm>
-          <a:custGeom>
-            <a:avLst/>
-            <a:gdLst/>
-            <a:ahLst/>
-            <a:cxnLst/>
-            <a:rect r="r" b="b" t="t" l="l"/>
-            <a:pathLst>
-              <a:path h="3916656" w="5833638">
-                <a:moveTo>
-                  <a:pt x="0" y="0"/>
-                </a:moveTo>
-                <a:lnTo>
-                  <a:pt x="5833638" y="0"/>
-                </a:lnTo>
-                <a:lnTo>
-                  <a:pt x="5833638" y="3916656"/>
-                </a:lnTo>
-                <a:lnTo>
-                  <a:pt x="0" y="3916656"/>
-                </a:lnTo>
-                <a:lnTo>
-                  <a:pt x="0" y="0"/>
-                </a:lnTo>
-                <a:close/>
-              </a:path>
-            </a:pathLst>
-          </a:custGeom>
-          <a:blipFill>
-            <a:blip r:embed="rId13"/>
-            <a:stretch>
-              <a:fillRect l="0" t="0" r="0" b="0"/>
-            </a:stretch>
-          </a:blipFill>
-        </p:spPr>
-      </p:sp>
-      <p:sp>
-        <p:nvSpPr>
-          <p:cNvPr name="Freeform 10" id="10"/>
-          <p:cNvSpPr/>
-          <p:nvPr/>
-        </p:nvSpPr>
-        <p:spPr>
-          <a:xfrm flipH="false" flipV="false" rot="0">
-            <a:off x="5741327" y="5404561"/>
-            <a:ext cx="6805346" cy="4545724"/>
-          </a:xfrm>
-          <a:custGeom>
-            <a:avLst/>
-            <a:gdLst/>
-            <a:ahLst/>
-            <a:cxnLst/>
-            <a:rect r="r" b="b" t="t" l="l"/>
-            <a:pathLst>
-              <a:path h="4545724" w="6805346">
-                <a:moveTo>
-                  <a:pt x="0" y="0"/>
-                </a:moveTo>
-                <a:lnTo>
-                  <a:pt x="6805346" y="0"/>
-                </a:lnTo>
-                <a:lnTo>
-                  <a:pt x="6805346" y="4545724"/>
-                </a:lnTo>
-                <a:lnTo>
-                  <a:pt x="0" y="4545724"/>
-                </a:lnTo>
-                <a:lnTo>
-                  <a:pt x="0" y="0"/>
-                </a:lnTo>
-                <a:close/>
-              </a:path>
-            </a:pathLst>
-          </a:custGeom>
-          <a:blipFill>
-            <a:blip r:embed="rId14"/>
-            <a:stretch>
-              <a:fillRect l="0" t="0" r="0" b="0"/>
-            </a:stretch>
-          </a:blipFill>
-        </p:spPr>
-      </p:sp>
-      <p:sp>
-        <p:nvSpPr>
-          <p:cNvPr name="TextBox 11" id="11"/>
-          <p:cNvSpPr txBox="true"/>
-          <p:nvPr/>
-        </p:nvSpPr>
-        <p:spPr>
-          <a:xfrm rot="0">
-            <a:off x="2265859" y="-133350"/>
-            <a:ext cx="13718692" cy="1193800"/>
-          </a:xfrm>
-          <a:prstGeom prst="rect">
-            <a:avLst/>
-          </a:prstGeom>
-        </p:spPr>
-        <p:txBody>
-          <a:bodyPr anchor="t" rtlCol="false" tIns="0" lIns="0" bIns="0" rIns="0">
-            <a:spAutoFit/>
-          </a:bodyPr>
-          <a:lstStyle/>
-          <a:p>
-            <a:pPr algn="ctr">
-              <a:lnSpc>
-                <a:spcPts val="9799"/>
-              </a:lnSpc>
-              <a:spcBef>
-                <a:spcPct val="0"/>
-              </a:spcBef>
-            </a:pPr>
-            <a:r>
-              <a:rPr lang="en-US" b="true" sz="6999">
-                <a:solidFill>
-                  <a:srgbClr val="17548F"/>
-                </a:solidFill>
-                <a:latin typeface="Faustina Bold"/>
-                <a:ea typeface="Faustina Bold"/>
-                <a:cs typeface="Faustina Bold"/>
-                <a:sym typeface="Faustina Bold"/>
-              </a:rPr>
-              <a:t>6</a:t>
-            </a:r>
-            <a:r>
-              <a:rPr lang="en-US" b="true" sz="6999">
-                <a:solidFill>
-                  <a:srgbClr val="17548F"/>
-                </a:solidFill>
-                <a:latin typeface="Faustina Bold"/>
-                <a:ea typeface="Faustina Bold"/>
-                <a:cs typeface="Faustina Bold"/>
-                <a:sym typeface="Faustina Bold"/>
-              </a:rPr>
-              <a:t>. Thực nghiệm - Kết quả </a:t>
-            </a:r>
-          </a:p>
-        </p:txBody>
-      </p:sp>
-      <p:sp>
-        <p:nvSpPr>
-          <p:cNvPr name="TextBox 12" id="12"/>
-          <p:cNvSpPr txBox="true"/>
-          <p:nvPr/>
-        </p:nvSpPr>
-        <p:spPr>
-          <a:xfrm rot="0">
-            <a:off x="-326967" y="5483582"/>
-            <a:ext cx="6564621" cy="514350"/>
-          </a:xfrm>
-          <a:prstGeom prst="rect">
-            <a:avLst/>
-          </a:prstGeom>
-        </p:spPr>
-        <p:txBody>
-          <a:bodyPr anchor="t" rtlCol="false" tIns="0" lIns="0" bIns="0" rIns="0">
-            <a:spAutoFit/>
-          </a:bodyPr>
-          <a:lstStyle/>
-          <a:p>
-            <a:pPr algn="ctr">
-              <a:lnSpc>
-                <a:spcPts val="4200"/>
-              </a:lnSpc>
-              <a:spcBef>
-                <a:spcPct val="0"/>
-              </a:spcBef>
-            </a:pPr>
-            <a:r>
-              <a:rPr lang="en-US" b="true" sz="3000">
-                <a:solidFill>
-                  <a:srgbClr val="17548F"/>
-                </a:solidFill>
-                <a:latin typeface="Faustina Bold"/>
-                <a:ea typeface="Faustina Bold"/>
-                <a:cs typeface="Faustina Bold"/>
-                <a:sym typeface="Faustina Bold"/>
-              </a:rPr>
-              <a:t>Biểu đồ loss</a:t>
-            </a:r>
-          </a:p>
-        </p:txBody>
-      </p:sp>
-      <p:sp>
-        <p:nvSpPr>
-          <p:cNvPr name="TextBox 13" id="13"/>
-          <p:cNvSpPr txBox="true"/>
-          <p:nvPr/>
-        </p:nvSpPr>
-        <p:spPr>
-          <a:xfrm rot="0">
-            <a:off x="14176583" y="5254982"/>
-            <a:ext cx="2573379" cy="514350"/>
-          </a:xfrm>
-          <a:prstGeom prst="rect">
-            <a:avLst/>
-          </a:prstGeom>
-        </p:spPr>
-        <p:txBody>
-          <a:bodyPr anchor="t" rtlCol="false" tIns="0" lIns="0" bIns="0" rIns="0">
-            <a:spAutoFit/>
-          </a:bodyPr>
-          <a:lstStyle/>
-          <a:p>
-            <a:pPr algn="ctr">
-              <a:lnSpc>
-                <a:spcPts val="4200"/>
-              </a:lnSpc>
-              <a:spcBef>
-                <a:spcPct val="0"/>
-              </a:spcBef>
-            </a:pPr>
-            <a:r>
-              <a:rPr lang="en-US" b="true" sz="3000">
-                <a:solidFill>
-                  <a:srgbClr val="17548F"/>
-                </a:solidFill>
-                <a:latin typeface="Faustina Bold"/>
-                <a:ea typeface="Faustina Bold"/>
-                <a:cs typeface="Faustina Bold"/>
-                <a:sym typeface="Faustina Bold"/>
-              </a:rPr>
-              <a:t>Biểu đồ mean</a:t>
-            </a:r>
-          </a:p>
-        </p:txBody>
-      </p:sp>
-      <p:sp>
-        <p:nvSpPr>
-          <p:cNvPr name="TextBox 14" id="14"/>
-          <p:cNvSpPr txBox="true"/>
-          <p:nvPr/>
-        </p:nvSpPr>
-        <p:spPr>
-          <a:xfrm rot="0">
-            <a:off x="7562829" y="4095750"/>
-            <a:ext cx="3124752" cy="1047750"/>
-          </a:xfrm>
-          <a:prstGeom prst="rect">
-            <a:avLst/>
-          </a:prstGeom>
-        </p:spPr>
-        <p:txBody>
-          <a:bodyPr anchor="t" rtlCol="false" tIns="0" lIns="0" bIns="0" rIns="0">
-            <a:spAutoFit/>
-          </a:bodyPr>
-          <a:lstStyle/>
-          <a:p>
-            <a:pPr algn="ctr">
-              <a:lnSpc>
-                <a:spcPts val="4200"/>
-              </a:lnSpc>
-              <a:spcBef>
-                <a:spcPct val="0"/>
-              </a:spcBef>
-            </a:pPr>
-            <a:r>
-              <a:rPr lang="en-US" b="true" sz="3000">
-                <a:solidFill>
-                  <a:srgbClr val="17548F"/>
-                </a:solidFill>
-                <a:latin typeface="Faustina Bold"/>
-                <a:ea typeface="Faustina Bold"/>
-                <a:cs typeface="Faustina Bold"/>
-                <a:sym typeface="Faustina Bold"/>
-              </a:rPr>
-              <a:t>Biểu đồ chi tiết các giá trị học</a:t>
-            </a:r>
-          </a:p>
-        </p:txBody>
       </p:sp>
     </p:spTree>
   </p:cSld>
@@ -5404,8 +5529,8 @@
         </p:nvSpPr>
         <p:spPr>
           <a:xfrm flipH="false" flipV="true" rot="0">
-            <a:off x="-746708" y="-439976"/>
-            <a:ext cx="3131075" cy="1810331"/>
+            <a:off x="15635604" y="9222587"/>
+            <a:ext cx="2870265" cy="1317378"/>
           </a:xfrm>
           <a:custGeom>
             <a:avLst/>
@@ -5414,21 +5539,21 @@
             <a:cxnLst/>
             <a:rect r="r" b="b" t="t" l="l"/>
             <a:pathLst>
-              <a:path h="1810331" w="3131075">
+              <a:path h="1317378" w="2870265">
                 <a:moveTo>
-                  <a:pt x="0" y="1810331"/>
+                  <a:pt x="0" y="1317378"/>
                 </a:moveTo>
                 <a:lnTo>
-                  <a:pt x="3131075" y="1810331"/>
-                </a:lnTo>
-                <a:lnTo>
-                  <a:pt x="3131075" y="0"/>
-                </a:lnTo>
-                <a:lnTo>
-                  <a:pt x="0" y="0"/>
-                </a:lnTo>
-                <a:lnTo>
-                  <a:pt x="0" y="1810331"/>
+                  <a:pt x="2870265" y="1317378"/>
+                </a:lnTo>
+                <a:lnTo>
+                  <a:pt x="2870265" y="0"/>
+                </a:lnTo>
+                <a:lnTo>
+                  <a:pt x="0" y="0"/>
+                </a:lnTo>
+                <a:lnTo>
+                  <a:pt x="0" y="1317378"/>
                 </a:lnTo>
                 <a:close/>
               </a:path>
@@ -5455,9 +5580,9 @@
           <p:nvPr/>
         </p:nvSpPr>
         <p:spPr>
-          <a:xfrm flipH="false" flipV="true" rot="0">
-            <a:off x="15635604" y="9222587"/>
-            <a:ext cx="2870265" cy="1317378"/>
+          <a:xfrm flipH="false" flipV="false" rot="0">
+            <a:off x="248934" y="1226844"/>
+            <a:ext cx="5780370" cy="3843531"/>
           </a:xfrm>
           <a:custGeom>
             <a:avLst/>
@@ -5466,34 +5591,28 @@
             <a:cxnLst/>
             <a:rect r="r" b="b" t="t" l="l"/>
             <a:pathLst>
-              <a:path h="1317378" w="2870265">
+              <a:path h="3843531" w="5780370">
                 <a:moveTo>
-                  <a:pt x="0" y="1317378"/>
+                  <a:pt x="0" y="0"/>
                 </a:moveTo>
                 <a:lnTo>
-                  <a:pt x="2870265" y="1317378"/>
-                </a:lnTo>
-                <a:lnTo>
-                  <a:pt x="2870265" y="0"/>
-                </a:lnTo>
-                <a:lnTo>
-                  <a:pt x="0" y="0"/>
-                </a:lnTo>
-                <a:lnTo>
-                  <a:pt x="0" y="1317378"/>
+                  <a:pt x="5780370" y="0"/>
+                </a:lnTo>
+                <a:lnTo>
+                  <a:pt x="5780370" y="3843531"/>
+                </a:lnTo>
+                <a:lnTo>
+                  <a:pt x="0" y="3843531"/>
+                </a:lnTo>
+                <a:lnTo>
+                  <a:pt x="0" y="0"/>
                 </a:lnTo>
                 <a:close/>
               </a:path>
             </a:pathLst>
           </a:custGeom>
           <a:blipFill>
-            <a:blip r:embed="rId10">
-              <a:extLst>
-                <a:ext uri="{96DAC541-7B7A-43D3-8B79-37D633B846F1}">
-                  <asvg:svgBlip xmlns:asvg="http://schemas.microsoft.com/office/drawing/2016/SVG/main" r:embed="rId11"/>
-                </a:ext>
-              </a:extLst>
-            </a:blip>
+            <a:blip r:embed="rId10"/>
             <a:stretch>
               <a:fillRect l="0" t="0" r="0" b="0"/>
             </a:stretch>
@@ -5508,8 +5627,8 @@
         </p:nvSpPr>
         <p:spPr>
           <a:xfrm flipH="false" flipV="false" rot="0">
-            <a:off x="3384507" y="2195592"/>
-            <a:ext cx="11518987" cy="7660126"/>
+            <a:off x="12222999" y="1226844"/>
+            <a:ext cx="5833638" cy="3916656"/>
           </a:xfrm>
           <a:custGeom>
             <a:avLst/>
@@ -5518,18 +5637,64 @@
             <a:cxnLst/>
             <a:rect r="r" b="b" t="t" l="l"/>
             <a:pathLst>
-              <a:path h="7660126" w="11518987">
+              <a:path h="3916656" w="5833638">
                 <a:moveTo>
                   <a:pt x="0" y="0"/>
                 </a:moveTo>
                 <a:lnTo>
-                  <a:pt x="11518986" y="0"/>
-                </a:lnTo>
-                <a:lnTo>
-                  <a:pt x="11518986" y="7660126"/>
-                </a:lnTo>
-                <a:lnTo>
-                  <a:pt x="0" y="7660126"/>
+                  <a:pt x="5833638" y="0"/>
+                </a:lnTo>
+                <a:lnTo>
+                  <a:pt x="5833638" y="3916656"/>
+                </a:lnTo>
+                <a:lnTo>
+                  <a:pt x="0" y="3916656"/>
+                </a:lnTo>
+                <a:lnTo>
+                  <a:pt x="0" y="0"/>
+                </a:lnTo>
+                <a:close/>
+              </a:path>
+            </a:pathLst>
+          </a:custGeom>
+          <a:blipFill>
+            <a:blip r:embed="rId11"/>
+            <a:stretch>
+              <a:fillRect l="0" t="0" r="0" b="0"/>
+            </a:stretch>
+          </a:blipFill>
+        </p:spPr>
+      </p:sp>
+      <p:sp>
+        <p:nvSpPr>
+          <p:cNvPr name="Freeform 9" id="9"/>
+          <p:cNvSpPr/>
+          <p:nvPr/>
+        </p:nvSpPr>
+        <p:spPr>
+          <a:xfrm flipH="false" flipV="false" rot="0">
+            <a:off x="5741327" y="5404561"/>
+            <a:ext cx="6805346" cy="4545724"/>
+          </a:xfrm>
+          <a:custGeom>
+            <a:avLst/>
+            <a:gdLst/>
+            <a:ahLst/>
+            <a:cxnLst/>
+            <a:rect r="r" b="b" t="t" l="l"/>
+            <a:pathLst>
+              <a:path h="4545724" w="6805346">
+                <a:moveTo>
+                  <a:pt x="0" y="0"/>
+                </a:moveTo>
+                <a:lnTo>
+                  <a:pt x="6805346" y="0"/>
+                </a:lnTo>
+                <a:lnTo>
+                  <a:pt x="6805346" y="4545724"/>
+                </a:lnTo>
+                <a:lnTo>
+                  <a:pt x="0" y="4545724"/>
                 </a:lnTo>
                 <a:lnTo>
                   <a:pt x="0" y="0"/>
@@ -5548,14 +5713,14 @@
       </p:sp>
       <p:sp>
         <p:nvSpPr>
-          <p:cNvPr name="TextBox 9" id="9"/>
+          <p:cNvPr name="TextBox 10" id="10"/>
           <p:cNvSpPr txBox="true"/>
           <p:nvPr/>
         </p:nvSpPr>
         <p:spPr>
           <a:xfrm rot="0">
-            <a:off x="3621620" y="-71095"/>
-            <a:ext cx="11044761" cy="1193800"/>
+            <a:off x="2284654" y="293740"/>
+            <a:ext cx="13718692" cy="936625"/>
           </a:xfrm>
           <a:prstGeom prst="rect">
             <a:avLst/>
@@ -5569,14 +5734,14 @@
           <a:p>
             <a:pPr algn="ctr">
               <a:lnSpc>
-                <a:spcPts val="9799"/>
+                <a:spcPts val="7699"/>
               </a:lnSpc>
               <a:spcBef>
                 <a:spcPct val="0"/>
               </a:spcBef>
             </a:pPr>
             <a:r>
-              <a:rPr lang="en-US" b="true" sz="6999">
+              <a:rPr lang="en-US" b="true" sz="5499">
                 <a:solidFill>
                   <a:srgbClr val="17548F"/>
                 </a:solidFill>
@@ -5588,30 +5753,30 @@
               <a:t>7</a:t>
             </a:r>
             <a:r>
-              <a:rPr lang="en-US" b="true" sz="6999">
-                <a:solidFill>
-                  <a:srgbClr val="17548F"/>
-                </a:solidFill>
-                <a:latin typeface="Faustina Bold"/>
-                <a:ea typeface="Faustina Bold"/>
-                <a:cs typeface="Faustina Bold"/>
-                <a:sym typeface="Faustina Bold"/>
-              </a:rPr>
-              <a:t>. Kết quả định tính </a:t>
+              <a:rPr lang="en-US" b="true" sz="5499">
+                <a:solidFill>
+                  <a:srgbClr val="17548F"/>
+                </a:solidFill>
+                <a:latin typeface="Faustina Bold"/>
+                <a:ea typeface="Faustina Bold"/>
+                <a:cs typeface="Faustina Bold"/>
+                <a:sym typeface="Faustina Bold"/>
+              </a:rPr>
+              <a:t>. Thực nghiệm - Kết quả </a:t>
             </a:r>
           </a:p>
         </p:txBody>
       </p:sp>
       <p:sp>
         <p:nvSpPr>
-          <p:cNvPr name="TextBox 10" id="10"/>
+          <p:cNvPr name="TextBox 11" id="11"/>
           <p:cNvSpPr txBox="true"/>
           <p:nvPr/>
         </p:nvSpPr>
         <p:spPr>
           <a:xfrm rot="0">
-            <a:off x="5861690" y="1303680"/>
-            <a:ext cx="6564621" cy="645171"/>
+            <a:off x="-326967" y="5483582"/>
+            <a:ext cx="6564621" cy="514350"/>
           </a:xfrm>
           <a:prstGeom prst="rect">
             <a:avLst/>
@@ -5625,26 +5790,160 @@
           <a:p>
             <a:pPr algn="ctr">
               <a:lnSpc>
-                <a:spcPts val="5389"/>
+                <a:spcPts val="4200"/>
               </a:lnSpc>
               <a:spcBef>
                 <a:spcPct val="0"/>
               </a:spcBef>
             </a:pPr>
             <a:r>
-              <a:rPr lang="en-US" b="true" sz="3849">
-                <a:solidFill>
-                  <a:srgbClr val="17548F"/>
-                </a:solidFill>
-                <a:latin typeface="Faustina Bold"/>
-                <a:ea typeface="Faustina Bold"/>
-                <a:cs typeface="Faustina Bold"/>
-                <a:sym typeface="Faustina Bold"/>
-              </a:rPr>
-              <a:t>Kết quả test trên 1 lát cắt</a:t>
+              <a:rPr lang="en-US" b="true" sz="3000">
+                <a:solidFill>
+                  <a:srgbClr val="17548F"/>
+                </a:solidFill>
+                <a:latin typeface="Faustina Bold"/>
+                <a:ea typeface="Faustina Bold"/>
+                <a:cs typeface="Faustina Bold"/>
+                <a:sym typeface="Faustina Bold"/>
+              </a:rPr>
+              <a:t>Biểu đồ loss</a:t>
             </a:r>
           </a:p>
         </p:txBody>
+      </p:sp>
+      <p:sp>
+        <p:nvSpPr>
+          <p:cNvPr name="TextBox 12" id="12"/>
+          <p:cNvSpPr txBox="true"/>
+          <p:nvPr/>
+        </p:nvSpPr>
+        <p:spPr>
+          <a:xfrm rot="0">
+            <a:off x="14176583" y="5254982"/>
+            <a:ext cx="2573379" cy="514350"/>
+          </a:xfrm>
+          <a:prstGeom prst="rect">
+            <a:avLst/>
+          </a:prstGeom>
+        </p:spPr>
+        <p:txBody>
+          <a:bodyPr anchor="t" rtlCol="false" tIns="0" lIns="0" bIns="0" rIns="0">
+            <a:spAutoFit/>
+          </a:bodyPr>
+          <a:lstStyle/>
+          <a:p>
+            <a:pPr algn="ctr">
+              <a:lnSpc>
+                <a:spcPts val="4200"/>
+              </a:lnSpc>
+              <a:spcBef>
+                <a:spcPct val="0"/>
+              </a:spcBef>
+            </a:pPr>
+            <a:r>
+              <a:rPr lang="en-US" b="true" sz="3000">
+                <a:solidFill>
+                  <a:srgbClr val="17548F"/>
+                </a:solidFill>
+                <a:latin typeface="Faustina Bold"/>
+                <a:ea typeface="Faustina Bold"/>
+                <a:cs typeface="Faustina Bold"/>
+                <a:sym typeface="Faustina Bold"/>
+              </a:rPr>
+              <a:t>Biểu đồ mean</a:t>
+            </a:r>
+          </a:p>
+        </p:txBody>
+      </p:sp>
+      <p:sp>
+        <p:nvSpPr>
+          <p:cNvPr name="TextBox 13" id="13"/>
+          <p:cNvSpPr txBox="true"/>
+          <p:nvPr/>
+        </p:nvSpPr>
+        <p:spPr>
+          <a:xfrm rot="0">
+            <a:off x="7562829" y="4095750"/>
+            <a:ext cx="3124752" cy="1047750"/>
+          </a:xfrm>
+          <a:prstGeom prst="rect">
+            <a:avLst/>
+          </a:prstGeom>
+        </p:spPr>
+        <p:txBody>
+          <a:bodyPr anchor="t" rtlCol="false" tIns="0" lIns="0" bIns="0" rIns="0">
+            <a:spAutoFit/>
+          </a:bodyPr>
+          <a:lstStyle/>
+          <a:p>
+            <a:pPr algn="ctr">
+              <a:lnSpc>
+                <a:spcPts val="4200"/>
+              </a:lnSpc>
+              <a:spcBef>
+                <a:spcPct val="0"/>
+              </a:spcBef>
+            </a:pPr>
+            <a:r>
+              <a:rPr lang="en-US" b="true" sz="3000">
+                <a:solidFill>
+                  <a:srgbClr val="17548F"/>
+                </a:solidFill>
+                <a:latin typeface="Faustina Bold"/>
+                <a:ea typeface="Faustina Bold"/>
+                <a:cs typeface="Faustina Bold"/>
+                <a:sym typeface="Faustina Bold"/>
+              </a:rPr>
+              <a:t>Biểu đồ chi tiết các giá trị học</a:t>
+            </a:r>
+          </a:p>
+        </p:txBody>
+      </p:sp>
+      <p:sp>
+        <p:nvSpPr>
+          <p:cNvPr name="Freeform 14" id="14"/>
+          <p:cNvSpPr/>
+          <p:nvPr/>
+        </p:nvSpPr>
+        <p:spPr>
+          <a:xfrm flipH="false" flipV="false" rot="0">
+            <a:off x="247041" y="263470"/>
+            <a:ext cx="2683548" cy="765230"/>
+          </a:xfrm>
+          <a:custGeom>
+            <a:avLst/>
+            <a:gdLst/>
+            <a:ahLst/>
+            <a:cxnLst/>
+            <a:rect r="r" b="b" t="t" l="l"/>
+            <a:pathLst>
+              <a:path h="765230" w="2683548">
+                <a:moveTo>
+                  <a:pt x="0" y="0"/>
+                </a:moveTo>
+                <a:lnTo>
+                  <a:pt x="2683548" y="0"/>
+                </a:lnTo>
+                <a:lnTo>
+                  <a:pt x="2683548" y="765230"/>
+                </a:lnTo>
+                <a:lnTo>
+                  <a:pt x="0" y="765230"/>
+                </a:lnTo>
+                <a:lnTo>
+                  <a:pt x="0" y="0"/>
+                </a:lnTo>
+                <a:close/>
+              </a:path>
+            </a:pathLst>
+          </a:custGeom>
+          <a:blipFill>
+            <a:blip r:embed="rId13"/>
+            <a:stretch>
+              <a:fillRect l="0" t="0" r="0" b="0"/>
+            </a:stretch>
+          </a:blipFill>
+        </p:spPr>
       </p:sp>
     </p:spTree>
   </p:cSld>
@@ -5896,8 +6195,8 @@
         </p:nvSpPr>
         <p:spPr>
           <a:xfrm flipH="false" flipV="true" rot="0">
-            <a:off x="-746708" y="-439976"/>
-            <a:ext cx="3131075" cy="1810331"/>
+            <a:off x="15635604" y="9222587"/>
+            <a:ext cx="2870265" cy="1317378"/>
           </a:xfrm>
           <a:custGeom>
             <a:avLst/>
@@ -5906,21 +6205,21 @@
             <a:cxnLst/>
             <a:rect r="r" b="b" t="t" l="l"/>
             <a:pathLst>
-              <a:path h="1810331" w="3131075">
+              <a:path h="1317378" w="2870265">
                 <a:moveTo>
-                  <a:pt x="0" y="1810331"/>
+                  <a:pt x="0" y="1317378"/>
                 </a:moveTo>
                 <a:lnTo>
-                  <a:pt x="3131075" y="1810331"/>
-                </a:lnTo>
-                <a:lnTo>
-                  <a:pt x="3131075" y="0"/>
-                </a:lnTo>
-                <a:lnTo>
-                  <a:pt x="0" y="0"/>
-                </a:lnTo>
-                <a:lnTo>
-                  <a:pt x="0" y="1810331"/>
+                  <a:pt x="2870265" y="1317378"/>
+                </a:lnTo>
+                <a:lnTo>
+                  <a:pt x="2870265" y="0"/>
+                </a:lnTo>
+                <a:lnTo>
+                  <a:pt x="0" y="0"/>
+                </a:lnTo>
+                <a:lnTo>
+                  <a:pt x="0" y="1317378"/>
                 </a:lnTo>
                 <a:close/>
               </a:path>
@@ -5947,9 +6246,9 @@
           <p:nvPr/>
         </p:nvSpPr>
         <p:spPr>
-          <a:xfrm flipH="false" flipV="true" rot="0">
-            <a:off x="15635604" y="9222587"/>
-            <a:ext cx="2870265" cy="1317378"/>
+          <a:xfrm flipH="false" flipV="false" rot="0">
+            <a:off x="2520590" y="1313437"/>
+            <a:ext cx="13246821" cy="8809136"/>
           </a:xfrm>
           <a:custGeom>
             <a:avLst/>
@@ -5958,34 +6257,28 @@
             <a:cxnLst/>
             <a:rect r="r" b="b" t="t" l="l"/>
             <a:pathLst>
-              <a:path h="1317378" w="2870265">
+              <a:path h="8809136" w="13246821">
                 <a:moveTo>
-                  <a:pt x="0" y="1317378"/>
+                  <a:pt x="0" y="0"/>
                 </a:moveTo>
                 <a:lnTo>
-                  <a:pt x="2870265" y="1317378"/>
-                </a:lnTo>
-                <a:lnTo>
-                  <a:pt x="2870265" y="0"/>
-                </a:lnTo>
-                <a:lnTo>
-                  <a:pt x="0" y="0"/>
-                </a:lnTo>
-                <a:lnTo>
-                  <a:pt x="0" y="1317378"/>
+                  <a:pt x="13246820" y="0"/>
+                </a:lnTo>
+                <a:lnTo>
+                  <a:pt x="13246820" y="8809136"/>
+                </a:lnTo>
+                <a:lnTo>
+                  <a:pt x="0" y="8809136"/>
+                </a:lnTo>
+                <a:lnTo>
+                  <a:pt x="0" y="0"/>
                 </a:lnTo>
                 <a:close/>
               </a:path>
             </a:pathLst>
           </a:custGeom>
           <a:blipFill>
-            <a:blip r:embed="rId10">
-              <a:extLst>
-                <a:ext uri="{96DAC541-7B7A-43D3-8B79-37D633B846F1}">
-                  <asvg:svgBlip xmlns:asvg="http://schemas.microsoft.com/office/drawing/2016/SVG/main" r:embed="rId11"/>
-                </a:ext>
-              </a:extLst>
-            </a:blip>
+            <a:blip r:embed="rId10"/>
             <a:stretch>
               <a:fillRect l="0" t="0" r="0" b="0"/>
             </a:stretch>
@@ -5994,14 +6287,70 @@
       </p:sp>
       <p:sp>
         <p:nvSpPr>
-          <p:cNvPr name="Freeform 8" id="8"/>
+          <p:cNvPr name="TextBox 8" id="8"/>
+          <p:cNvSpPr txBox="true"/>
+          <p:nvPr/>
+        </p:nvSpPr>
+        <p:spPr>
+          <a:xfrm rot="0">
+            <a:off x="3621620" y="259105"/>
+            <a:ext cx="11044761" cy="936625"/>
+          </a:xfrm>
+          <a:prstGeom prst="rect">
+            <a:avLst/>
+          </a:prstGeom>
+        </p:spPr>
+        <p:txBody>
+          <a:bodyPr anchor="t" rtlCol="false" tIns="0" lIns="0" bIns="0" rIns="0">
+            <a:spAutoFit/>
+          </a:bodyPr>
+          <a:lstStyle/>
+          <a:p>
+            <a:pPr algn="ctr">
+              <a:lnSpc>
+                <a:spcPts val="7699"/>
+              </a:lnSpc>
+              <a:spcBef>
+                <a:spcPct val="0"/>
+              </a:spcBef>
+            </a:pPr>
+            <a:r>
+              <a:rPr lang="en-US" b="true" sz="5499">
+                <a:solidFill>
+                  <a:srgbClr val="17548F"/>
+                </a:solidFill>
+                <a:latin typeface="Faustina Bold"/>
+                <a:ea typeface="Faustina Bold"/>
+                <a:cs typeface="Faustina Bold"/>
+                <a:sym typeface="Faustina Bold"/>
+              </a:rPr>
+              <a:t>8</a:t>
+            </a:r>
+            <a:r>
+              <a:rPr lang="en-US" b="true" sz="5499">
+                <a:solidFill>
+                  <a:srgbClr val="17548F"/>
+                </a:solidFill>
+                <a:latin typeface="Faustina Bold"/>
+                <a:ea typeface="Faustina Bold"/>
+                <a:cs typeface="Faustina Bold"/>
+                <a:sym typeface="Faustina Bold"/>
+              </a:rPr>
+              <a:t>. Kết quả định tính </a:t>
+            </a:r>
+          </a:p>
+        </p:txBody>
+      </p:sp>
+      <p:sp>
+        <p:nvSpPr>
+          <p:cNvPr name="Freeform 9" id="9"/>
           <p:cNvSpPr/>
           <p:nvPr/>
         </p:nvSpPr>
         <p:spPr>
           <a:xfrm flipH="false" flipV="false" rot="0">
-            <a:off x="4407872" y="1536003"/>
-            <a:ext cx="9472256" cy="2867214"/>
+            <a:off x="247041" y="263470"/>
+            <a:ext cx="2683548" cy="765230"/>
           </a:xfrm>
           <a:custGeom>
             <a:avLst/>
@@ -6010,18 +6359,18 @@
             <a:cxnLst/>
             <a:rect r="r" b="b" t="t" l="l"/>
             <a:pathLst>
-              <a:path h="2867214" w="9472256">
+              <a:path h="765230" w="2683548">
                 <a:moveTo>
                   <a:pt x="0" y="0"/>
                 </a:moveTo>
                 <a:lnTo>
-                  <a:pt x="9472256" y="0"/>
-                </a:lnTo>
-                <a:lnTo>
-                  <a:pt x="9472256" y="2867214"/>
-                </a:lnTo>
-                <a:lnTo>
-                  <a:pt x="0" y="2867214"/>
+                  <a:pt x="2683548" y="0"/>
+                </a:lnTo>
+                <a:lnTo>
+                  <a:pt x="2683548" y="765230"/>
+                </a:lnTo>
+                <a:lnTo>
+                  <a:pt x="0" y="765230"/>
                 </a:lnTo>
                 <a:lnTo>
                   <a:pt x="0" y="0"/>
@@ -6031,114 +6380,12 @@
             </a:pathLst>
           </a:custGeom>
           <a:blipFill>
-            <a:blip r:embed="rId12"/>
-            <a:stretch>
-              <a:fillRect l="0" t="-3890" r="0" b="-3890"/>
-            </a:stretch>
-          </a:blipFill>
-        </p:spPr>
-      </p:sp>
-      <p:sp>
-        <p:nvSpPr>
-          <p:cNvPr name="Freeform 9" id="9"/>
-          <p:cNvSpPr/>
-          <p:nvPr/>
-        </p:nvSpPr>
-        <p:spPr>
-          <a:xfrm flipH="false" flipV="false" rot="0">
-            <a:off x="4407872" y="4623834"/>
-            <a:ext cx="9472256" cy="5422867"/>
-          </a:xfrm>
-          <a:custGeom>
-            <a:avLst/>
-            <a:gdLst/>
-            <a:ahLst/>
-            <a:cxnLst/>
-            <a:rect r="r" b="b" t="t" l="l"/>
-            <a:pathLst>
-              <a:path h="5422867" w="9472256">
-                <a:moveTo>
-                  <a:pt x="0" y="0"/>
-                </a:moveTo>
-                <a:lnTo>
-                  <a:pt x="9472256" y="0"/>
-                </a:lnTo>
-                <a:lnTo>
-                  <a:pt x="9472256" y="5422867"/>
-                </a:lnTo>
-                <a:lnTo>
-                  <a:pt x="0" y="5422867"/>
-                </a:lnTo>
-                <a:lnTo>
-                  <a:pt x="0" y="0"/>
-                </a:lnTo>
-                <a:close/>
-              </a:path>
-            </a:pathLst>
-          </a:custGeom>
-          <a:blipFill>
-            <a:blip r:embed="rId13"/>
+            <a:blip r:embed="rId11"/>
             <a:stretch>
               <a:fillRect l="0" t="0" r="0" b="0"/>
             </a:stretch>
           </a:blipFill>
         </p:spPr>
-      </p:sp>
-      <p:sp>
-        <p:nvSpPr>
-          <p:cNvPr name="TextBox 10" id="10"/>
-          <p:cNvSpPr txBox="true"/>
-          <p:nvPr/>
-        </p:nvSpPr>
-        <p:spPr>
-          <a:xfrm rot="0">
-            <a:off x="3260451" y="-133350"/>
-            <a:ext cx="11767098" cy="1193800"/>
-          </a:xfrm>
-          <a:prstGeom prst="rect">
-            <a:avLst/>
-          </a:prstGeom>
-        </p:spPr>
-        <p:txBody>
-          <a:bodyPr anchor="t" rtlCol="false" tIns="0" lIns="0" bIns="0" rIns="0">
-            <a:spAutoFit/>
-          </a:bodyPr>
-          <a:lstStyle/>
-          <a:p>
-            <a:pPr algn="ctr">
-              <a:lnSpc>
-                <a:spcPts val="9799"/>
-              </a:lnSpc>
-              <a:spcBef>
-                <a:spcPct val="0"/>
-              </a:spcBef>
-            </a:pPr>
-            <a:r>
-              <a:rPr lang="en-US" b="true" sz="6999">
-                <a:solidFill>
-                  <a:srgbClr val="17548F"/>
-                </a:solidFill>
-                <a:latin typeface="Faustina Bold"/>
-                <a:ea typeface="Faustina Bold"/>
-                <a:cs typeface="Faustina Bold"/>
-                <a:sym typeface="Faustina Bold"/>
-              </a:rPr>
-              <a:t>7</a:t>
-            </a:r>
-            <a:r>
-              <a:rPr lang="en-US" b="true" sz="6999">
-                <a:solidFill>
-                  <a:srgbClr val="17548F"/>
-                </a:solidFill>
-                <a:latin typeface="Faustina Bold"/>
-                <a:ea typeface="Faustina Bold"/>
-                <a:cs typeface="Faustina Bold"/>
-                <a:sym typeface="Faustina Bold"/>
-              </a:rPr>
-              <a:t>. Kết quả định tính </a:t>
-            </a:r>
-          </a:p>
-        </p:txBody>
       </p:sp>
     </p:spTree>
   </p:cSld>
@@ -6390,8 +6637,8 @@
         </p:nvSpPr>
         <p:spPr>
           <a:xfrm flipH="false" flipV="true" rot="0">
-            <a:off x="-746708" y="-439976"/>
-            <a:ext cx="3131075" cy="1810331"/>
+            <a:off x="15635604" y="9222587"/>
+            <a:ext cx="2870265" cy="1317378"/>
           </a:xfrm>
           <a:custGeom>
             <a:avLst/>
@@ -6400,21 +6647,21 @@
             <a:cxnLst/>
             <a:rect r="r" b="b" t="t" l="l"/>
             <a:pathLst>
-              <a:path h="1810331" w="3131075">
+              <a:path h="1317378" w="2870265">
                 <a:moveTo>
-                  <a:pt x="0" y="1810331"/>
+                  <a:pt x="0" y="1317378"/>
                 </a:moveTo>
                 <a:lnTo>
-                  <a:pt x="3131075" y="1810331"/>
-                </a:lnTo>
-                <a:lnTo>
-                  <a:pt x="3131075" y="0"/>
-                </a:lnTo>
-                <a:lnTo>
-                  <a:pt x="0" y="0"/>
-                </a:lnTo>
-                <a:lnTo>
-                  <a:pt x="0" y="1810331"/>
+                  <a:pt x="2870265" y="1317378"/>
+                </a:lnTo>
+                <a:lnTo>
+                  <a:pt x="2870265" y="0"/>
+                </a:lnTo>
+                <a:lnTo>
+                  <a:pt x="0" y="0"/>
+                </a:lnTo>
+                <a:lnTo>
+                  <a:pt x="0" y="1317378"/>
                 </a:lnTo>
                 <a:close/>
               </a:path>
@@ -6441,9 +6688,9 @@
           <p:nvPr/>
         </p:nvSpPr>
         <p:spPr>
-          <a:xfrm flipH="false" flipV="true" rot="0">
-            <a:off x="15635604" y="9222587"/>
-            <a:ext cx="2870265" cy="1317378"/>
+          <a:xfrm flipH="false" flipV="false" rot="0">
+            <a:off x="4199576" y="1317041"/>
+            <a:ext cx="9888849" cy="2993314"/>
           </a:xfrm>
           <a:custGeom>
             <a:avLst/>
@@ -6452,34 +6699,74 @@
             <a:cxnLst/>
             <a:rect r="r" b="b" t="t" l="l"/>
             <a:pathLst>
-              <a:path h="1317378" w="2870265">
+              <a:path h="2993314" w="9888849">
                 <a:moveTo>
-                  <a:pt x="0" y="1317378"/>
+                  <a:pt x="0" y="0"/>
                 </a:moveTo>
                 <a:lnTo>
-                  <a:pt x="2870265" y="1317378"/>
-                </a:lnTo>
-                <a:lnTo>
-                  <a:pt x="2870265" y="0"/>
-                </a:lnTo>
-                <a:lnTo>
-                  <a:pt x="0" y="0"/>
-                </a:lnTo>
-                <a:lnTo>
-                  <a:pt x="0" y="1317378"/>
+                  <a:pt x="9888848" y="0"/>
+                </a:lnTo>
+                <a:lnTo>
+                  <a:pt x="9888848" y="2993314"/>
+                </a:lnTo>
+                <a:lnTo>
+                  <a:pt x="0" y="2993314"/>
+                </a:lnTo>
+                <a:lnTo>
+                  <a:pt x="0" y="0"/>
                 </a:lnTo>
                 <a:close/>
               </a:path>
             </a:pathLst>
           </a:custGeom>
           <a:blipFill>
-            <a:blip r:embed="rId10">
-              <a:extLst>
-                <a:ext uri="{96DAC541-7B7A-43D3-8B79-37D633B846F1}">
-                  <asvg:svgBlip xmlns:asvg="http://schemas.microsoft.com/office/drawing/2016/SVG/main" r:embed="rId11"/>
-                </a:ext>
-              </a:extLst>
-            </a:blip>
+            <a:blip r:embed="rId10"/>
+            <a:stretch>
+              <a:fillRect l="0" t="-3890" r="0" b="-3890"/>
+            </a:stretch>
+          </a:blipFill>
+        </p:spPr>
+      </p:sp>
+      <p:sp>
+        <p:nvSpPr>
+          <p:cNvPr name="Freeform 8" id="8"/>
+          <p:cNvSpPr/>
+          <p:nvPr/>
+        </p:nvSpPr>
+        <p:spPr>
+          <a:xfrm flipH="false" flipV="false" rot="0">
+            <a:off x="4199576" y="4412062"/>
+            <a:ext cx="9888849" cy="5661366"/>
+          </a:xfrm>
+          <a:custGeom>
+            <a:avLst/>
+            <a:gdLst/>
+            <a:ahLst/>
+            <a:cxnLst/>
+            <a:rect r="r" b="b" t="t" l="l"/>
+            <a:pathLst>
+              <a:path h="5661366" w="9888849">
+                <a:moveTo>
+                  <a:pt x="0" y="0"/>
+                </a:moveTo>
+                <a:lnTo>
+                  <a:pt x="9888848" y="0"/>
+                </a:lnTo>
+                <a:lnTo>
+                  <a:pt x="9888848" y="5661366"/>
+                </a:lnTo>
+                <a:lnTo>
+                  <a:pt x="0" y="5661366"/>
+                </a:lnTo>
+                <a:lnTo>
+                  <a:pt x="0" y="0"/>
+                </a:lnTo>
+                <a:close/>
+              </a:path>
+            </a:pathLst>
+          </a:custGeom>
+          <a:blipFill>
+            <a:blip r:embed="rId11"/>
             <a:stretch>
               <a:fillRect l="0" t="0" r="0" b="0"/>
             </a:stretch>
@@ -6488,14 +6775,14 @@
       </p:sp>
       <p:sp>
         <p:nvSpPr>
-          <p:cNvPr name="TextBox 8" id="8"/>
+          <p:cNvPr name="TextBox 9" id="9"/>
           <p:cNvSpPr txBox="true"/>
           <p:nvPr/>
         </p:nvSpPr>
         <p:spPr>
           <a:xfrm rot="0">
-            <a:off x="1567407" y="-133350"/>
-            <a:ext cx="15153186" cy="1193800"/>
+            <a:off x="3260451" y="293740"/>
+            <a:ext cx="11767098" cy="936625"/>
           </a:xfrm>
           <a:prstGeom prst="rect">
             <a:avLst/>
@@ -6509,301 +6796,84 @@
           <a:p>
             <a:pPr algn="ctr">
               <a:lnSpc>
-                <a:spcPts val="9799"/>
+                <a:spcPts val="7699"/>
               </a:lnSpc>
               <a:spcBef>
                 <a:spcPct val="0"/>
               </a:spcBef>
             </a:pPr>
             <a:r>
-              <a:rPr lang="en-US" b="true" sz="6999">
-                <a:solidFill>
-                  <a:srgbClr val="17548F"/>
-                </a:solidFill>
-                <a:latin typeface="Faustina Bold"/>
-                <a:ea typeface="Faustina Bold"/>
-                <a:cs typeface="Faustina Bold"/>
-                <a:sym typeface="Faustina Bold"/>
-              </a:rPr>
-              <a:t>8.</a:t>
-            </a:r>
-            <a:r>
-              <a:rPr lang="en-US" b="true" sz="6999">
-                <a:solidFill>
-                  <a:srgbClr val="17548F"/>
-                </a:solidFill>
-                <a:latin typeface="Faustina Bold"/>
-                <a:ea typeface="Faustina Bold"/>
-                <a:cs typeface="Faustina Bold"/>
-                <a:sym typeface="Faustina Bold"/>
-              </a:rPr>
-              <a:t> Đóng góp mới của đề tài </a:t>
+              <a:rPr lang="en-US" b="true" sz="5499">
+                <a:solidFill>
+                  <a:srgbClr val="17548F"/>
+                </a:solidFill>
+                <a:latin typeface="Faustina Bold"/>
+                <a:ea typeface="Faustina Bold"/>
+                <a:cs typeface="Faustina Bold"/>
+                <a:sym typeface="Faustina Bold"/>
+              </a:rPr>
+              <a:t>8</a:t>
+            </a:r>
+            <a:r>
+              <a:rPr lang="en-US" b="true" sz="5499">
+                <a:solidFill>
+                  <a:srgbClr val="17548F"/>
+                </a:solidFill>
+                <a:latin typeface="Faustina Bold"/>
+                <a:ea typeface="Faustina Bold"/>
+                <a:cs typeface="Faustina Bold"/>
+                <a:sym typeface="Faustina Bold"/>
+              </a:rPr>
+              <a:t>. Kết quả định tính </a:t>
             </a:r>
           </a:p>
         </p:txBody>
       </p:sp>
       <p:sp>
         <p:nvSpPr>
-          <p:cNvPr name="TextBox 9" id="9"/>
-          <p:cNvSpPr txBox="true"/>
-          <p:nvPr/>
-        </p:nvSpPr>
-        <p:spPr>
-          <a:xfrm rot="0">
-            <a:off x="1317307" y="2117998"/>
-            <a:ext cx="15653385" cy="6797675"/>
-          </a:xfrm>
-          <a:prstGeom prst="rect">
-            <a:avLst/>
-          </a:prstGeom>
-        </p:spPr>
-        <p:txBody>
-          <a:bodyPr anchor="t" rtlCol="false" tIns="0" lIns="0" bIns="0" rIns="0">
-            <a:spAutoFit/>
-          </a:bodyPr>
-          <a:lstStyle/>
-          <a:p>
-            <a:pPr algn="just">
-              <a:lnSpc>
-                <a:spcPts val="4900"/>
-              </a:lnSpc>
-            </a:pPr>
-            <a:r>
-              <a:rPr lang="en-US" sz="3500" b="true">
-                <a:solidFill>
-                  <a:srgbClr val="17548F"/>
-                </a:solidFill>
-                <a:latin typeface="Faustina Bold"/>
-                <a:ea typeface="Faustina Bold"/>
-                <a:cs typeface="Faustina Bold"/>
-                <a:sym typeface="Faustina Bold"/>
-              </a:rPr>
-              <a:t>Phần tự làm:</a:t>
-            </a:r>
-          </a:p>
-          <a:p>
-            <a:pPr algn="just" marL="755651" indent="-377825" lvl="1">
-              <a:lnSpc>
-                <a:spcPts val="4900"/>
-              </a:lnSpc>
-              <a:buFont typeface="Arial"/>
-              <a:buChar char="•"/>
-            </a:pPr>
-            <a:r>
-              <a:rPr lang="en-US" b="true" sz="3500">
-                <a:solidFill>
-                  <a:srgbClr val="17548F"/>
-                </a:solidFill>
-                <a:latin typeface="Faustina Bold"/>
-                <a:ea typeface="Faustina Bold"/>
-                <a:cs typeface="Faustina Bold"/>
-                <a:sym typeface="Faustina Bold"/>
-              </a:rPr>
-              <a:t>Tự xây dựng trọn vẹn pipeline từ</a:t>
-            </a:r>
-            <a:r>
-              <a:rPr lang="en-US" b="true" sz="3500">
-                <a:solidFill>
-                  <a:srgbClr val="17548F"/>
-                </a:solidFill>
-                <a:latin typeface="Faustina Bold"/>
-                <a:ea typeface="Faustina Bold"/>
-                <a:cs typeface="Faustina Bold"/>
-                <a:sym typeface="Faustina Bold"/>
-              </a:rPr>
-              <a:t> xử lý dữ liệu thô đến huấn luyện và đánh giá.</a:t>
-            </a:r>
-          </a:p>
-          <a:p>
-            <a:pPr algn="just" marL="755651" indent="-377825" lvl="1">
-              <a:lnSpc>
-                <a:spcPts val="4900"/>
-              </a:lnSpc>
-              <a:buFont typeface="Arial"/>
-              <a:buChar char="•"/>
-            </a:pPr>
-            <a:r>
-              <a:rPr lang="en-US" b="true" sz="3500">
-                <a:solidFill>
-                  <a:srgbClr val="17548F"/>
-                </a:solidFill>
-                <a:latin typeface="Faustina Bold"/>
-                <a:ea typeface="Faustina Bold"/>
-                <a:cs typeface="Faustina Bold"/>
-                <a:sym typeface="Faustina Bold"/>
-              </a:rPr>
-              <a:t>Tự thiết kế c</a:t>
-            </a:r>
-            <a:r>
-              <a:rPr lang="en-US" b="true" sz="3500">
-                <a:solidFill>
-                  <a:srgbClr val="17548F"/>
-                </a:solidFill>
-                <a:latin typeface="Faustina Bold"/>
-                <a:ea typeface="Faustina Bold"/>
-                <a:cs typeface="Faustina Bold"/>
-                <a:sym typeface="Faustina Bold"/>
-              </a:rPr>
-              <a:t>hiến lược chọn lát cắt thông minh để loại bỏ nhiễu.</a:t>
-            </a:r>
-          </a:p>
-          <a:p>
-            <a:pPr algn="just">
-              <a:lnSpc>
-                <a:spcPts val="4900"/>
-              </a:lnSpc>
-            </a:pPr>
-            <a:r>
-              <a:rPr lang="en-US" sz="3500" b="true">
-                <a:solidFill>
-                  <a:srgbClr val="17548F"/>
-                </a:solidFill>
-                <a:latin typeface="Faustina Bold"/>
-                <a:ea typeface="Faustina Bold"/>
-                <a:cs typeface="Faustina Bold"/>
-                <a:sym typeface="Faustina Bold"/>
-              </a:rPr>
-              <a:t>Đóng góp mới:</a:t>
-            </a:r>
-          </a:p>
-          <a:p>
-            <a:pPr algn="just" marL="755651" indent="-377825" lvl="1">
-              <a:lnSpc>
-                <a:spcPts val="4900"/>
-              </a:lnSpc>
-              <a:buFont typeface="Arial"/>
-              <a:buChar char="•"/>
-            </a:pPr>
-            <a:r>
-              <a:rPr lang="en-US" b="true" sz="3500">
-                <a:solidFill>
-                  <a:srgbClr val="17548F"/>
-                </a:solidFill>
-                <a:latin typeface="Faustina Bold"/>
-                <a:ea typeface="Faustina Bold"/>
-                <a:cs typeface="Faustina Bold"/>
-                <a:sym typeface="Faustina Bold"/>
-              </a:rPr>
-              <a:t>Đề xuất tỷ lệ Combined Loss </a:t>
-            </a:r>
-            <a:r>
-              <a:rPr lang="en-US" b="true" sz="3500">
-                <a:solidFill>
-                  <a:srgbClr val="17548F"/>
-                </a:solidFill>
-                <a:latin typeface="Faustina Bold"/>
-                <a:ea typeface="Faustina Bold"/>
-                <a:cs typeface="Faustina Bold"/>
-                <a:sym typeface="Faustina Bold"/>
-              </a:rPr>
-              <a:t>tối ưu (0.4:0.4:0.2) cho dữ liệu BraTS.</a:t>
-            </a:r>
-          </a:p>
-          <a:p>
-            <a:pPr algn="just" marL="755651" indent="-377825" lvl="1">
-              <a:lnSpc>
-                <a:spcPts val="4900"/>
-              </a:lnSpc>
-              <a:spcBef>
-                <a:spcPct val="0"/>
-              </a:spcBef>
-              <a:buFont typeface="Arial"/>
-              <a:buChar char="•"/>
-            </a:pPr>
-            <a:r>
-              <a:rPr lang="en-US" b="true" sz="3500">
-                <a:solidFill>
-                  <a:srgbClr val="17548F"/>
-                </a:solidFill>
-                <a:latin typeface="Faustina Bold"/>
-                <a:ea typeface="Faustina Bold"/>
-                <a:cs typeface="Faustina Bold"/>
-                <a:sym typeface="Faustina Bold"/>
-              </a:rPr>
-              <a:t>Chứng mi</a:t>
-            </a:r>
-            <a:r>
-              <a:rPr lang="en-US" b="true" sz="3500">
-                <a:solidFill>
-                  <a:srgbClr val="17548F"/>
-                </a:solidFill>
-                <a:latin typeface="Faustina Bold"/>
-                <a:ea typeface="Faustina Bold"/>
-                <a:cs typeface="Faustina Bold"/>
-                <a:sym typeface="Faustina Bold"/>
-              </a:rPr>
-              <a:t>nh hiệu quả của mô hình 2D "nhẹ" (7.7 triệu tham số) so với các mô hình 3D nặng </a:t>
-            </a:r>
-            <a:r>
-              <a:rPr lang="en-US" b="true" sz="3500">
-                <a:solidFill>
-                  <a:srgbClr val="17548F"/>
-                </a:solidFill>
-                <a:latin typeface="Faustina Bold"/>
-                <a:ea typeface="Faustina Bold"/>
-                <a:cs typeface="Faustina Bold"/>
-                <a:sym typeface="Faustina Bold"/>
-              </a:rPr>
-              <a:t>nề.</a:t>
-            </a:r>
-          </a:p>
-          <a:p>
-            <a:pPr algn="just">
-              <a:lnSpc>
-                <a:spcPts val="4900"/>
-              </a:lnSpc>
-              <a:spcBef>
-                <a:spcPct val="0"/>
-              </a:spcBef>
-            </a:pPr>
-            <a:r>
-              <a:rPr lang="en-US" b="true" sz="3500">
-                <a:solidFill>
-                  <a:srgbClr val="17548F"/>
-                </a:solidFill>
-                <a:latin typeface="Faustina Bold"/>
-                <a:ea typeface="Faustina Bold"/>
-                <a:cs typeface="Faustina Bold"/>
-                <a:sym typeface="Faustina Bold"/>
-              </a:rPr>
-              <a:t>Tốt hơn phương pháp cũ: Tốc độ suy luận &lt; 30 giây/ca (nhanh hơn hàng trăm</a:t>
-            </a:r>
-            <a:r>
-              <a:rPr lang="en-US" b="true" sz="3500">
-                <a:solidFill>
-                  <a:srgbClr val="17548F"/>
-                </a:solidFill>
-                <a:latin typeface="Faustina Bold"/>
-                <a:ea typeface="Faustina Bold"/>
-                <a:cs typeface="Faustina Bold"/>
-                <a:sym typeface="Faustina Bold"/>
-              </a:rPr>
-              <a:t> lần so</a:t>
-            </a:r>
-            <a:r>
-              <a:rPr lang="en-US" b="true" sz="3500">
-                <a:solidFill>
-                  <a:srgbClr val="17548F"/>
-                </a:solidFill>
-                <a:latin typeface="Faustina Bold"/>
-                <a:ea typeface="Faustina Bold"/>
-                <a:cs typeface="Faustina Bold"/>
-                <a:sym typeface="Faustina Bold"/>
-              </a:rPr>
-              <a:t> với làm tay), chi phí phần cứng thấp.</a:t>
-            </a:r>
-          </a:p>
-          <a:p>
-            <a:pPr algn="just">
-              <a:lnSpc>
-                <a:spcPts val="4900"/>
-              </a:lnSpc>
-              <a:spcBef>
-                <a:spcPct val="0"/>
-              </a:spcBef>
-            </a:pPr>
-          </a:p>
-        </p:txBody>
+          <p:cNvPr name="Freeform 10" id="10"/>
+          <p:cNvSpPr/>
+          <p:nvPr/>
+        </p:nvSpPr>
+        <p:spPr>
+          <a:xfrm flipH="false" flipV="false" rot="0">
+            <a:off x="247041" y="263470"/>
+            <a:ext cx="2683548" cy="765230"/>
+          </a:xfrm>
+          <a:custGeom>
+            <a:avLst/>
+            <a:gdLst/>
+            <a:ahLst/>
+            <a:cxnLst/>
+            <a:rect r="r" b="b" t="t" l="l"/>
+            <a:pathLst>
+              <a:path h="765230" w="2683548">
+                <a:moveTo>
+                  <a:pt x="0" y="0"/>
+                </a:moveTo>
+                <a:lnTo>
+                  <a:pt x="2683548" y="0"/>
+                </a:lnTo>
+                <a:lnTo>
+                  <a:pt x="2683548" y="765230"/>
+                </a:lnTo>
+                <a:lnTo>
+                  <a:pt x="0" y="765230"/>
+                </a:lnTo>
+                <a:lnTo>
+                  <a:pt x="0" y="0"/>
+                </a:lnTo>
+                <a:close/>
+              </a:path>
+            </a:pathLst>
+          </a:custGeom>
+          <a:blipFill>
+            <a:blip r:embed="rId12"/>
+            <a:stretch>
+              <a:fillRect l="0" t="0" r="0" b="0"/>
+            </a:stretch>
+          </a:blipFill>
+        </p:spPr>
       </p:sp>
     </p:spTree>
   </p:cSld>
@@ -7055,8 +7125,8 @@
         </p:nvSpPr>
         <p:spPr>
           <a:xfrm flipH="false" flipV="true" rot="0">
-            <a:off x="-746708" y="-439976"/>
-            <a:ext cx="3131075" cy="1810331"/>
+            <a:off x="15635604" y="9222587"/>
+            <a:ext cx="2870265" cy="1317378"/>
           </a:xfrm>
           <a:custGeom>
             <a:avLst/>
@@ -7065,21 +7135,21 @@
             <a:cxnLst/>
             <a:rect r="r" b="b" t="t" l="l"/>
             <a:pathLst>
-              <a:path h="1810331" w="3131075">
+              <a:path h="1317378" w="2870265">
                 <a:moveTo>
-                  <a:pt x="0" y="1810331"/>
+                  <a:pt x="0" y="1317378"/>
                 </a:moveTo>
                 <a:lnTo>
-                  <a:pt x="3131075" y="1810331"/>
-                </a:lnTo>
-                <a:lnTo>
-                  <a:pt x="3131075" y="0"/>
-                </a:lnTo>
-                <a:lnTo>
-                  <a:pt x="0" y="0"/>
-                </a:lnTo>
-                <a:lnTo>
-                  <a:pt x="0" y="1810331"/>
+                  <a:pt x="2870265" y="1317378"/>
+                </a:lnTo>
+                <a:lnTo>
+                  <a:pt x="2870265" y="0"/>
+                </a:lnTo>
+                <a:lnTo>
+                  <a:pt x="0" y="0"/>
+                </a:lnTo>
+                <a:lnTo>
+                  <a:pt x="0" y="1317378"/>
                 </a:lnTo>
                 <a:close/>
               </a:path>
@@ -7101,66 +7171,14 @@
       </p:sp>
       <p:sp>
         <p:nvSpPr>
-          <p:cNvPr name="Freeform 7" id="7"/>
-          <p:cNvSpPr/>
-          <p:nvPr/>
-        </p:nvSpPr>
-        <p:spPr>
-          <a:xfrm flipH="false" flipV="true" rot="0">
-            <a:off x="15635604" y="9222587"/>
-            <a:ext cx="2870265" cy="1317378"/>
-          </a:xfrm>
-          <a:custGeom>
-            <a:avLst/>
-            <a:gdLst/>
-            <a:ahLst/>
-            <a:cxnLst/>
-            <a:rect r="r" b="b" t="t" l="l"/>
-            <a:pathLst>
-              <a:path h="1317378" w="2870265">
-                <a:moveTo>
-                  <a:pt x="0" y="1317378"/>
-                </a:moveTo>
-                <a:lnTo>
-                  <a:pt x="2870265" y="1317378"/>
-                </a:lnTo>
-                <a:lnTo>
-                  <a:pt x="2870265" y="0"/>
-                </a:lnTo>
-                <a:lnTo>
-                  <a:pt x="0" y="0"/>
-                </a:lnTo>
-                <a:lnTo>
-                  <a:pt x="0" y="1317378"/>
-                </a:lnTo>
-                <a:close/>
-              </a:path>
-            </a:pathLst>
-          </a:custGeom>
-          <a:blipFill>
-            <a:blip r:embed="rId10">
-              <a:extLst>
-                <a:ext uri="{96DAC541-7B7A-43D3-8B79-37D633B846F1}">
-                  <asvg:svgBlip xmlns:asvg="http://schemas.microsoft.com/office/drawing/2016/SVG/main" r:embed="rId11"/>
-                </a:ext>
-              </a:extLst>
-            </a:blip>
-            <a:stretch>
-              <a:fillRect l="0" t="0" r="0" b="0"/>
-            </a:stretch>
-          </a:blipFill>
-        </p:spPr>
-      </p:sp>
-      <p:sp>
-        <p:nvSpPr>
-          <p:cNvPr name="TextBox 8" id="8"/>
+          <p:cNvPr name="TextBox 7" id="7"/>
           <p:cNvSpPr txBox="true"/>
           <p:nvPr/>
         </p:nvSpPr>
         <p:spPr>
           <a:xfrm rot="0">
-            <a:off x="1948958" y="-165100"/>
-            <a:ext cx="14390084" cy="1193800"/>
+            <a:off x="1567407" y="544513"/>
+            <a:ext cx="15153186" cy="936625"/>
           </a:xfrm>
           <a:prstGeom prst="rect">
             <a:avLst/>
@@ -7174,37 +7192,49 @@
           <a:p>
             <a:pPr algn="ctr">
               <a:lnSpc>
-                <a:spcPts val="9799"/>
+                <a:spcPts val="7699"/>
               </a:lnSpc>
               <a:spcBef>
                 <a:spcPct val="0"/>
               </a:spcBef>
             </a:pPr>
             <a:r>
-              <a:rPr lang="en-US" b="true" sz="6999">
-                <a:solidFill>
-                  <a:srgbClr val="17548F"/>
-                </a:solidFill>
-                <a:latin typeface="Faustina Bold"/>
-                <a:ea typeface="Faustina Bold"/>
-                <a:cs typeface="Faustina Bold"/>
-                <a:sym typeface="Faustina Bold"/>
-              </a:rPr>
-              <a:t>9. Hạn chế của đề tài</a:t>
+              <a:rPr lang="en-US" b="true" sz="5499">
+                <a:solidFill>
+                  <a:srgbClr val="17548F"/>
+                </a:solidFill>
+                <a:latin typeface="Faustina Bold"/>
+                <a:ea typeface="Faustina Bold"/>
+                <a:cs typeface="Faustina Bold"/>
+                <a:sym typeface="Faustina Bold"/>
+              </a:rPr>
+              <a:t>9.</a:t>
+            </a:r>
+            <a:r>
+              <a:rPr lang="en-US" b="true" sz="5499">
+                <a:solidFill>
+                  <a:srgbClr val="17548F"/>
+                </a:solidFill>
+                <a:latin typeface="Faustina Bold"/>
+                <a:ea typeface="Faustina Bold"/>
+                <a:cs typeface="Faustina Bold"/>
+                <a:sym typeface="Faustina Bold"/>
+              </a:rPr>
+              <a:t> Đóng góp mới của đề tài </a:t>
             </a:r>
           </a:p>
         </p:txBody>
       </p:sp>
       <p:sp>
         <p:nvSpPr>
-          <p:cNvPr name="TextBox 9" id="9"/>
+          <p:cNvPr name="TextBox 8" id="8"/>
           <p:cNvSpPr txBox="true"/>
           <p:nvPr/>
         </p:nvSpPr>
         <p:spPr>
           <a:xfrm rot="0">
-            <a:off x="1317307" y="2403192"/>
-            <a:ext cx="15653385" cy="5559425"/>
+            <a:off x="1317307" y="2117998"/>
+            <a:ext cx="15653385" cy="6797675"/>
           </a:xfrm>
           <a:prstGeom prst="rect">
             <a:avLst/>
@@ -7215,6 +7245,25 @@
             <a:spAutoFit/>
           </a:bodyPr>
           <a:lstStyle/>
+          <a:p>
+            <a:pPr algn="just">
+              <a:lnSpc>
+                <a:spcPts val="4900"/>
+              </a:lnSpc>
+            </a:pPr>
+            <a:r>
+              <a:rPr lang="en-US" sz="3500" b="true">
+                <a:solidFill>
+                  <a:srgbClr val="17548F"/>
+                </a:solidFill>
+                <a:latin typeface="Faustina Bold"/>
+                <a:ea typeface="Faustina Bold"/>
+                <a:cs typeface="Faustina Bold"/>
+                <a:sym typeface="Faustina Bold"/>
+              </a:rPr>
+              <a:t>Phần tự làm:</a:t>
+            </a:r>
+          </a:p>
           <a:p>
             <a:pPr algn="just" marL="755651" indent="-377825" lvl="1">
               <a:lnSpc>
@@ -7233,7 +7282,7 @@
                 <a:cs typeface="Faustina Bold"/>
                 <a:sym typeface="Faustina Bold"/>
               </a:rPr>
-              <a:t>Mất thông</a:t>
+              <a:t>Tự xây dựng trọn vẹn pipeline từ</a:t>
             </a:r>
             <a:r>
               <a:rPr lang="en-US" b="true" sz="3500">
@@ -7245,31 +7294,7 @@
                 <a:cs typeface="Faustina Bold"/>
                 <a:sym typeface="Faustina Bold"/>
               </a:rPr>
-              <a:t> tin 3D: Do xử</a:t>
-            </a:r>
-            <a:r>
-              <a:rPr lang="en-US" b="true" sz="3500">
-                <a:solidFill>
-                  <a:srgbClr val="17548F"/>
-                </a:solidFill>
-                <a:latin typeface="Faustina Bold"/>
-                <a:ea typeface="Faustina Bold"/>
-                <a:cs typeface="Faustina Bold"/>
-                <a:sym typeface="Faustina Bold"/>
-              </a:rPr>
-              <a:t> lý từng lát cắt 2D độc lập nên thiếu sự liên kết không gian g</a:t>
-            </a:r>
-            <a:r>
-              <a:rPr lang="en-US" b="true" sz="3500">
-                <a:solidFill>
-                  <a:srgbClr val="17548F"/>
-                </a:solidFill>
-                <a:latin typeface="Faustina Bold"/>
-                <a:ea typeface="Faustina Bold"/>
-                <a:cs typeface="Faustina Bold"/>
-                <a:sym typeface="Faustina Bold"/>
-              </a:rPr>
-              <a:t>iữa các lát (trục Z).</a:t>
+              <a:t> xử lý dữ liệu thô đến huấn luyện và đánh giá.</a:t>
             </a:r>
           </a:p>
           <a:p>
@@ -7290,7 +7315,71 @@
                 <a:cs typeface="Faustina Bold"/>
                 <a:sym typeface="Faustina Bold"/>
               </a:rPr>
-              <a:t>Chỉ thử nghiệm trên dữ liệu BraTS đã chuẩn hóa → chưa kiểm chứng trên MRI thô từ bệnh viện</a:t>
+              <a:t>Tự thiết kế c</a:t>
+            </a:r>
+            <a:r>
+              <a:rPr lang="en-US" b="true" sz="3500">
+                <a:solidFill>
+                  <a:srgbClr val="17548F"/>
+                </a:solidFill>
+                <a:latin typeface="Faustina Bold"/>
+                <a:ea typeface="Faustina Bold"/>
+                <a:cs typeface="Faustina Bold"/>
+                <a:sym typeface="Faustina Bold"/>
+              </a:rPr>
+              <a:t>hiến lược chọn lát cắt thông minh để loại bỏ nhiễu.</a:t>
+            </a:r>
+          </a:p>
+          <a:p>
+            <a:pPr algn="just">
+              <a:lnSpc>
+                <a:spcPts val="4900"/>
+              </a:lnSpc>
+            </a:pPr>
+            <a:r>
+              <a:rPr lang="en-US" sz="3500" b="true">
+                <a:solidFill>
+                  <a:srgbClr val="17548F"/>
+                </a:solidFill>
+                <a:latin typeface="Faustina Bold"/>
+                <a:ea typeface="Faustina Bold"/>
+                <a:cs typeface="Faustina Bold"/>
+                <a:sym typeface="Faustina Bold"/>
+              </a:rPr>
+              <a:t>Đóng góp mới:</a:t>
+            </a:r>
+          </a:p>
+          <a:p>
+            <a:pPr algn="just" marL="755651" indent="-377825" lvl="1">
+              <a:lnSpc>
+                <a:spcPts val="4900"/>
+              </a:lnSpc>
+              <a:buFont typeface="Arial"/>
+              <a:buChar char="•"/>
+            </a:pPr>
+            <a:r>
+              <a:rPr lang="en-US" b="true" sz="3500">
+                <a:solidFill>
+                  <a:srgbClr val="17548F"/>
+                </a:solidFill>
+                <a:latin typeface="Faustina Bold"/>
+                <a:ea typeface="Faustina Bold"/>
+                <a:cs typeface="Faustina Bold"/>
+                <a:sym typeface="Faustina Bold"/>
+              </a:rPr>
+              <a:t>Đề xuất tỷ lệ Combined Loss </a:t>
+            </a:r>
+            <a:r>
+              <a:rPr lang="en-US" b="true" sz="3500">
+                <a:solidFill>
+                  <a:srgbClr val="17548F"/>
+                </a:solidFill>
+                <a:latin typeface="Faustina Bold"/>
+                <a:ea typeface="Faustina Bold"/>
+                <a:cs typeface="Faustina Bold"/>
+                <a:sym typeface="Faustina Bold"/>
+              </a:rPr>
+              <a:t>tối ưu (0.4:0.4:0.2) cho dữ liệu BraTS.</a:t>
             </a:r>
           </a:p>
           <a:p>
@@ -7314,7 +7403,7 @@
                 <a:cs typeface="Faustina Bold"/>
                 <a:sym typeface="Faustina Bold"/>
               </a:rPr>
-              <a:t>Hiện tượng Overfitting </a:t>
+              <a:t>Chứng mi</a:t>
             </a:r>
             <a:r>
               <a:rPr lang="en-US" b="true" sz="3500">
@@ -7326,20 +7415,8 @@
                 <a:cs typeface="Faustina Bold"/>
                 <a:sym typeface="Faustina Bold"/>
               </a:rPr>
-              <a:t>nhẹ: Sau epoch 32, validation dice có xu hướng giảm nhẹ.</a:t>
-            </a:r>
-          </a:p>
-          <a:p>
-            <a:pPr algn="just" marL="755651" indent="-377825" lvl="1">
-              <a:lnSpc>
-                <a:spcPts val="4900"/>
-              </a:lnSpc>
-              <a:spcBef>
-                <a:spcPct val="0"/>
-              </a:spcBef>
-              <a:buFont typeface="Arial"/>
-              <a:buChar char="•"/>
-            </a:pPr>
+              <a:t>nh hiệu quả của mô hình 2D "nhẹ" (7.7 triệu tham số) so với các mô hình 3D nặng </a:t>
+            </a:r>
             <a:r>
               <a:rPr lang="en-US" b="true" sz="3500">
                 <a:solidFill>
@@ -7350,55 +7427,7 @@
                 <a:cs typeface="Faustina Bold"/>
                 <a:sym typeface="Faustina Bold"/>
               </a:rPr>
-              <a:t>Chưa kiểm thử lâm sàng: Chưa có</a:t>
-            </a:r>
-            <a:r>
-              <a:rPr lang="en-US" b="true" sz="3500">
-                <a:solidFill>
-                  <a:srgbClr val="17548F"/>
-                </a:solidFill>
-                <a:latin typeface="Faustina Bold"/>
-                <a:ea typeface="Faustina Bold"/>
-                <a:cs typeface="Faustina Bold"/>
-                <a:sym typeface="Faustina Bold"/>
-              </a:rPr>
-              <a:t> đánh g</a:t>
-            </a:r>
-            <a:r>
-              <a:rPr lang="en-US" b="true" sz="3500">
-                <a:solidFill>
-                  <a:srgbClr val="17548F"/>
-                </a:solidFill>
-                <a:latin typeface="Faustina Bold"/>
-                <a:ea typeface="Faustina Bold"/>
-                <a:cs typeface="Faustina Bold"/>
-                <a:sym typeface="Faustina Bold"/>
-              </a:rPr>
-              <a:t>iá từ bác sĩ trên bệnh nhân thực tế.</a:t>
-            </a:r>
-          </a:p>
-          <a:p>
-            <a:pPr algn="just" marL="755651" indent="-377825" lvl="1">
-              <a:lnSpc>
-                <a:spcPts val="4900"/>
-              </a:lnSpc>
-              <a:spcBef>
-                <a:spcPct val="0"/>
-              </a:spcBef>
-              <a:buFont typeface="Arial"/>
-              <a:buChar char="•"/>
-            </a:pPr>
-            <a:r>
-              <a:rPr lang="en-US" b="true" sz="3500">
-                <a:solidFill>
-                  <a:srgbClr val="17548F"/>
-                </a:solidFill>
-                <a:latin typeface="Faustina Bold"/>
-                <a:ea typeface="Faustina Bold"/>
-                <a:cs typeface="Faustina Bold"/>
-                <a:sym typeface="Faustina Bold"/>
-              </a:rPr>
-              <a:t> Mô hình chưa ổn định với vùng khó đặc biệt là vùng NCR</a:t>
+              <a:t>nề.</a:t>
             </a:r>
           </a:p>
           <a:p>
@@ -7410,8 +7439,100 @@
                 <a:spcPct val="0"/>
               </a:spcBef>
             </a:pPr>
+            <a:r>
+              <a:rPr lang="en-US" b="true" sz="3500">
+                <a:solidFill>
+                  <a:srgbClr val="17548F"/>
+                </a:solidFill>
+                <a:latin typeface="Faustina Bold"/>
+                <a:ea typeface="Faustina Bold"/>
+                <a:cs typeface="Faustina Bold"/>
+                <a:sym typeface="Faustina Bold"/>
+              </a:rPr>
+              <a:t>Tốt hơn phương pháp cũ: Tốc độ suy luận &lt; 30 giây/ca (nhanh hơn hàng trăm</a:t>
+            </a:r>
+            <a:r>
+              <a:rPr lang="en-US" b="true" sz="3500">
+                <a:solidFill>
+                  <a:srgbClr val="17548F"/>
+                </a:solidFill>
+                <a:latin typeface="Faustina Bold"/>
+                <a:ea typeface="Faustina Bold"/>
+                <a:cs typeface="Faustina Bold"/>
+                <a:sym typeface="Faustina Bold"/>
+              </a:rPr>
+              <a:t> lần so</a:t>
+            </a:r>
+            <a:r>
+              <a:rPr lang="en-US" b="true" sz="3500">
+                <a:solidFill>
+                  <a:srgbClr val="17548F"/>
+                </a:solidFill>
+                <a:latin typeface="Faustina Bold"/>
+                <a:ea typeface="Faustina Bold"/>
+                <a:cs typeface="Faustina Bold"/>
+                <a:sym typeface="Faustina Bold"/>
+              </a:rPr>
+              <a:t> với làm tay), chi phí phần cứng thấp.</a:t>
+            </a:r>
+          </a:p>
+          <a:p>
+            <a:pPr algn="just">
+              <a:lnSpc>
+                <a:spcPts val="4900"/>
+              </a:lnSpc>
+              <a:spcBef>
+                <a:spcPct val="0"/>
+              </a:spcBef>
+            </a:pPr>
           </a:p>
         </p:txBody>
+      </p:sp>
+      <p:sp>
+        <p:nvSpPr>
+          <p:cNvPr name="Freeform 9" id="9"/>
+          <p:cNvSpPr/>
+          <p:nvPr/>
+        </p:nvSpPr>
+        <p:spPr>
+          <a:xfrm flipH="false" flipV="false" rot="0">
+            <a:off x="247041" y="263470"/>
+            <a:ext cx="2683548" cy="765230"/>
+          </a:xfrm>
+          <a:custGeom>
+            <a:avLst/>
+            <a:gdLst/>
+            <a:ahLst/>
+            <a:cxnLst/>
+            <a:rect r="r" b="b" t="t" l="l"/>
+            <a:pathLst>
+              <a:path h="765230" w="2683548">
+                <a:moveTo>
+                  <a:pt x="0" y="0"/>
+                </a:moveTo>
+                <a:lnTo>
+                  <a:pt x="2683548" y="0"/>
+                </a:lnTo>
+                <a:lnTo>
+                  <a:pt x="2683548" y="765230"/>
+                </a:lnTo>
+                <a:lnTo>
+                  <a:pt x="0" y="765230"/>
+                </a:lnTo>
+                <a:lnTo>
+                  <a:pt x="0" y="0"/>
+                </a:lnTo>
+                <a:close/>
+              </a:path>
+            </a:pathLst>
+          </a:custGeom>
+          <a:blipFill>
+            <a:blip r:embed="rId10"/>
+            <a:stretch>
+              <a:fillRect l="0" t="0" r="0" b="0"/>
+            </a:stretch>
+          </a:blipFill>
+        </p:spPr>
       </p:sp>
     </p:spTree>
   </p:cSld>
@@ -7663,8 +7784,8 @@
         </p:nvSpPr>
         <p:spPr>
           <a:xfrm flipH="false" flipV="true" rot="0">
-            <a:off x="-746708" y="-439976"/>
-            <a:ext cx="3131075" cy="1810331"/>
+            <a:off x="15635604" y="9222587"/>
+            <a:ext cx="2870265" cy="1317378"/>
           </a:xfrm>
           <a:custGeom>
             <a:avLst/>
@@ -7673,21 +7794,21 @@
             <a:cxnLst/>
             <a:rect r="r" b="b" t="t" l="l"/>
             <a:pathLst>
-              <a:path h="1810331" w="3131075">
+              <a:path h="1317378" w="2870265">
                 <a:moveTo>
-                  <a:pt x="0" y="1810331"/>
+                  <a:pt x="0" y="1317378"/>
                 </a:moveTo>
                 <a:lnTo>
-                  <a:pt x="3131075" y="1810331"/>
-                </a:lnTo>
-                <a:lnTo>
-                  <a:pt x="3131075" y="0"/>
-                </a:lnTo>
-                <a:lnTo>
-                  <a:pt x="0" y="0"/>
-                </a:lnTo>
-                <a:lnTo>
-                  <a:pt x="0" y="1810331"/>
+                  <a:pt x="2870265" y="1317378"/>
+                </a:lnTo>
+                <a:lnTo>
+                  <a:pt x="2870265" y="0"/>
+                </a:lnTo>
+                <a:lnTo>
+                  <a:pt x="0" y="0"/>
+                </a:lnTo>
+                <a:lnTo>
+                  <a:pt x="0" y="1317378"/>
                 </a:lnTo>
                 <a:close/>
               </a:path>
@@ -7709,66 +7830,14 @@
       </p:sp>
       <p:sp>
         <p:nvSpPr>
-          <p:cNvPr name="Freeform 7" id="7"/>
-          <p:cNvSpPr/>
-          <p:nvPr/>
-        </p:nvSpPr>
-        <p:spPr>
-          <a:xfrm flipH="false" flipV="true" rot="0">
-            <a:off x="15635604" y="9222587"/>
-            <a:ext cx="2870265" cy="1317378"/>
-          </a:xfrm>
-          <a:custGeom>
-            <a:avLst/>
-            <a:gdLst/>
-            <a:ahLst/>
-            <a:cxnLst/>
-            <a:rect r="r" b="b" t="t" l="l"/>
-            <a:pathLst>
-              <a:path h="1317378" w="2870265">
-                <a:moveTo>
-                  <a:pt x="0" y="1317378"/>
-                </a:moveTo>
-                <a:lnTo>
-                  <a:pt x="2870265" y="1317378"/>
-                </a:lnTo>
-                <a:lnTo>
-                  <a:pt x="2870265" y="0"/>
-                </a:lnTo>
-                <a:lnTo>
-                  <a:pt x="0" y="0"/>
-                </a:lnTo>
-                <a:lnTo>
-                  <a:pt x="0" y="1317378"/>
-                </a:lnTo>
-                <a:close/>
-              </a:path>
-            </a:pathLst>
-          </a:custGeom>
-          <a:blipFill>
-            <a:blip r:embed="rId10">
-              <a:extLst>
-                <a:ext uri="{96DAC541-7B7A-43D3-8B79-37D633B846F1}">
-                  <asvg:svgBlip xmlns:asvg="http://schemas.microsoft.com/office/drawing/2016/SVG/main" r:embed="rId11"/>
-                </a:ext>
-              </a:extLst>
-            </a:blip>
-            <a:stretch>
-              <a:fillRect l="0" t="0" r="0" b="0"/>
-            </a:stretch>
-          </a:blipFill>
-        </p:spPr>
-      </p:sp>
-      <p:sp>
-        <p:nvSpPr>
-          <p:cNvPr name="TextBox 8" id="8"/>
+          <p:cNvPr name="TextBox 7" id="7"/>
           <p:cNvSpPr txBox="true"/>
           <p:nvPr/>
         </p:nvSpPr>
         <p:spPr>
           <a:xfrm rot="0">
-            <a:off x="673757" y="-133350"/>
-            <a:ext cx="16940487" cy="1193800"/>
+            <a:off x="1948958" y="923925"/>
+            <a:ext cx="14390084" cy="936625"/>
           </a:xfrm>
           <a:prstGeom prst="rect">
             <a:avLst/>
@@ -7782,37 +7851,37 @@
           <a:p>
             <a:pPr algn="ctr">
               <a:lnSpc>
-                <a:spcPts val="9799"/>
+                <a:spcPts val="7699"/>
               </a:lnSpc>
               <a:spcBef>
                 <a:spcPct val="0"/>
               </a:spcBef>
             </a:pPr>
             <a:r>
-              <a:rPr lang="en-US" b="true" sz="6999">
-                <a:solidFill>
-                  <a:srgbClr val="17548F"/>
-                </a:solidFill>
-                <a:latin typeface="Faustina Bold"/>
-                <a:ea typeface="Faustina Bold"/>
-                <a:cs typeface="Faustina Bold"/>
-                <a:sym typeface="Faustina Bold"/>
-              </a:rPr>
-              <a:t>10. Hướng phát triển tương lai </a:t>
+              <a:rPr lang="en-US" b="true" sz="5499">
+                <a:solidFill>
+                  <a:srgbClr val="17548F"/>
+                </a:solidFill>
+                <a:latin typeface="Faustina Bold"/>
+                <a:ea typeface="Faustina Bold"/>
+                <a:cs typeface="Faustina Bold"/>
+                <a:sym typeface="Faustina Bold"/>
+              </a:rPr>
+              <a:t>10. Hạn chế của đề tài</a:t>
             </a:r>
           </a:p>
         </p:txBody>
       </p:sp>
       <p:sp>
         <p:nvSpPr>
-          <p:cNvPr name="TextBox 9" id="9"/>
+          <p:cNvPr name="TextBox 8" id="8"/>
           <p:cNvSpPr txBox="true"/>
           <p:nvPr/>
         </p:nvSpPr>
         <p:spPr>
           <a:xfrm rot="0">
-            <a:off x="1317307" y="2309304"/>
-            <a:ext cx="15653385" cy="6178550"/>
+            <a:off x="1317307" y="2403192"/>
+            <a:ext cx="15653385" cy="5559425"/>
           </a:xfrm>
           <a:prstGeom prst="rect">
             <a:avLst/>
@@ -7841,7 +7910,7 @@
                 <a:cs typeface="Faustina Bold"/>
                 <a:sym typeface="Faustina Bold"/>
               </a:rPr>
-              <a:t>Cải tiến mô hình: Thử</a:t>
+              <a:t>Mất thông</a:t>
             </a:r>
             <a:r>
               <a:rPr lang="en-US" b="true" sz="3500">
@@ -7853,7 +7922,7 @@
                 <a:cs typeface="Faustina Bold"/>
                 <a:sym typeface="Faustina Bold"/>
               </a:rPr>
-              <a:t> nghiệm 3D U-Net hoặc tích hợp Atten</a:t>
+              <a:t> tin 3D: Do xử</a:t>
             </a:r>
             <a:r>
               <a:rPr lang="en-US" b="true" sz="3500">
@@ -7865,7 +7934,7 @@
                 <a:cs typeface="Faustina Bold"/>
                 <a:sym typeface="Faustina Bold"/>
               </a:rPr>
-              <a:t>tion Gate để</a:t>
+              <a:t> lý từng lát cắt 2D độc lập nên thiếu sự liên kết không gian g</a:t>
             </a:r>
             <a:r>
               <a:rPr lang="en-US" b="true" sz="3500">
@@ -7877,7 +7946,7 @@
                 <a:cs typeface="Faustina Bold"/>
                 <a:sym typeface="Faustina Bold"/>
               </a:rPr>
-              <a:t> tăng độ chính xác biên .</a:t>
+              <a:t>iữa các lát (trục Z).</a:t>
             </a:r>
           </a:p>
           <a:p>
@@ -7898,43 +7967,7 @@
                 <a:cs typeface="Faustina Bold"/>
                 <a:sym typeface="Faustina Bold"/>
               </a:rPr>
-              <a:t>Mở rộng d</a:t>
-            </a:r>
-            <a:r>
-              <a:rPr lang="en-US" b="true" sz="3500">
-                <a:solidFill>
-                  <a:srgbClr val="17548F"/>
-                </a:solidFill>
-                <a:latin typeface="Faustina Bold"/>
-                <a:ea typeface="Faustina Bold"/>
-                <a:cs typeface="Faustina Bold"/>
-                <a:sym typeface="Faustina Bold"/>
-              </a:rPr>
-              <a:t>ữ liệu</a:t>
-            </a:r>
-            <a:r>
-              <a:rPr lang="en-US" b="true" sz="3500">
-                <a:solidFill>
-                  <a:srgbClr val="17548F"/>
-                </a:solidFill>
-                <a:latin typeface="Faustina Bold"/>
-                <a:ea typeface="Faustina Bold"/>
-                <a:cs typeface="Faustina Bold"/>
-                <a:sym typeface="Faustina Bold"/>
-              </a:rPr>
-              <a:t>: T</a:t>
-            </a:r>
-            <a:r>
-              <a:rPr lang="en-US" b="true" sz="3500">
-                <a:solidFill>
-                  <a:srgbClr val="17548F"/>
-                </a:solidFill>
-                <a:latin typeface="Faustina Bold"/>
-                <a:ea typeface="Faustina Bold"/>
-                <a:cs typeface="Faustina Bold"/>
-                <a:sym typeface="Faustina Bold"/>
-              </a:rPr>
-              <a:t>hu thập thêm dữ liệu đa trung tâm từ các bệnh viện thực tế để tăng tính tổng quát hóa.</a:t>
+              <a:t>Chỉ thử nghiệm trên dữ liệu BraTS đã chuẩn hóa → chưa kiểm chứng trên MRI thô từ bệnh viện</a:t>
             </a:r>
           </a:p>
           <a:p>
@@ -7958,7 +7991,7 @@
                 <a:cs typeface="Faustina Bold"/>
                 <a:sym typeface="Faustina Bold"/>
               </a:rPr>
-              <a:t>Sả</a:t>
+              <a:t>Hiện tượng Overfitting </a:t>
             </a:r>
             <a:r>
               <a:rPr lang="en-US" b="true" sz="3500">
@@ -7970,7 +8003,7 @@
                 <a:cs typeface="Faustina Bold"/>
                 <a:sym typeface="Faustina Bold"/>
               </a:rPr>
-              <a:t>n phẩm hóa: Xây dựng Web App hoặc tích hợp vào hệ thống PACS để bác sĩ có thể sử dụng trực tiếp.</a:t>
+              <a:t>nhẹ: Sau epoch 32, validation dice có xu hướng giảm nhẹ.</a:t>
             </a:r>
           </a:p>
           <a:p>
@@ -7994,7 +8027,7 @@
                 <a:cs typeface="Faustina Bold"/>
                 <a:sym typeface="Faustina Bold"/>
               </a:rPr>
-              <a:t>Expl</a:t>
+              <a:t>Chưa kiểm thử lâm sàng: Chưa có</a:t>
             </a:r>
             <a:r>
               <a:rPr lang="en-US" b="true" sz="3500">
@@ -8006,7 +8039,7 @@
                 <a:cs typeface="Faustina Bold"/>
                 <a:sym typeface="Faustina Bold"/>
               </a:rPr>
-              <a:t>ainable AI: Tích hợp Grad-CAM</a:t>
+              <a:t> đánh g</a:t>
             </a:r>
             <a:r>
               <a:rPr lang="en-US" b="true" sz="3500">
@@ -8018,19 +8051,7 @@
                 <a:cs typeface="Faustina Bold"/>
                 <a:sym typeface="Faustina Bold"/>
               </a:rPr>
-              <a:t> để g</a:t>
-            </a:r>
-            <a:r>
-              <a:rPr lang="en-US" b="true" sz="3500">
-                <a:solidFill>
-                  <a:srgbClr val="17548F"/>
-                </a:solidFill>
-                <a:latin typeface="Faustina Bold"/>
-                <a:ea typeface="Faustina Bold"/>
-                <a:cs typeface="Faustina Bold"/>
-                <a:sym typeface="Faustina Bold"/>
-              </a:rPr>
-              <a:t>iải thích tại sao mô hình lại khoanh vùng như vậy</a:t>
+              <a:t>iá từ bác sĩ trên bệnh nhân thực tế.</a:t>
             </a:r>
           </a:p>
           <a:p>
@@ -8054,7 +8075,7 @@
                 <a:cs typeface="Faustina Bold"/>
                 <a:sym typeface="Faustina Bold"/>
               </a:rPr>
-              <a:t>Kết hợp AI xây dựng thông AI Agent tự động hóa các quy trình</a:t>
+              <a:t> Mô hình chưa ổn định với vùng khó đặc biệt là vùng NCR</a:t>
             </a:r>
           </a:p>
           <a:p>
@@ -8068,6 +8089,52 @@
             </a:pPr>
           </a:p>
         </p:txBody>
+      </p:sp>
+      <p:sp>
+        <p:nvSpPr>
+          <p:cNvPr name="Freeform 9" id="9"/>
+          <p:cNvSpPr/>
+          <p:nvPr/>
+        </p:nvSpPr>
+        <p:spPr>
+          <a:xfrm flipH="false" flipV="false" rot="0">
+            <a:off x="247041" y="263470"/>
+            <a:ext cx="2683548" cy="765230"/>
+          </a:xfrm>
+          <a:custGeom>
+            <a:avLst/>
+            <a:gdLst/>
+            <a:ahLst/>
+            <a:cxnLst/>
+            <a:rect r="r" b="b" t="t" l="l"/>
+            <a:pathLst>
+              <a:path h="765230" w="2683548">
+                <a:moveTo>
+                  <a:pt x="0" y="0"/>
+                </a:moveTo>
+                <a:lnTo>
+                  <a:pt x="2683548" y="0"/>
+                </a:lnTo>
+                <a:lnTo>
+                  <a:pt x="2683548" y="765230"/>
+                </a:lnTo>
+                <a:lnTo>
+                  <a:pt x="0" y="765230"/>
+                </a:lnTo>
+                <a:lnTo>
+                  <a:pt x="0" y="0"/>
+                </a:lnTo>
+                <a:close/>
+              </a:path>
+            </a:pathLst>
+          </a:custGeom>
+          <a:blipFill>
+            <a:blip r:embed="rId10"/>
+            <a:stretch>
+              <a:fillRect l="0" t="0" r="0" b="0"/>
+            </a:stretch>
+          </a:blipFill>
+        </p:spPr>
       </p:sp>
     </p:spTree>
   </p:cSld>
@@ -8319,8 +8386,8 @@
         </p:nvSpPr>
         <p:spPr>
           <a:xfrm flipH="false" flipV="true" rot="0">
-            <a:off x="-746708" y="-439976"/>
-            <a:ext cx="3131075" cy="1810331"/>
+            <a:off x="15635604" y="9222587"/>
+            <a:ext cx="2870265" cy="1317378"/>
           </a:xfrm>
           <a:custGeom>
             <a:avLst/>
@@ -8329,21 +8396,21 @@
             <a:cxnLst/>
             <a:rect r="r" b="b" t="t" l="l"/>
             <a:pathLst>
-              <a:path h="1810331" w="3131075">
+              <a:path h="1317378" w="2870265">
                 <a:moveTo>
-                  <a:pt x="0" y="1810331"/>
+                  <a:pt x="0" y="1317378"/>
                 </a:moveTo>
                 <a:lnTo>
-                  <a:pt x="3131075" y="1810331"/>
-                </a:lnTo>
-                <a:lnTo>
-                  <a:pt x="3131075" y="0"/>
-                </a:lnTo>
-                <a:lnTo>
-                  <a:pt x="0" y="0"/>
-                </a:lnTo>
-                <a:lnTo>
-                  <a:pt x="0" y="1810331"/>
+                  <a:pt x="2870265" y="1317378"/>
+                </a:lnTo>
+                <a:lnTo>
+                  <a:pt x="2870265" y="0"/>
+                </a:lnTo>
+                <a:lnTo>
+                  <a:pt x="0" y="0"/>
+                </a:lnTo>
+                <a:lnTo>
+                  <a:pt x="0" y="1317378"/>
                 </a:lnTo>
                 <a:close/>
               </a:path>
@@ -8365,7 +8432,552 @@
       </p:sp>
       <p:sp>
         <p:nvSpPr>
-          <p:cNvPr name="Freeform 7" id="7"/>
+          <p:cNvPr name="TextBox 7" id="7"/>
+          <p:cNvSpPr txBox="true"/>
+          <p:nvPr/>
+        </p:nvSpPr>
+        <p:spPr>
+          <a:xfrm rot="0">
+            <a:off x="673757" y="923925"/>
+            <a:ext cx="16940487" cy="936625"/>
+          </a:xfrm>
+          <a:prstGeom prst="rect">
+            <a:avLst/>
+          </a:prstGeom>
+        </p:spPr>
+        <p:txBody>
+          <a:bodyPr anchor="t" rtlCol="false" tIns="0" lIns="0" bIns="0" rIns="0">
+            <a:spAutoFit/>
+          </a:bodyPr>
+          <a:lstStyle/>
+          <a:p>
+            <a:pPr algn="ctr">
+              <a:lnSpc>
+                <a:spcPts val="7699"/>
+              </a:lnSpc>
+              <a:spcBef>
+                <a:spcPct val="0"/>
+              </a:spcBef>
+            </a:pPr>
+            <a:r>
+              <a:rPr lang="en-US" b="true" sz="5499">
+                <a:solidFill>
+                  <a:srgbClr val="17548F"/>
+                </a:solidFill>
+                <a:latin typeface="Faustina Bold"/>
+                <a:ea typeface="Faustina Bold"/>
+                <a:cs typeface="Faustina Bold"/>
+                <a:sym typeface="Faustina Bold"/>
+              </a:rPr>
+              <a:t>11. Hướng phát triển tương lai </a:t>
+            </a:r>
+          </a:p>
+        </p:txBody>
+      </p:sp>
+      <p:sp>
+        <p:nvSpPr>
+          <p:cNvPr name="TextBox 8" id="8"/>
+          <p:cNvSpPr txBox="true"/>
+          <p:nvPr/>
+        </p:nvSpPr>
+        <p:spPr>
+          <a:xfrm rot="0">
+            <a:off x="1317307" y="2723615"/>
+            <a:ext cx="15653385" cy="6178550"/>
+          </a:xfrm>
+          <a:prstGeom prst="rect">
+            <a:avLst/>
+          </a:prstGeom>
+        </p:spPr>
+        <p:txBody>
+          <a:bodyPr anchor="t" rtlCol="false" tIns="0" lIns="0" bIns="0" rIns="0">
+            <a:spAutoFit/>
+          </a:bodyPr>
+          <a:lstStyle/>
+          <a:p>
+            <a:pPr algn="just" marL="755651" indent="-377825" lvl="1">
+              <a:lnSpc>
+                <a:spcPts val="4900"/>
+              </a:lnSpc>
+              <a:buFont typeface="Arial"/>
+              <a:buChar char="•"/>
+            </a:pPr>
+            <a:r>
+              <a:rPr lang="en-US" b="true" sz="3500">
+                <a:solidFill>
+                  <a:srgbClr val="17548F"/>
+                </a:solidFill>
+                <a:latin typeface="Faustina Bold"/>
+                <a:ea typeface="Faustina Bold"/>
+                <a:cs typeface="Faustina Bold"/>
+                <a:sym typeface="Faustina Bold"/>
+              </a:rPr>
+              <a:t>Cải tiến mô hình: Thử</a:t>
+            </a:r>
+            <a:r>
+              <a:rPr lang="en-US" b="true" sz="3500">
+                <a:solidFill>
+                  <a:srgbClr val="17548F"/>
+                </a:solidFill>
+                <a:latin typeface="Faustina Bold"/>
+                <a:ea typeface="Faustina Bold"/>
+                <a:cs typeface="Faustina Bold"/>
+                <a:sym typeface="Faustina Bold"/>
+              </a:rPr>
+              <a:t> nghiệm 3D U-Net hoặc tích hợp Atten</a:t>
+            </a:r>
+            <a:r>
+              <a:rPr lang="en-US" b="true" sz="3500">
+                <a:solidFill>
+                  <a:srgbClr val="17548F"/>
+                </a:solidFill>
+                <a:latin typeface="Faustina Bold"/>
+                <a:ea typeface="Faustina Bold"/>
+                <a:cs typeface="Faustina Bold"/>
+                <a:sym typeface="Faustina Bold"/>
+              </a:rPr>
+              <a:t>tion Gate để</a:t>
+            </a:r>
+            <a:r>
+              <a:rPr lang="en-US" b="true" sz="3500">
+                <a:solidFill>
+                  <a:srgbClr val="17548F"/>
+                </a:solidFill>
+                <a:latin typeface="Faustina Bold"/>
+                <a:ea typeface="Faustina Bold"/>
+                <a:cs typeface="Faustina Bold"/>
+                <a:sym typeface="Faustina Bold"/>
+              </a:rPr>
+              <a:t> tăng độ chính xác biên .</a:t>
+            </a:r>
+          </a:p>
+          <a:p>
+            <a:pPr algn="just" marL="755651" indent="-377825" lvl="1">
+              <a:lnSpc>
+                <a:spcPts val="4900"/>
+              </a:lnSpc>
+              <a:buFont typeface="Arial"/>
+              <a:buChar char="•"/>
+            </a:pPr>
+            <a:r>
+              <a:rPr lang="en-US" b="true" sz="3500">
+                <a:solidFill>
+                  <a:srgbClr val="17548F"/>
+                </a:solidFill>
+                <a:latin typeface="Faustina Bold"/>
+                <a:ea typeface="Faustina Bold"/>
+                <a:cs typeface="Faustina Bold"/>
+                <a:sym typeface="Faustina Bold"/>
+              </a:rPr>
+              <a:t>Mở rộng d</a:t>
+            </a:r>
+            <a:r>
+              <a:rPr lang="en-US" b="true" sz="3500">
+                <a:solidFill>
+                  <a:srgbClr val="17548F"/>
+                </a:solidFill>
+                <a:latin typeface="Faustina Bold"/>
+                <a:ea typeface="Faustina Bold"/>
+                <a:cs typeface="Faustina Bold"/>
+                <a:sym typeface="Faustina Bold"/>
+              </a:rPr>
+              <a:t>ữ liệu</a:t>
+            </a:r>
+            <a:r>
+              <a:rPr lang="en-US" b="true" sz="3500">
+                <a:solidFill>
+                  <a:srgbClr val="17548F"/>
+                </a:solidFill>
+                <a:latin typeface="Faustina Bold"/>
+                <a:ea typeface="Faustina Bold"/>
+                <a:cs typeface="Faustina Bold"/>
+                <a:sym typeface="Faustina Bold"/>
+              </a:rPr>
+              <a:t>: T</a:t>
+            </a:r>
+            <a:r>
+              <a:rPr lang="en-US" b="true" sz="3500">
+                <a:solidFill>
+                  <a:srgbClr val="17548F"/>
+                </a:solidFill>
+                <a:latin typeface="Faustina Bold"/>
+                <a:ea typeface="Faustina Bold"/>
+                <a:cs typeface="Faustina Bold"/>
+                <a:sym typeface="Faustina Bold"/>
+              </a:rPr>
+              <a:t>hu thập thêm dữ liệu đa trung tâm từ các bệnh viện thực tế để tăng tính tổng quát hóa.</a:t>
+            </a:r>
+          </a:p>
+          <a:p>
+            <a:pPr algn="just" marL="755651" indent="-377825" lvl="1">
+              <a:lnSpc>
+                <a:spcPts val="4900"/>
+              </a:lnSpc>
+              <a:spcBef>
+                <a:spcPct val="0"/>
+              </a:spcBef>
+              <a:buFont typeface="Arial"/>
+              <a:buChar char="•"/>
+            </a:pPr>
+            <a:r>
+              <a:rPr lang="en-US" b="true" sz="3500">
+                <a:solidFill>
+                  <a:srgbClr val="17548F"/>
+                </a:solidFill>
+                <a:latin typeface="Faustina Bold"/>
+                <a:ea typeface="Faustina Bold"/>
+                <a:cs typeface="Faustina Bold"/>
+                <a:sym typeface="Faustina Bold"/>
+              </a:rPr>
+              <a:t>Sả</a:t>
+            </a:r>
+            <a:r>
+              <a:rPr lang="en-US" b="true" sz="3500">
+                <a:solidFill>
+                  <a:srgbClr val="17548F"/>
+                </a:solidFill>
+                <a:latin typeface="Faustina Bold"/>
+                <a:ea typeface="Faustina Bold"/>
+                <a:cs typeface="Faustina Bold"/>
+                <a:sym typeface="Faustina Bold"/>
+              </a:rPr>
+              <a:t>n phẩm hóa: Xây dựng Web App hoặc tích hợp vào hệ thống PACS để bác sĩ có thể sử dụng trực tiếp.</a:t>
+            </a:r>
+          </a:p>
+          <a:p>
+            <a:pPr algn="just" marL="755651" indent="-377825" lvl="1">
+              <a:lnSpc>
+                <a:spcPts val="4900"/>
+              </a:lnSpc>
+              <a:spcBef>
+                <a:spcPct val="0"/>
+              </a:spcBef>
+              <a:buFont typeface="Arial"/>
+              <a:buChar char="•"/>
+            </a:pPr>
+            <a:r>
+              <a:rPr lang="en-US" b="true" sz="3500">
+                <a:solidFill>
+                  <a:srgbClr val="17548F"/>
+                </a:solidFill>
+                <a:latin typeface="Faustina Bold"/>
+                <a:ea typeface="Faustina Bold"/>
+                <a:cs typeface="Faustina Bold"/>
+                <a:sym typeface="Faustina Bold"/>
+              </a:rPr>
+              <a:t>Expl</a:t>
+            </a:r>
+            <a:r>
+              <a:rPr lang="en-US" b="true" sz="3500">
+                <a:solidFill>
+                  <a:srgbClr val="17548F"/>
+                </a:solidFill>
+                <a:latin typeface="Faustina Bold"/>
+                <a:ea typeface="Faustina Bold"/>
+                <a:cs typeface="Faustina Bold"/>
+                <a:sym typeface="Faustina Bold"/>
+              </a:rPr>
+              <a:t>ainable AI: Tích hợp Grad-CAM</a:t>
+            </a:r>
+            <a:r>
+              <a:rPr lang="en-US" b="true" sz="3500">
+                <a:solidFill>
+                  <a:srgbClr val="17548F"/>
+                </a:solidFill>
+                <a:latin typeface="Faustina Bold"/>
+                <a:ea typeface="Faustina Bold"/>
+                <a:cs typeface="Faustina Bold"/>
+                <a:sym typeface="Faustina Bold"/>
+              </a:rPr>
+              <a:t> để g</a:t>
+            </a:r>
+            <a:r>
+              <a:rPr lang="en-US" b="true" sz="3500">
+                <a:solidFill>
+                  <a:srgbClr val="17548F"/>
+                </a:solidFill>
+                <a:latin typeface="Faustina Bold"/>
+                <a:ea typeface="Faustina Bold"/>
+                <a:cs typeface="Faustina Bold"/>
+                <a:sym typeface="Faustina Bold"/>
+              </a:rPr>
+              <a:t>iải thích tại sao mô hình lại khoanh vùng như vậy</a:t>
+            </a:r>
+          </a:p>
+          <a:p>
+            <a:pPr algn="just" marL="755651" indent="-377825" lvl="1">
+              <a:lnSpc>
+                <a:spcPts val="4900"/>
+              </a:lnSpc>
+              <a:spcBef>
+                <a:spcPct val="0"/>
+              </a:spcBef>
+              <a:buFont typeface="Arial"/>
+              <a:buChar char="•"/>
+            </a:pPr>
+            <a:r>
+              <a:rPr lang="en-US" b="true" sz="3500">
+                <a:solidFill>
+                  <a:srgbClr val="17548F"/>
+                </a:solidFill>
+                <a:latin typeface="Faustina Bold"/>
+                <a:ea typeface="Faustina Bold"/>
+                <a:cs typeface="Faustina Bold"/>
+                <a:sym typeface="Faustina Bold"/>
+              </a:rPr>
+              <a:t>Kết hợp AI xây dựng thông AI Agent tự động hóa các quy trình</a:t>
+            </a:r>
+          </a:p>
+          <a:p>
+            <a:pPr algn="just">
+              <a:lnSpc>
+                <a:spcPts val="4900"/>
+              </a:lnSpc>
+              <a:spcBef>
+                <a:spcPct val="0"/>
+              </a:spcBef>
+            </a:pPr>
+          </a:p>
+        </p:txBody>
+      </p:sp>
+      <p:sp>
+        <p:nvSpPr>
+          <p:cNvPr name="Freeform 9" id="9"/>
+          <p:cNvSpPr/>
+          <p:nvPr/>
+        </p:nvSpPr>
+        <p:spPr>
+          <a:xfrm flipH="false" flipV="false" rot="0">
+            <a:off x="247041" y="263470"/>
+            <a:ext cx="2683548" cy="765230"/>
+          </a:xfrm>
+          <a:custGeom>
+            <a:avLst/>
+            <a:gdLst/>
+            <a:ahLst/>
+            <a:cxnLst/>
+            <a:rect r="r" b="b" t="t" l="l"/>
+            <a:pathLst>
+              <a:path h="765230" w="2683548">
+                <a:moveTo>
+                  <a:pt x="0" y="0"/>
+                </a:moveTo>
+                <a:lnTo>
+                  <a:pt x="2683548" y="0"/>
+                </a:lnTo>
+                <a:lnTo>
+                  <a:pt x="2683548" y="765230"/>
+                </a:lnTo>
+                <a:lnTo>
+                  <a:pt x="0" y="765230"/>
+                </a:lnTo>
+                <a:lnTo>
+                  <a:pt x="0" y="0"/>
+                </a:lnTo>
+                <a:close/>
+              </a:path>
+            </a:pathLst>
+          </a:custGeom>
+          <a:blipFill>
+            <a:blip r:embed="rId10"/>
+            <a:stretch>
+              <a:fillRect l="0" t="0" r="0" b="0"/>
+            </a:stretch>
+          </a:blipFill>
+        </p:spPr>
+      </p:sp>
+    </p:spTree>
+  </p:cSld>
+  <p:clrMapOvr>
+    <a:masterClrMapping/>
+  </p:clrMapOvr>
+</p:sld>
+</file>
+
+<file path=ppt/slides/slide18.xml><?xml version="1.0" encoding="utf-8"?>
+<p:sld xmlns:p="http://schemas.openxmlformats.org/presentationml/2006/main" xmlns:a="http://schemas.openxmlformats.org/drawingml/2006/main" xmlns:r="http://schemas.openxmlformats.org/officeDocument/2006/relationships">
+  <p:cSld>
+    <p:bg>
+      <p:bgPr>
+        <a:solidFill>
+          <a:srgbClr val="E6F7FF"/>
+        </a:solidFill>
+      </p:bgPr>
+    </p:bg>
+    <p:spTree>
+      <p:nvGrpSpPr>
+        <p:cNvPr id="1" name=""/>
+        <p:cNvGrpSpPr/>
+        <p:nvPr/>
+      </p:nvGrpSpPr>
+      <p:grpSpPr>
+        <a:xfrm>
+          <a:off x="0" y="0"/>
+          <a:ext cx="0" cy="0"/>
+          <a:chOff x="0" y="0"/>
+          <a:chExt cx="0" cy="0"/>
+        </a:xfrm>
+      </p:grpSpPr>
+      <p:sp>
+        <p:nvSpPr>
+          <p:cNvPr name="Freeform 2" id="2"/>
+          <p:cNvSpPr/>
+          <p:nvPr/>
+        </p:nvSpPr>
+        <p:spPr>
+          <a:xfrm flipH="false" flipV="false" rot="0">
+            <a:off x="16177410" y="7976491"/>
+            <a:ext cx="3758453" cy="3758453"/>
+          </a:xfrm>
+          <a:custGeom>
+            <a:avLst/>
+            <a:gdLst/>
+            <a:ahLst/>
+            <a:cxnLst/>
+            <a:rect r="r" b="b" t="t" l="l"/>
+            <a:pathLst>
+              <a:path h="3758453" w="3758453">
+                <a:moveTo>
+                  <a:pt x="0" y="0"/>
+                </a:moveTo>
+                <a:lnTo>
+                  <a:pt x="3758453" y="0"/>
+                </a:lnTo>
+                <a:lnTo>
+                  <a:pt x="3758453" y="3758453"/>
+                </a:lnTo>
+                <a:lnTo>
+                  <a:pt x="0" y="3758453"/>
+                </a:lnTo>
+                <a:lnTo>
+                  <a:pt x="0" y="0"/>
+                </a:lnTo>
+                <a:close/>
+              </a:path>
+            </a:pathLst>
+          </a:custGeom>
+          <a:blipFill>
+            <a:blip r:embed="rId2">
+              <a:alphaModFix amt="15000"/>
+              <a:extLst>
+                <a:ext uri="{96DAC541-7B7A-43D3-8B79-37D633B846F1}">
+                  <asvg:svgBlip xmlns:asvg="http://schemas.microsoft.com/office/drawing/2016/SVG/main" r:embed="rId3"/>
+                </a:ext>
+              </a:extLst>
+            </a:blip>
+            <a:stretch>
+              <a:fillRect l="0" t="0" r="0" b="0"/>
+            </a:stretch>
+          </a:blipFill>
+        </p:spPr>
+      </p:sp>
+      <p:sp>
+        <p:nvSpPr>
+          <p:cNvPr name="Freeform 3" id="3"/>
+          <p:cNvSpPr/>
+          <p:nvPr/>
+        </p:nvSpPr>
+        <p:spPr>
+          <a:xfrm flipH="false" flipV="true" rot="0">
+            <a:off x="-326967" y="7677423"/>
+            <a:ext cx="2711333" cy="2862542"/>
+          </a:xfrm>
+          <a:custGeom>
+            <a:avLst/>
+            <a:gdLst/>
+            <a:ahLst/>
+            <a:cxnLst/>
+            <a:rect r="r" b="b" t="t" l="l"/>
+            <a:pathLst>
+              <a:path h="2862542" w="2711333">
+                <a:moveTo>
+                  <a:pt x="0" y="2862542"/>
+                </a:moveTo>
+                <a:lnTo>
+                  <a:pt x="2711334" y="2862542"/>
+                </a:lnTo>
+                <a:lnTo>
+                  <a:pt x="2711334" y="0"/>
+                </a:lnTo>
+                <a:lnTo>
+                  <a:pt x="0" y="0"/>
+                </a:lnTo>
+                <a:lnTo>
+                  <a:pt x="0" y="2862542"/>
+                </a:lnTo>
+                <a:close/>
+              </a:path>
+            </a:pathLst>
+          </a:custGeom>
+          <a:blipFill>
+            <a:blip r:embed="rId4">
+              <a:extLst>
+                <a:ext uri="{96DAC541-7B7A-43D3-8B79-37D633B846F1}">
+                  <asvg:svgBlip xmlns:asvg="http://schemas.microsoft.com/office/drawing/2016/SVG/main" r:embed="rId5"/>
+                </a:ext>
+              </a:extLst>
+            </a:blip>
+            <a:stretch>
+              <a:fillRect l="0" t="0" r="0" b="0"/>
+            </a:stretch>
+          </a:blipFill>
+        </p:spPr>
+      </p:sp>
+      <p:sp>
+        <p:nvSpPr>
+          <p:cNvPr name="Freeform 4" id="4"/>
+          <p:cNvSpPr/>
+          <p:nvPr/>
+        </p:nvSpPr>
+        <p:spPr>
+          <a:xfrm flipH="true" flipV="true" rot="0">
+            <a:off x="15463272" y="-421992"/>
+            <a:ext cx="3214928" cy="2901385"/>
+          </a:xfrm>
+          <a:custGeom>
+            <a:avLst/>
+            <a:gdLst/>
+            <a:ahLst/>
+            <a:cxnLst/>
+            <a:rect r="r" b="b" t="t" l="l"/>
+            <a:pathLst>
+              <a:path h="2901385" w="3214928">
+                <a:moveTo>
+                  <a:pt x="3214929" y="2901384"/>
+                </a:moveTo>
+                <a:lnTo>
+                  <a:pt x="0" y="2901384"/>
+                </a:lnTo>
+                <a:lnTo>
+                  <a:pt x="0" y="0"/>
+                </a:lnTo>
+                <a:lnTo>
+                  <a:pt x="3214929" y="0"/>
+                </a:lnTo>
+                <a:lnTo>
+                  <a:pt x="3214929" y="2901384"/>
+                </a:lnTo>
+                <a:close/>
+              </a:path>
+            </a:pathLst>
+          </a:custGeom>
+          <a:blipFill>
+            <a:blip r:embed="rId6">
+              <a:extLst>
+                <a:ext uri="{96DAC541-7B7A-43D3-8B79-37D633B846F1}">
+                  <asvg:svgBlip xmlns:asvg="http://schemas.microsoft.com/office/drawing/2016/SVG/main" r:embed="rId7"/>
+                </a:ext>
+              </a:extLst>
+            </a:blip>
+            <a:stretch>
+              <a:fillRect l="0" t="0" r="0" b="0"/>
+            </a:stretch>
+          </a:blipFill>
+        </p:spPr>
+      </p:sp>
+      <p:sp>
+        <p:nvSpPr>
+          <p:cNvPr name="Freeform 5" id="5"/>
           <p:cNvSpPr/>
           <p:nvPr/>
         </p:nvSpPr>
@@ -8402,10 +9014,10 @@
             </a:pathLst>
           </a:custGeom>
           <a:blipFill>
-            <a:blip r:embed="rId10">
+            <a:blip r:embed="rId8">
               <a:extLst>
                 <a:ext uri="{96DAC541-7B7A-43D3-8B79-37D633B846F1}">
-                  <asvg:svgBlip xmlns:asvg="http://schemas.microsoft.com/office/drawing/2016/SVG/main" r:embed="rId11"/>
+                  <asvg:svgBlip xmlns:asvg="http://schemas.microsoft.com/office/drawing/2016/SVG/main" r:embed="rId9"/>
                 </a:ext>
               </a:extLst>
             </a:blip>
@@ -8417,14 +9029,14 @@
       </p:sp>
       <p:sp>
         <p:nvSpPr>
-          <p:cNvPr name="TextBox 8" id="8"/>
+          <p:cNvPr name="TextBox 6" id="6"/>
           <p:cNvSpPr txBox="true"/>
           <p:nvPr/>
         </p:nvSpPr>
         <p:spPr>
           <a:xfrm rot="0">
-            <a:off x="4761627" y="-133350"/>
-            <a:ext cx="8764745" cy="1193800"/>
+            <a:off x="4761627" y="923925"/>
+            <a:ext cx="8764745" cy="936625"/>
           </a:xfrm>
           <a:prstGeom prst="rect">
             <a:avLst/>
@@ -8438,37 +9050,37 @@
           <a:p>
             <a:pPr algn="ctr">
               <a:lnSpc>
-                <a:spcPts val="9799"/>
+                <a:spcPts val="7699"/>
               </a:lnSpc>
               <a:spcBef>
                 <a:spcPct val="0"/>
               </a:spcBef>
             </a:pPr>
             <a:r>
-              <a:rPr lang="en-US" b="true" sz="6999">
-                <a:solidFill>
-                  <a:srgbClr val="17548F"/>
-                </a:solidFill>
-                <a:latin typeface="Faustina Bold"/>
-                <a:ea typeface="Faustina Bold"/>
-                <a:cs typeface="Faustina Bold"/>
-                <a:sym typeface="Faustina Bold"/>
-              </a:rPr>
-              <a:t>11. Kết luận </a:t>
+              <a:rPr lang="en-US" b="true" sz="5499">
+                <a:solidFill>
+                  <a:srgbClr val="17548F"/>
+                </a:solidFill>
+                <a:latin typeface="Faustina Bold"/>
+                <a:ea typeface="Faustina Bold"/>
+                <a:cs typeface="Faustina Bold"/>
+                <a:sym typeface="Faustina Bold"/>
+              </a:rPr>
+              <a:t>12. Kết luận </a:t>
             </a:r>
           </a:p>
         </p:txBody>
       </p:sp>
       <p:sp>
         <p:nvSpPr>
-          <p:cNvPr name="TextBox 9" id="9"/>
+          <p:cNvPr name="TextBox 7" id="7"/>
           <p:cNvSpPr txBox="true"/>
           <p:nvPr/>
         </p:nvSpPr>
         <p:spPr>
           <a:xfrm rot="0">
-            <a:off x="1317307" y="3498845"/>
-            <a:ext cx="15653385" cy="3082925"/>
+            <a:off x="1317307" y="1805787"/>
+            <a:ext cx="15653385" cy="7416800"/>
           </a:xfrm>
           <a:prstGeom prst="rect">
             <a:avLst/>
@@ -8495,63 +9107,134 @@
                 <a:cs typeface="Faustina Bold"/>
                 <a:sym typeface="Faustina Bold"/>
               </a:rPr>
-              <a:t>Tổng kết: Đã xây dựng thành</a:t>
-            </a:r>
-            <a:r>
-              <a:rPr lang="en-US" sz="3500" b="true">
-                <a:solidFill>
-                  <a:srgbClr val="17548F"/>
-                </a:solidFill>
-                <a:latin typeface="Faustina Bold"/>
-                <a:ea typeface="Faustina Bold"/>
-                <a:cs typeface="Faustina Bold"/>
-                <a:sym typeface="Faustina Bold"/>
-              </a:rPr>
-              <a:t> công hệ thống phân vùng u nã</a:t>
-            </a:r>
-            <a:r>
-              <a:rPr lang="en-US" sz="3500" b="true">
-                <a:solidFill>
-                  <a:srgbClr val="17548F"/>
-                </a:solidFill>
-                <a:latin typeface="Faustina Bold"/>
-                <a:ea typeface="Faustina Bold"/>
-                <a:cs typeface="Faustina Bold"/>
-                <a:sym typeface="Faustina Bold"/>
-              </a:rPr>
-              <a:t>o tự độ</a:t>
-            </a:r>
-            <a:r>
-              <a:rPr lang="en-US" sz="3500" b="true">
-                <a:solidFill>
-                  <a:srgbClr val="17548F"/>
-                </a:solidFill>
-                <a:latin typeface="Faustina Bold"/>
-                <a:ea typeface="Faustina Bold"/>
-                <a:cs typeface="Faustina Bold"/>
-                <a:sym typeface="Faustina Bold"/>
-              </a:rPr>
-              <a:t>ng với độ chính xác cao (Dice ~0.83), có thể nhận biết được các  vùng ET,ED,NCR  ,đáp ứng tố</a:t>
-            </a:r>
-            <a:r>
-              <a:rPr lang="en-US" b="true" sz="3500">
-                <a:solidFill>
-                  <a:srgbClr val="17548F"/>
-                </a:solidFill>
-                <a:latin typeface="Faustina Bold"/>
-                <a:ea typeface="Faustina Bold"/>
-                <a:cs typeface="Faustina Bold"/>
-                <a:sym typeface="Faustina Bold"/>
-              </a:rPr>
-              <a:t>t mục tiêu đề ra. </a:t>
-            </a:r>
-          </a:p>
-          <a:p>
-            <a:pPr algn="just">
+              <a:t>Tổng quát:</a:t>
+            </a:r>
+          </a:p>
+          <a:p>
+            <a:pPr algn="just" marL="755651" indent="-377825" lvl="1">
               <a:lnSpc>
                 <a:spcPts val="4900"/>
               </a:lnSpc>
+              <a:buFont typeface="Arial"/>
+              <a:buChar char="•"/>
             </a:pPr>
+            <a:r>
+              <a:rPr lang="en-US" b="true" sz="3500">
+                <a:solidFill>
+                  <a:srgbClr val="17548F"/>
+                </a:solidFill>
+                <a:latin typeface="Faustina Bold"/>
+                <a:ea typeface="Faustina Bold"/>
+                <a:cs typeface="Faustina Bold"/>
+                <a:sym typeface="Faustina Bold"/>
+              </a:rPr>
+              <a:t>Đề tài đã xây dựng thành</a:t>
+            </a:r>
+            <a:r>
+              <a:rPr lang="en-US" b="true" sz="3500">
+                <a:solidFill>
+                  <a:srgbClr val="17548F"/>
+                </a:solidFill>
+                <a:latin typeface="Faustina Bold"/>
+                <a:ea typeface="Faustina Bold"/>
+                <a:cs typeface="Faustina Bold"/>
+                <a:sym typeface="Faustina Bold"/>
+              </a:rPr>
+              <a:t> công mô hình U-Net 2D cho phân vùng khối u nã</a:t>
+            </a:r>
+            <a:r>
+              <a:rPr lang="en-US" b="true" sz="3500">
+                <a:solidFill>
+                  <a:srgbClr val="17548F"/>
+                </a:solidFill>
+                <a:latin typeface="Faustina Bold"/>
+                <a:ea typeface="Faustina Bold"/>
+                <a:cs typeface="Faustina Bold"/>
+                <a:sym typeface="Faustina Bold"/>
+              </a:rPr>
+              <a:t>o trê</a:t>
+            </a:r>
+            <a:r>
+              <a:rPr lang="en-US" b="true" sz="3500">
+                <a:solidFill>
+                  <a:srgbClr val="17548F"/>
+                </a:solidFill>
+                <a:latin typeface="Faustina Bold"/>
+                <a:ea typeface="Faustina Bold"/>
+                <a:cs typeface="Faustina Bold"/>
+                <a:sym typeface="Faustina Bold"/>
+              </a:rPr>
+              <a:t>n MRI, đạt Dice Score 0.8355, đáp ứng được mục tiêu nghiên cứu.</a:t>
+            </a:r>
+          </a:p>
+          <a:p>
+            <a:pPr algn="just" marL="755651" indent="-377825" lvl="1">
+              <a:lnSpc>
+                <a:spcPts val="4900"/>
+              </a:lnSpc>
+              <a:buFont typeface="Arial"/>
+              <a:buChar char="•"/>
+            </a:pPr>
+            <a:r>
+              <a:rPr lang="en-US" b="true" sz="3500">
+                <a:solidFill>
+                  <a:srgbClr val="17548F"/>
+                </a:solidFill>
+                <a:latin typeface="Faustina Bold"/>
+                <a:ea typeface="Faustina Bold"/>
+                <a:cs typeface="Faustina Bold"/>
+                <a:sym typeface="Faustina Bold"/>
+              </a:rPr>
+              <a:t>Quy trình tiền xử lý – huấn luyện – đánh giá được chuẩn hóa đầy đủ, với nhiều cải tiến như kết hợp Dice + CE Loss, class weigh</a:t>
+            </a:r>
+            <a:r>
+              <a:rPr lang="en-US" b="true" sz="3500">
+                <a:solidFill>
+                  <a:srgbClr val="17548F"/>
+                </a:solidFill>
+                <a:latin typeface="Faustina Bold"/>
+                <a:ea typeface="Faustina Bold"/>
+                <a:cs typeface="Faustina Bold"/>
+                <a:sym typeface="Faustina Bold"/>
+              </a:rPr>
+              <a:t>ts, LR schedule, data augmentation.</a:t>
+            </a:r>
+          </a:p>
+          <a:p>
+            <a:pPr algn="just" marL="755651" indent="-377825" lvl="1">
+              <a:lnSpc>
+                <a:spcPts val="4900"/>
+              </a:lnSpc>
+              <a:spcBef>
+                <a:spcPct val="0"/>
+              </a:spcBef>
+              <a:buFont typeface="Arial"/>
+              <a:buChar char="•"/>
+            </a:pPr>
+            <a:r>
+              <a:rPr lang="en-US" b="true" sz="3500">
+                <a:solidFill>
+                  <a:srgbClr val="17548F"/>
+                </a:solidFill>
+                <a:latin typeface="Faustina Bold"/>
+                <a:ea typeface="Faustina Bold"/>
+                <a:cs typeface="Faustina Bold"/>
+                <a:sym typeface="Faustina Bold"/>
+              </a:rPr>
+              <a:t>Mô hì</a:t>
+            </a:r>
+            <a:r>
+              <a:rPr lang="en-US" b="true" sz="3500">
+                <a:solidFill>
+                  <a:srgbClr val="17548F"/>
+                </a:solidFill>
+                <a:latin typeface="Faustina Bold"/>
+                <a:ea typeface="Faustina Bold"/>
+                <a:cs typeface="Faustina Bold"/>
+                <a:sym typeface="Faustina Bold"/>
+              </a:rPr>
+              <a:t>nh cho thấy tính hiệu quả và khả thi cao, có thể triển khai trong môi trường thực tế.</a:t>
+            </a:r>
           </a:p>
           <a:p>
             <a:pPr algn="just">
@@ -8572,10 +9255,607 @@
                 <a:cs typeface="Faustina Bold"/>
                 <a:sym typeface="Faustina Bold"/>
               </a:rPr>
-              <a:t>Xin chân thành cảm ơn Thầy hướng dẫn và Quý Hội đồng.</a:t>
+              <a:t>Hạn chế:</a:t>
+            </a:r>
+          </a:p>
+          <a:p>
+            <a:pPr algn="just" marL="755651" indent="-377825" lvl="1">
+              <a:lnSpc>
+                <a:spcPts val="4900"/>
+              </a:lnSpc>
+              <a:spcBef>
+                <a:spcPct val="0"/>
+              </a:spcBef>
+              <a:buFont typeface="Arial"/>
+              <a:buChar char="•"/>
+            </a:pPr>
+            <a:r>
+              <a:rPr lang="en-US" b="true" sz="3500">
+                <a:solidFill>
+                  <a:srgbClr val="17548F"/>
+                </a:solidFill>
+                <a:latin typeface="Faustina Bold"/>
+                <a:ea typeface="Faustina Bold"/>
+                <a:cs typeface="Faustina Bold"/>
+                <a:sym typeface="Faustina Bold"/>
+              </a:rPr>
+              <a:t>Dữ liệu còn hạn chế và chưa đa dạng.</a:t>
+            </a:r>
+          </a:p>
+          <a:p>
+            <a:pPr algn="just" marL="755651" indent="-377825" lvl="1">
+              <a:lnSpc>
+                <a:spcPts val="4900"/>
+              </a:lnSpc>
+              <a:spcBef>
+                <a:spcPct val="0"/>
+              </a:spcBef>
+              <a:buFont typeface="Arial"/>
+              <a:buChar char="•"/>
+            </a:pPr>
+            <a:r>
+              <a:rPr lang="en-US" b="true" sz="3500">
+                <a:solidFill>
+                  <a:srgbClr val="17548F"/>
+                </a:solidFill>
+                <a:latin typeface="Faustina Bold"/>
+                <a:ea typeface="Faustina Bold"/>
+                <a:cs typeface="Faustina Bold"/>
+                <a:sym typeface="Faustina Bold"/>
+              </a:rPr>
+              <a:t>Kiến trúc 2D chưa khai thác thông tin không gian 3D.</a:t>
+            </a:r>
+          </a:p>
+          <a:p>
+            <a:pPr algn="just" marL="755651" indent="-377825" lvl="1">
+              <a:lnSpc>
+                <a:spcPts val="4900"/>
+              </a:lnSpc>
+              <a:spcBef>
+                <a:spcPct val="0"/>
+              </a:spcBef>
+              <a:buFont typeface="Arial"/>
+              <a:buChar char="•"/>
+            </a:pPr>
+            <a:r>
+              <a:rPr lang="en-US" b="true" sz="3500">
+                <a:solidFill>
+                  <a:srgbClr val="17548F"/>
+                </a:solidFill>
+                <a:latin typeface="Faustina Bold"/>
+                <a:ea typeface="Faustina Bold"/>
+                <a:cs typeface="Faustina Bold"/>
+                <a:sym typeface="Faustina Bold"/>
+              </a:rPr>
+              <a:t>Xuất hiện overfitting nhẹ và chưa có đánh giá lâm sàng thực tế.</a:t>
             </a:r>
           </a:p>
         </p:txBody>
+      </p:sp>
+      <p:sp>
+        <p:nvSpPr>
+          <p:cNvPr name="Freeform 8" id="8"/>
+          <p:cNvSpPr/>
+          <p:nvPr/>
+        </p:nvSpPr>
+        <p:spPr>
+          <a:xfrm flipH="false" flipV="false" rot="0">
+            <a:off x="247041" y="263470"/>
+            <a:ext cx="2683548" cy="765230"/>
+          </a:xfrm>
+          <a:custGeom>
+            <a:avLst/>
+            <a:gdLst/>
+            <a:ahLst/>
+            <a:cxnLst/>
+            <a:rect r="r" b="b" t="t" l="l"/>
+            <a:pathLst>
+              <a:path h="765230" w="2683548">
+                <a:moveTo>
+                  <a:pt x="0" y="0"/>
+                </a:moveTo>
+                <a:lnTo>
+                  <a:pt x="2683548" y="0"/>
+                </a:lnTo>
+                <a:lnTo>
+                  <a:pt x="2683548" y="765230"/>
+                </a:lnTo>
+                <a:lnTo>
+                  <a:pt x="0" y="765230"/>
+                </a:lnTo>
+                <a:lnTo>
+                  <a:pt x="0" y="0"/>
+                </a:lnTo>
+                <a:close/>
+              </a:path>
+            </a:pathLst>
+          </a:custGeom>
+          <a:blipFill>
+            <a:blip r:embed="rId10"/>
+            <a:stretch>
+              <a:fillRect l="0" t="0" r="0" b="0"/>
+            </a:stretch>
+          </a:blipFill>
+        </p:spPr>
+      </p:sp>
+    </p:spTree>
+  </p:cSld>
+  <p:clrMapOvr>
+    <a:masterClrMapping/>
+  </p:clrMapOvr>
+</p:sld>
+</file>
+
+<file path=ppt/slides/slide19.xml><?xml version="1.0" encoding="utf-8"?>
+<p:sld xmlns:p="http://schemas.openxmlformats.org/presentationml/2006/main" xmlns:a="http://schemas.openxmlformats.org/drawingml/2006/main" xmlns:r="http://schemas.openxmlformats.org/officeDocument/2006/relationships">
+  <p:cSld>
+    <p:bg>
+      <p:bgPr>
+        <a:solidFill>
+          <a:srgbClr val="E6F7FF"/>
+        </a:solidFill>
+      </p:bgPr>
+    </p:bg>
+    <p:spTree>
+      <p:nvGrpSpPr>
+        <p:cNvPr id="1" name=""/>
+        <p:cNvGrpSpPr/>
+        <p:nvPr/>
+      </p:nvGrpSpPr>
+      <p:grpSpPr>
+        <a:xfrm>
+          <a:off x="0" y="0"/>
+          <a:ext cx="0" cy="0"/>
+          <a:chOff x="0" y="0"/>
+          <a:chExt cx="0" cy="0"/>
+        </a:xfrm>
+      </p:grpSpPr>
+      <p:sp>
+        <p:nvSpPr>
+          <p:cNvPr name="Freeform 2" id="2"/>
+          <p:cNvSpPr/>
+          <p:nvPr/>
+        </p:nvSpPr>
+        <p:spPr>
+          <a:xfrm flipH="false" flipV="false" rot="0">
+            <a:off x="2572939" y="1028700"/>
+            <a:ext cx="13142121" cy="8229600"/>
+          </a:xfrm>
+          <a:custGeom>
+            <a:avLst/>
+            <a:gdLst/>
+            <a:ahLst/>
+            <a:cxnLst/>
+            <a:rect r="r" b="b" t="t" l="l"/>
+            <a:pathLst>
+              <a:path h="8229600" w="13142121">
+                <a:moveTo>
+                  <a:pt x="0" y="0"/>
+                </a:moveTo>
+                <a:lnTo>
+                  <a:pt x="13142122" y="0"/>
+                </a:lnTo>
+                <a:lnTo>
+                  <a:pt x="13142122" y="8229600"/>
+                </a:lnTo>
+                <a:lnTo>
+                  <a:pt x="0" y="8229600"/>
+                </a:lnTo>
+                <a:lnTo>
+                  <a:pt x="0" y="0"/>
+                </a:lnTo>
+                <a:close/>
+              </a:path>
+            </a:pathLst>
+          </a:custGeom>
+          <a:blipFill>
+            <a:blip r:embed="rId2"/>
+            <a:stretch>
+              <a:fillRect l="0" t="0" r="0" b="0"/>
+            </a:stretch>
+          </a:blipFill>
+        </p:spPr>
+      </p:sp>
+      <p:sp>
+        <p:nvSpPr>
+          <p:cNvPr name="Freeform 3" id="3"/>
+          <p:cNvSpPr/>
+          <p:nvPr/>
+        </p:nvSpPr>
+        <p:spPr>
+          <a:xfrm flipH="false" flipV="false" rot="0">
+            <a:off x="16177410" y="7976491"/>
+            <a:ext cx="3758453" cy="3758453"/>
+          </a:xfrm>
+          <a:custGeom>
+            <a:avLst/>
+            <a:gdLst/>
+            <a:ahLst/>
+            <a:cxnLst/>
+            <a:rect r="r" b="b" t="t" l="l"/>
+            <a:pathLst>
+              <a:path h="3758453" w="3758453">
+                <a:moveTo>
+                  <a:pt x="0" y="0"/>
+                </a:moveTo>
+                <a:lnTo>
+                  <a:pt x="3758453" y="0"/>
+                </a:lnTo>
+                <a:lnTo>
+                  <a:pt x="3758453" y="3758453"/>
+                </a:lnTo>
+                <a:lnTo>
+                  <a:pt x="0" y="3758453"/>
+                </a:lnTo>
+                <a:lnTo>
+                  <a:pt x="0" y="0"/>
+                </a:lnTo>
+                <a:close/>
+              </a:path>
+            </a:pathLst>
+          </a:custGeom>
+          <a:blipFill>
+            <a:blip r:embed="rId3">
+              <a:alphaModFix amt="15000"/>
+              <a:extLst>
+                <a:ext uri="{96DAC541-7B7A-43D3-8B79-37D633B846F1}">
+                  <asvg:svgBlip xmlns:asvg="http://schemas.microsoft.com/office/drawing/2016/SVG/main" r:embed="rId4"/>
+                </a:ext>
+              </a:extLst>
+            </a:blip>
+            <a:stretch>
+              <a:fillRect l="0" t="0" r="0" b="0"/>
+            </a:stretch>
+          </a:blipFill>
+        </p:spPr>
+      </p:sp>
+      <p:sp>
+        <p:nvSpPr>
+          <p:cNvPr name="Freeform 4" id="4"/>
+          <p:cNvSpPr/>
+          <p:nvPr/>
+        </p:nvSpPr>
+        <p:spPr>
+          <a:xfrm flipH="false" flipV="false" rot="0">
+            <a:off x="-1632185" y="-1480712"/>
+            <a:ext cx="3758453" cy="3758453"/>
+          </a:xfrm>
+          <a:custGeom>
+            <a:avLst/>
+            <a:gdLst/>
+            <a:ahLst/>
+            <a:cxnLst/>
+            <a:rect r="r" b="b" t="t" l="l"/>
+            <a:pathLst>
+              <a:path h="3758453" w="3758453">
+                <a:moveTo>
+                  <a:pt x="0" y="0"/>
+                </a:moveTo>
+                <a:lnTo>
+                  <a:pt x="3758453" y="0"/>
+                </a:lnTo>
+                <a:lnTo>
+                  <a:pt x="3758453" y="3758453"/>
+                </a:lnTo>
+                <a:lnTo>
+                  <a:pt x="0" y="3758453"/>
+                </a:lnTo>
+                <a:lnTo>
+                  <a:pt x="0" y="0"/>
+                </a:lnTo>
+                <a:close/>
+              </a:path>
+            </a:pathLst>
+          </a:custGeom>
+          <a:blipFill>
+            <a:blip r:embed="rId3">
+              <a:alphaModFix amt="15000"/>
+              <a:extLst>
+                <a:ext uri="{96DAC541-7B7A-43D3-8B79-37D633B846F1}">
+                  <asvg:svgBlip xmlns:asvg="http://schemas.microsoft.com/office/drawing/2016/SVG/main" r:embed="rId4"/>
+                </a:ext>
+              </a:extLst>
+            </a:blip>
+            <a:stretch>
+              <a:fillRect l="0" t="0" r="0" b="0"/>
+            </a:stretch>
+          </a:blipFill>
+        </p:spPr>
+      </p:sp>
+      <p:sp>
+        <p:nvSpPr>
+          <p:cNvPr name="Freeform 5" id="5"/>
+          <p:cNvSpPr/>
+          <p:nvPr/>
+        </p:nvSpPr>
+        <p:spPr>
+          <a:xfrm flipH="false" flipV="true" rot="0">
+            <a:off x="-326967" y="7677423"/>
+            <a:ext cx="2711333" cy="2862542"/>
+          </a:xfrm>
+          <a:custGeom>
+            <a:avLst/>
+            <a:gdLst/>
+            <a:ahLst/>
+            <a:cxnLst/>
+            <a:rect r="r" b="b" t="t" l="l"/>
+            <a:pathLst>
+              <a:path h="2862542" w="2711333">
+                <a:moveTo>
+                  <a:pt x="0" y="2862542"/>
+                </a:moveTo>
+                <a:lnTo>
+                  <a:pt x="2711334" y="2862542"/>
+                </a:lnTo>
+                <a:lnTo>
+                  <a:pt x="2711334" y="0"/>
+                </a:lnTo>
+                <a:lnTo>
+                  <a:pt x="0" y="0"/>
+                </a:lnTo>
+                <a:lnTo>
+                  <a:pt x="0" y="2862542"/>
+                </a:lnTo>
+                <a:close/>
+              </a:path>
+            </a:pathLst>
+          </a:custGeom>
+          <a:blipFill>
+            <a:blip r:embed="rId5">
+              <a:extLst>
+                <a:ext uri="{96DAC541-7B7A-43D3-8B79-37D633B846F1}">
+                  <asvg:svgBlip xmlns:asvg="http://schemas.microsoft.com/office/drawing/2016/SVG/main" r:embed="rId6"/>
+                </a:ext>
+              </a:extLst>
+            </a:blip>
+            <a:stretch>
+              <a:fillRect l="0" t="0" r="0" b="0"/>
+            </a:stretch>
+          </a:blipFill>
+        </p:spPr>
+      </p:sp>
+      <p:sp>
+        <p:nvSpPr>
+          <p:cNvPr name="Freeform 6" id="6"/>
+          <p:cNvSpPr/>
+          <p:nvPr/>
+        </p:nvSpPr>
+        <p:spPr>
+          <a:xfrm flipH="true" flipV="true" rot="0">
+            <a:off x="15463272" y="-421992"/>
+            <a:ext cx="3214928" cy="2901385"/>
+          </a:xfrm>
+          <a:custGeom>
+            <a:avLst/>
+            <a:gdLst/>
+            <a:ahLst/>
+            <a:cxnLst/>
+            <a:rect r="r" b="b" t="t" l="l"/>
+            <a:pathLst>
+              <a:path h="2901385" w="3214928">
+                <a:moveTo>
+                  <a:pt x="3214929" y="2901384"/>
+                </a:moveTo>
+                <a:lnTo>
+                  <a:pt x="0" y="2901384"/>
+                </a:lnTo>
+                <a:lnTo>
+                  <a:pt x="0" y="0"/>
+                </a:lnTo>
+                <a:lnTo>
+                  <a:pt x="3214929" y="0"/>
+                </a:lnTo>
+                <a:lnTo>
+                  <a:pt x="3214929" y="2901384"/>
+                </a:lnTo>
+                <a:close/>
+              </a:path>
+            </a:pathLst>
+          </a:custGeom>
+          <a:blipFill>
+            <a:blip r:embed="rId7">
+              <a:extLst>
+                <a:ext uri="{96DAC541-7B7A-43D3-8B79-37D633B846F1}">
+                  <asvg:svgBlip xmlns:asvg="http://schemas.microsoft.com/office/drawing/2016/SVG/main" r:embed="rId8"/>
+                </a:ext>
+              </a:extLst>
+            </a:blip>
+            <a:stretch>
+              <a:fillRect l="0" t="0" r="0" b="0"/>
+            </a:stretch>
+          </a:blipFill>
+        </p:spPr>
+      </p:sp>
+      <p:sp>
+        <p:nvSpPr>
+          <p:cNvPr name="Freeform 7" id="7"/>
+          <p:cNvSpPr/>
+          <p:nvPr/>
+        </p:nvSpPr>
+        <p:spPr>
+          <a:xfrm flipH="false" flipV="true" rot="0">
+            <a:off x="15635604" y="9222587"/>
+            <a:ext cx="2870265" cy="1317378"/>
+          </a:xfrm>
+          <a:custGeom>
+            <a:avLst/>
+            <a:gdLst/>
+            <a:ahLst/>
+            <a:cxnLst/>
+            <a:rect r="r" b="b" t="t" l="l"/>
+            <a:pathLst>
+              <a:path h="1317378" w="2870265">
+                <a:moveTo>
+                  <a:pt x="0" y="1317378"/>
+                </a:moveTo>
+                <a:lnTo>
+                  <a:pt x="2870265" y="1317378"/>
+                </a:lnTo>
+                <a:lnTo>
+                  <a:pt x="2870265" y="0"/>
+                </a:lnTo>
+                <a:lnTo>
+                  <a:pt x="0" y="0"/>
+                </a:lnTo>
+                <a:lnTo>
+                  <a:pt x="0" y="1317378"/>
+                </a:lnTo>
+                <a:close/>
+              </a:path>
+            </a:pathLst>
+          </a:custGeom>
+          <a:blipFill>
+            <a:blip r:embed="rId9">
+              <a:extLst>
+                <a:ext uri="{96DAC541-7B7A-43D3-8B79-37D633B846F1}">
+                  <asvg:svgBlip xmlns:asvg="http://schemas.microsoft.com/office/drawing/2016/SVG/main" r:embed="rId10"/>
+                </a:ext>
+              </a:extLst>
+            </a:blip>
+            <a:stretch>
+              <a:fillRect l="0" t="0" r="0" b="0"/>
+            </a:stretch>
+          </a:blipFill>
+        </p:spPr>
+      </p:sp>
+      <p:sp>
+        <p:nvSpPr>
+          <p:cNvPr name="Freeform 8" id="8"/>
+          <p:cNvSpPr/>
+          <p:nvPr/>
+        </p:nvSpPr>
+        <p:spPr>
+          <a:xfrm flipH="false" flipV="false" rot="0">
+            <a:off x="11940456" y="3726328"/>
+            <a:ext cx="2902960" cy="2834344"/>
+          </a:xfrm>
+          <a:custGeom>
+            <a:avLst/>
+            <a:gdLst/>
+            <a:ahLst/>
+            <a:cxnLst/>
+            <a:rect r="r" b="b" t="t" l="l"/>
+            <a:pathLst>
+              <a:path h="2834344" w="2902960">
+                <a:moveTo>
+                  <a:pt x="0" y="0"/>
+                </a:moveTo>
+                <a:lnTo>
+                  <a:pt x="2902960" y="0"/>
+                </a:lnTo>
+                <a:lnTo>
+                  <a:pt x="2902960" y="2834344"/>
+                </a:lnTo>
+                <a:lnTo>
+                  <a:pt x="0" y="2834344"/>
+                </a:lnTo>
+                <a:lnTo>
+                  <a:pt x="0" y="0"/>
+                </a:lnTo>
+                <a:close/>
+              </a:path>
+            </a:pathLst>
+          </a:custGeom>
+          <a:blipFill>
+            <a:blip r:embed="rId11">
+              <a:extLst>
+                <a:ext uri="{96DAC541-7B7A-43D3-8B79-37D633B846F1}">
+                  <asvg:svgBlip xmlns:asvg="http://schemas.microsoft.com/office/drawing/2016/SVG/main" r:embed="rId12"/>
+                </a:ext>
+              </a:extLst>
+            </a:blip>
+            <a:stretch>
+              <a:fillRect l="0" t="0" r="0" b="0"/>
+            </a:stretch>
+          </a:blipFill>
+        </p:spPr>
+      </p:sp>
+      <p:sp>
+        <p:nvSpPr>
+          <p:cNvPr name="TextBox 9" id="9"/>
+          <p:cNvSpPr txBox="true"/>
+          <p:nvPr/>
+        </p:nvSpPr>
+        <p:spPr>
+          <a:xfrm rot="0">
+            <a:off x="3334562" y="3230563"/>
+            <a:ext cx="8013094" cy="3435349"/>
+          </a:xfrm>
+          <a:prstGeom prst="rect">
+            <a:avLst/>
+          </a:prstGeom>
+        </p:spPr>
+        <p:txBody>
+          <a:bodyPr anchor="t" rtlCol="false" tIns="0" lIns="0" bIns="0" rIns="0">
+            <a:spAutoFit/>
+          </a:bodyPr>
+          <a:lstStyle/>
+          <a:p>
+            <a:pPr algn="ctr">
+              <a:lnSpc>
+                <a:spcPts val="28000"/>
+              </a:lnSpc>
+            </a:pPr>
+            <a:r>
+              <a:rPr lang="en-US" b="true" sz="20000">
+                <a:solidFill>
+                  <a:srgbClr val="3E71A9"/>
+                </a:solidFill>
+                <a:latin typeface="เอฟซี เดซี่ Bold"/>
+                <a:ea typeface="เอฟซี เดซี่ Bold"/>
+                <a:cs typeface="เอฟซี เดซี่ Bold"/>
+                <a:sym typeface="เอฟซี เดซี่ Bold"/>
+              </a:rPr>
+              <a:t>Thank You</a:t>
+            </a:r>
+          </a:p>
+        </p:txBody>
+      </p:sp>
+      <p:sp>
+        <p:nvSpPr>
+          <p:cNvPr name="Freeform 10" id="10"/>
+          <p:cNvSpPr/>
+          <p:nvPr/>
+        </p:nvSpPr>
+        <p:spPr>
+          <a:xfrm flipH="false" flipV="false" rot="0">
+            <a:off x="247041" y="263470"/>
+            <a:ext cx="2683548" cy="765230"/>
+          </a:xfrm>
+          <a:custGeom>
+            <a:avLst/>
+            <a:gdLst/>
+            <a:ahLst/>
+            <a:cxnLst/>
+            <a:rect r="r" b="b" t="t" l="l"/>
+            <a:pathLst>
+              <a:path h="765230" w="2683548">
+                <a:moveTo>
+                  <a:pt x="0" y="0"/>
+                </a:moveTo>
+                <a:lnTo>
+                  <a:pt x="2683548" y="0"/>
+                </a:lnTo>
+                <a:lnTo>
+                  <a:pt x="2683548" y="765230"/>
+                </a:lnTo>
+                <a:lnTo>
+                  <a:pt x="0" y="765230"/>
+                </a:lnTo>
+                <a:lnTo>
+                  <a:pt x="0" y="0"/>
+                </a:lnTo>
+                <a:close/>
+              </a:path>
+            </a:pathLst>
+          </a:custGeom>
+          <a:blipFill>
+            <a:blip r:embed="rId13"/>
+            <a:stretch>
+              <a:fillRect l="0" t="0" r="0" b="0"/>
+            </a:stretch>
+          </a:blipFill>
+        </p:spPr>
       </p:sp>
     </p:spTree>
   </p:cSld>
@@ -8617,7 +9897,7 @@
         </p:nvSpPr>
         <p:spPr>
           <a:xfrm flipH="false" flipV="false" rot="0">
-            <a:off x="16177410" y="-1214117"/>
+            <a:off x="16177410" y="7976491"/>
             <a:ext cx="3758453" cy="3758453"/>
           </a:xfrm>
           <a:custGeom>
@@ -8670,7 +9950,7 @@
         </p:nvSpPr>
         <p:spPr>
           <a:xfrm flipH="false" flipV="false" rot="0">
-            <a:off x="-1632185" y="7677423"/>
+            <a:off x="-1632185" y="-1480712"/>
             <a:ext cx="3758453" cy="3758453"/>
           </a:xfrm>
           <a:custGeom>
@@ -8722,8 +10002,8 @@
           <p:nvPr/>
         </p:nvSpPr>
         <p:spPr>
-          <a:xfrm flipH="false" flipV="false" rot="0">
-            <a:off x="-326967" y="-318206"/>
+          <a:xfrm flipH="false" flipV="true" rot="0">
+            <a:off x="-326967" y="7677423"/>
             <a:ext cx="2711333" cy="2862542"/>
           </a:xfrm>
           <a:custGeom>
@@ -8735,19 +10015,19 @@
             <a:pathLst>
               <a:path h="2862542" w="2711333">
                 <a:moveTo>
-                  <a:pt x="0" y="0"/>
+                  <a:pt x="0" y="2862542"/>
                 </a:moveTo>
                 <a:lnTo>
+                  <a:pt x="2711334" y="2862542"/>
+                </a:lnTo>
+                <a:lnTo>
                   <a:pt x="2711334" y="0"/>
                 </a:lnTo>
                 <a:lnTo>
-                  <a:pt x="2711334" y="2862542"/>
+                  <a:pt x="0" y="0"/>
                 </a:lnTo>
                 <a:lnTo>
                   <a:pt x="0" y="2862542"/>
-                </a:lnTo>
-                <a:lnTo>
-                  <a:pt x="0" y="0"/>
                 </a:lnTo>
                 <a:close/>
               </a:path>
@@ -8774,8 +10054,8 @@
           <p:nvPr/>
         </p:nvSpPr>
         <p:spPr>
-          <a:xfrm flipH="true" flipV="false" rot="0">
-            <a:off x="15463272" y="7677423"/>
+          <a:xfrm flipH="true" flipV="true" rot="0">
+            <a:off x="15463272" y="-421992"/>
             <a:ext cx="3214928" cy="2901385"/>
           </a:xfrm>
           <a:custGeom>
@@ -8787,19 +10067,19 @@
             <a:pathLst>
               <a:path h="2901385" w="3214928">
                 <a:moveTo>
+                  <a:pt x="3214929" y="2901384"/>
+                </a:moveTo>
+                <a:lnTo>
+                  <a:pt x="0" y="2901384"/>
+                </a:lnTo>
+                <a:lnTo>
+                  <a:pt x="0" y="0"/>
+                </a:lnTo>
+                <a:lnTo>
                   <a:pt x="3214929" y="0"/>
-                </a:moveTo>
-                <a:lnTo>
-                  <a:pt x="0" y="0"/>
-                </a:lnTo>
-                <a:lnTo>
-                  <a:pt x="0" y="2901385"/>
-                </a:lnTo>
-                <a:lnTo>
-                  <a:pt x="3214929" y="2901385"/>
-                </a:lnTo>
-                <a:lnTo>
-                  <a:pt x="3214929" y="0"/>
+                </a:lnTo>
+                <a:lnTo>
+                  <a:pt x="3214929" y="2901384"/>
                 </a:lnTo>
                 <a:close/>
               </a:path>
@@ -8826,9 +10106,9 @@
           <p:nvPr/>
         </p:nvSpPr>
         <p:spPr>
-          <a:xfrm flipH="false" flipV="false" rot="0">
-            <a:off x="-746708" y="8907715"/>
-            <a:ext cx="3131075" cy="1810331"/>
+          <a:xfrm flipH="false" flipV="true" rot="0">
+            <a:off x="15635604" y="9222587"/>
+            <a:ext cx="2870265" cy="1317378"/>
           </a:xfrm>
           <a:custGeom>
             <a:avLst/>
@@ -8837,21 +10117,21 @@
             <a:cxnLst/>
             <a:rect r="r" b="b" t="t" l="l"/>
             <a:pathLst>
-              <a:path h="1810331" w="3131075">
+              <a:path h="1317378" w="2870265">
                 <a:moveTo>
-                  <a:pt x="0" y="0"/>
+                  <a:pt x="0" y="1317378"/>
                 </a:moveTo>
                 <a:lnTo>
-                  <a:pt x="3131075" y="0"/>
-                </a:lnTo>
-                <a:lnTo>
-                  <a:pt x="3131075" y="1810331"/>
-                </a:lnTo>
-                <a:lnTo>
-                  <a:pt x="0" y="1810331"/>
-                </a:lnTo>
-                <a:lnTo>
-                  <a:pt x="0" y="0"/>
+                  <a:pt x="2870265" y="1317378"/>
+                </a:lnTo>
+                <a:lnTo>
+                  <a:pt x="2870265" y="0"/>
+                </a:lnTo>
+                <a:lnTo>
+                  <a:pt x="0" y="0"/>
+                </a:lnTo>
+                <a:lnTo>
+                  <a:pt x="0" y="1317378"/>
                 </a:lnTo>
                 <a:close/>
               </a:path>
@@ -8873,14 +10153,224 @@
       </p:sp>
       <p:sp>
         <p:nvSpPr>
-          <p:cNvPr name="Freeform 7" id="7"/>
+          <p:cNvPr name="TextBox 7" id="7"/>
+          <p:cNvSpPr txBox="true"/>
+          <p:nvPr/>
+        </p:nvSpPr>
+        <p:spPr>
+          <a:xfrm rot="0">
+            <a:off x="1388046" y="923925"/>
+            <a:ext cx="15871254" cy="936625"/>
+          </a:xfrm>
+          <a:prstGeom prst="rect">
+            <a:avLst/>
+          </a:prstGeom>
+        </p:spPr>
+        <p:txBody>
+          <a:bodyPr anchor="t" rtlCol="false" tIns="0" lIns="0" bIns="0" rIns="0">
+            <a:spAutoFit/>
+          </a:bodyPr>
+          <a:lstStyle/>
+          <a:p>
+            <a:pPr algn="ctr">
+              <a:lnSpc>
+                <a:spcPts val="7699"/>
+              </a:lnSpc>
+              <a:spcBef>
+                <a:spcPct val="0"/>
+              </a:spcBef>
+            </a:pPr>
+            <a:r>
+              <a:rPr lang="en-US" b="true" sz="5499">
+                <a:solidFill>
+                  <a:srgbClr val="17548F"/>
+                </a:solidFill>
+                <a:latin typeface="Faustina Bold"/>
+                <a:ea typeface="Faustina Bold"/>
+                <a:cs typeface="Faustina Bold"/>
+                <a:sym typeface="Faustina Bold"/>
+              </a:rPr>
+              <a:t>1. </a:t>
+            </a:r>
+            <a:r>
+              <a:rPr lang="en-US" b="true" sz="5499">
+                <a:solidFill>
+                  <a:srgbClr val="17548F"/>
+                </a:solidFill>
+                <a:latin typeface="Faustina Bold"/>
+                <a:ea typeface="Faustina Bold"/>
+                <a:cs typeface="Faustina Bold"/>
+                <a:sym typeface="Faustina Bold"/>
+              </a:rPr>
+              <a:t>Lý do chọn đề tài - tính cấp thiết</a:t>
+            </a:r>
+          </a:p>
+        </p:txBody>
+      </p:sp>
+      <p:sp>
+        <p:nvSpPr>
+          <p:cNvPr name="TextBox 8" id="8"/>
+          <p:cNvSpPr txBox="true"/>
+          <p:nvPr/>
+        </p:nvSpPr>
+        <p:spPr>
+          <a:xfrm rot="0">
+            <a:off x="1317307" y="2737123"/>
+            <a:ext cx="15653385" cy="4940300"/>
+          </a:xfrm>
+          <a:prstGeom prst="rect">
+            <a:avLst/>
+          </a:prstGeom>
+        </p:spPr>
+        <p:txBody>
+          <a:bodyPr anchor="t" rtlCol="false" tIns="0" lIns="0" bIns="0" rIns="0">
+            <a:spAutoFit/>
+          </a:bodyPr>
+          <a:lstStyle/>
+          <a:p>
+            <a:pPr algn="just">
+              <a:lnSpc>
+                <a:spcPts val="4900"/>
+              </a:lnSpc>
+            </a:pPr>
+            <a:r>
+              <a:rPr lang="en-US" sz="3500" b="true">
+                <a:solidFill>
+                  <a:srgbClr val="17548F"/>
+                </a:solidFill>
+                <a:latin typeface="Faustina Bold"/>
+                <a:ea typeface="Faustina Bold"/>
+                <a:cs typeface="Faustina Bold"/>
+                <a:sym typeface="Faustina Bold"/>
+              </a:rPr>
+              <a:t>Vấn đề thực tiễn:</a:t>
+            </a:r>
+          </a:p>
+          <a:p>
+            <a:pPr algn="just" marL="755651" indent="-377825" lvl="1">
+              <a:lnSpc>
+                <a:spcPts val="4900"/>
+              </a:lnSpc>
+              <a:buFont typeface="Arial"/>
+              <a:buChar char="•"/>
+            </a:pPr>
+            <a:r>
+              <a:rPr lang="en-US" b="true" sz="3500">
+                <a:solidFill>
+                  <a:srgbClr val="17548F"/>
+                </a:solidFill>
+                <a:latin typeface="Faustina Bold"/>
+                <a:ea typeface="Faustina Bold"/>
+                <a:cs typeface="Faustina Bold"/>
+                <a:sym typeface="Faustina Bold"/>
+              </a:rPr>
+              <a:t>U</a:t>
+            </a:r>
+            <a:r>
+              <a:rPr lang="en-US" b="true" sz="3500">
+                <a:solidFill>
+                  <a:srgbClr val="17548F"/>
+                </a:solidFill>
+                <a:latin typeface="Faustina Bold"/>
+                <a:ea typeface="Faustina Bold"/>
+                <a:cs typeface="Faustina Bold"/>
+                <a:sym typeface="Faustina Bold"/>
+              </a:rPr>
+              <a:t> não (Glioma) cực kỳ nguy hiểm, cần chẩn đoán sớm và chính xác </a:t>
+            </a:r>
+            <a:r>
+              <a:rPr lang="en-US" b="true" sz="3500">
+                <a:solidFill>
+                  <a:srgbClr val="17548F"/>
+                </a:solidFill>
+                <a:latin typeface="Faustina Bold"/>
+                <a:ea typeface="Faustina Bold"/>
+                <a:cs typeface="Faustina Bold"/>
+                <a:sym typeface="Faustina Bold"/>
+              </a:rPr>
+              <a:t>.</a:t>
+            </a:r>
+          </a:p>
+          <a:p>
+            <a:pPr algn="just" marL="755651" indent="-377825" lvl="1">
+              <a:lnSpc>
+                <a:spcPts val="4900"/>
+              </a:lnSpc>
+              <a:spcBef>
+                <a:spcPct val="0"/>
+              </a:spcBef>
+              <a:buFont typeface="Arial"/>
+              <a:buChar char="•"/>
+            </a:pPr>
+            <a:r>
+              <a:rPr lang="en-US" b="true" sz="3500">
+                <a:solidFill>
+                  <a:srgbClr val="17548F"/>
+                </a:solidFill>
+                <a:latin typeface="Faustina Bold"/>
+                <a:ea typeface="Faustina Bold"/>
+                <a:cs typeface="Faustina Bold"/>
+                <a:sym typeface="Faustina Bold"/>
+              </a:rPr>
+              <a:t>Thực trạng: Bác sĩ khoanh vùng thủ công tốn 3-5 giờ/ca, kết quả phụ thuộc chủ quan, dễ sai sót.</a:t>
+            </a:r>
+          </a:p>
+          <a:p>
+            <a:pPr algn="just">
+              <a:lnSpc>
+                <a:spcPts val="4900"/>
+              </a:lnSpc>
+              <a:spcBef>
+                <a:spcPct val="0"/>
+              </a:spcBef>
+            </a:pPr>
+            <a:r>
+              <a:rPr lang="en-US" b="true" sz="3500">
+                <a:solidFill>
+                  <a:srgbClr val="17548F"/>
+                </a:solidFill>
+                <a:latin typeface="Faustina Bold"/>
+                <a:ea typeface="Faustina Bold"/>
+                <a:cs typeface="Faustina Bold"/>
+                <a:sym typeface="Faustina Bold"/>
+              </a:rPr>
+              <a:t>Khoảng trống nghiên cứu: Các mô hình 3D hiện đại (nnU-Net) quá nặng, đòi hỏi siêu máy tính, khó triển khai tại bệnh viện tuyến dưới ở Việt Nam.</a:t>
+            </a:r>
+          </a:p>
+          <a:p>
+            <a:pPr algn="just">
+              <a:lnSpc>
+                <a:spcPts val="4900"/>
+              </a:lnSpc>
+              <a:spcBef>
+                <a:spcPct val="0"/>
+              </a:spcBef>
+            </a:pPr>
+            <a:r>
+              <a:rPr lang="en-US" b="true" sz="3500">
+                <a:solidFill>
+                  <a:srgbClr val="17548F"/>
+                </a:solidFill>
+                <a:latin typeface="Faustina Bold"/>
+                <a:ea typeface="Faustina Bold"/>
+                <a:cs typeface="Faustina Bold"/>
+                <a:sym typeface="Faustina Bold"/>
+              </a:rPr>
+              <a:t>Tính thời sự &amp; Ứng dụng: Ứng dụng AI (Deep Learning) hỗ trợ chẩn đoán hình ảnh là xu hướng tất yếu của Y tế 4.0.</a:t>
+            </a:r>
+          </a:p>
+        </p:txBody>
+      </p:sp>
+      <p:sp>
+        <p:nvSpPr>
+          <p:cNvPr name="Freeform 9" id="9"/>
           <p:cNvSpPr/>
           <p:nvPr/>
         </p:nvSpPr>
         <p:spPr>
           <a:xfrm flipH="false" flipV="false" rot="0">
-            <a:off x="15635604" y="-288678"/>
-            <a:ext cx="2870265" cy="1317378"/>
+            <a:off x="247041" y="263470"/>
+            <a:ext cx="2683548" cy="765230"/>
           </a:xfrm>
           <a:custGeom>
             <a:avLst/>
@@ -8889,18 +10379,18 @@
             <a:cxnLst/>
             <a:rect r="r" b="b" t="t" l="l"/>
             <a:pathLst>
-              <a:path h="1317378" w="2870265">
+              <a:path h="765230" w="2683548">
                 <a:moveTo>
                   <a:pt x="0" y="0"/>
                 </a:moveTo>
                 <a:lnTo>
-                  <a:pt x="2870265" y="0"/>
-                </a:lnTo>
-                <a:lnTo>
-                  <a:pt x="2870265" y="1317378"/>
-                </a:lnTo>
-                <a:lnTo>
-                  <a:pt x="0" y="1317378"/>
+                  <a:pt x="2683548" y="0"/>
+                </a:lnTo>
+                <a:lnTo>
+                  <a:pt x="2683548" y="765230"/>
+                </a:lnTo>
+                <a:lnTo>
+                  <a:pt x="0" y="765230"/>
                 </a:lnTo>
                 <a:lnTo>
                   <a:pt x="0" y="0"/>
@@ -8910,327 +10400,12 @@
             </a:pathLst>
           </a:custGeom>
           <a:blipFill>
-            <a:blip r:embed="rId10">
-              <a:extLst>
-                <a:ext uri="{96DAC541-7B7A-43D3-8B79-37D633B846F1}">
-                  <asvg:svgBlip xmlns:asvg="http://schemas.microsoft.com/office/drawing/2016/SVG/main" r:embed="rId11"/>
-                </a:ext>
-              </a:extLst>
-            </a:blip>
+            <a:blip r:embed="rId10"/>
             <a:stretch>
               <a:fillRect l="0" t="0" r="0" b="0"/>
             </a:stretch>
           </a:blipFill>
         </p:spPr>
-      </p:sp>
-      <p:sp>
-        <p:nvSpPr>
-          <p:cNvPr name="TextBox 8" id="8"/>
-          <p:cNvSpPr txBox="true"/>
-          <p:nvPr/>
-        </p:nvSpPr>
-        <p:spPr>
-          <a:xfrm rot="0">
-            <a:off x="3513951" y="1535"/>
-            <a:ext cx="11260099" cy="1193800"/>
-          </a:xfrm>
-          <a:prstGeom prst="rect">
-            <a:avLst/>
-          </a:prstGeom>
-        </p:spPr>
-        <p:txBody>
-          <a:bodyPr anchor="t" rtlCol="false" tIns="0" lIns="0" bIns="0" rIns="0">
-            <a:spAutoFit/>
-          </a:bodyPr>
-          <a:lstStyle/>
-          <a:p>
-            <a:pPr algn="ctr">
-              <a:lnSpc>
-                <a:spcPts val="9799"/>
-              </a:lnSpc>
-              <a:spcBef>
-                <a:spcPct val="0"/>
-              </a:spcBef>
-            </a:pPr>
-            <a:r>
-              <a:rPr lang="en-US" b="true" sz="6999">
-                <a:solidFill>
-                  <a:srgbClr val="17548F"/>
-                </a:solidFill>
-                <a:latin typeface="Faustina Bold"/>
-                <a:ea typeface="Faustina Bold"/>
-                <a:cs typeface="Faustina Bold"/>
-                <a:sym typeface="Faustina Bold"/>
-              </a:rPr>
-              <a:t>Nội dung chính</a:t>
-            </a:r>
-          </a:p>
-        </p:txBody>
-      </p:sp>
-      <p:sp>
-        <p:nvSpPr>
-          <p:cNvPr name="TextBox 9" id="9"/>
-          <p:cNvSpPr txBox="true"/>
-          <p:nvPr/>
-        </p:nvSpPr>
-        <p:spPr>
-          <a:xfrm rot="0">
-            <a:off x="1949906" y="1597195"/>
-            <a:ext cx="12865182" cy="7959454"/>
-          </a:xfrm>
-          <a:prstGeom prst="rect">
-            <a:avLst/>
-          </a:prstGeom>
-        </p:spPr>
-        <p:txBody>
-          <a:bodyPr anchor="t" rtlCol="false" tIns="0" lIns="0" bIns="0" rIns="0">
-            <a:spAutoFit/>
-          </a:bodyPr>
-          <a:lstStyle/>
-          <a:p>
-            <a:pPr algn="l" marL="806532" indent="-403266" lvl="1">
-              <a:lnSpc>
-                <a:spcPts val="5229"/>
-              </a:lnSpc>
-              <a:buAutoNum type="arabicPeriod" startAt="1"/>
-            </a:pPr>
-            <a:r>
-              <a:rPr lang="en-US" b="true" sz="3735">
-                <a:solidFill>
-                  <a:srgbClr val="17548F"/>
-                </a:solidFill>
-                <a:latin typeface="Faustina Bold"/>
-                <a:ea typeface="Faustina Bold"/>
-                <a:cs typeface="Faustina Bold"/>
-                <a:sym typeface="Faustina Bold"/>
-              </a:rPr>
-              <a:t>LÝ DO CHỌN ĐỀ TÀI - TÍNH CẤP THIẾT</a:t>
-            </a:r>
-          </a:p>
-          <a:p>
-            <a:pPr algn="l" marL="806532" indent="-403266" lvl="1">
-              <a:lnSpc>
-                <a:spcPts val="5229"/>
-              </a:lnSpc>
-              <a:buAutoNum type="arabicPeriod" startAt="1"/>
-            </a:pPr>
-            <a:r>
-              <a:rPr lang="en-US" b="true" sz="3735">
-                <a:solidFill>
-                  <a:srgbClr val="17548F"/>
-                </a:solidFill>
-                <a:latin typeface="Faustina Bold"/>
-                <a:ea typeface="Faustina Bold"/>
-                <a:cs typeface="Faustina Bold"/>
-                <a:sym typeface="Faustina Bold"/>
-              </a:rPr>
-              <a:t>MỤC TIÊU NGHIÊN CỨU</a:t>
-            </a:r>
-          </a:p>
-          <a:p>
-            <a:pPr algn="l" marL="806532" indent="-403266" lvl="1">
-              <a:lnSpc>
-                <a:spcPts val="5229"/>
-              </a:lnSpc>
-              <a:buAutoNum type="arabicPeriod" startAt="1"/>
-            </a:pPr>
-            <a:r>
-              <a:rPr lang="en-US" b="true" sz="3735">
-                <a:solidFill>
-                  <a:srgbClr val="17548F"/>
-                </a:solidFill>
-                <a:latin typeface="Faustina Bold"/>
-                <a:ea typeface="Faustina Bold"/>
-                <a:cs typeface="Faustina Bold"/>
-                <a:sym typeface="Faustina Bold"/>
-              </a:rPr>
-              <a:t>PHẠM VI VÀ GIỚI HẠN ĐỀ TÀI</a:t>
-            </a:r>
-          </a:p>
-          <a:p>
-            <a:pPr algn="l" marL="806532" indent="-403266" lvl="1">
-              <a:lnSpc>
-                <a:spcPts val="5229"/>
-              </a:lnSpc>
-              <a:buAutoNum type="arabicPeriod" startAt="1"/>
-            </a:pPr>
-            <a:r>
-              <a:rPr lang="en-US" b="true" sz="3735">
-                <a:solidFill>
-                  <a:srgbClr val="17548F"/>
-                </a:solidFill>
-                <a:latin typeface="Faustina Bold"/>
-                <a:ea typeface="Faustina Bold"/>
-                <a:cs typeface="Faustina Bold"/>
-                <a:sym typeface="Faustina Bold"/>
-              </a:rPr>
-              <a:t>TỔNG QUAN BÀI TOÁN &amp; NGHIÊN CỨU LIÊN QUAN</a:t>
-            </a:r>
-          </a:p>
-          <a:p>
-            <a:pPr algn="l" marL="806532" indent="-403266" lvl="1">
-              <a:lnSpc>
-                <a:spcPts val="5229"/>
-              </a:lnSpc>
-              <a:buAutoNum type="arabicPeriod" startAt="1"/>
-            </a:pPr>
-            <a:r>
-              <a:rPr lang="en-US" b="true" sz="3735">
-                <a:solidFill>
-                  <a:srgbClr val="17548F"/>
-                </a:solidFill>
-                <a:latin typeface="Faustina Bold"/>
-                <a:ea typeface="Faustina Bold"/>
-                <a:cs typeface="Faustina Bold"/>
-                <a:sym typeface="Faustina Bold"/>
-              </a:rPr>
-              <a:t>CƠ SỞ LÝ THUYẾT</a:t>
-            </a:r>
-          </a:p>
-          <a:p>
-            <a:pPr algn="l" marL="806532" indent="-403266" lvl="1">
-              <a:lnSpc>
-                <a:spcPts val="5229"/>
-              </a:lnSpc>
-              <a:buAutoNum type="arabicPeriod" startAt="1"/>
-            </a:pPr>
-            <a:r>
-              <a:rPr lang="en-US" b="true" sz="3735">
-                <a:solidFill>
-                  <a:srgbClr val="17548F"/>
-                </a:solidFill>
-                <a:latin typeface="Faustina Bold"/>
-                <a:ea typeface="Faustina Bold"/>
-                <a:cs typeface="Faustina Bold"/>
-                <a:sym typeface="Faustina Bold"/>
-              </a:rPr>
-              <a:t> PHƯƠNG PHÁP THỰC HIỆN / MÔ HÌNH ĐỀ XUẤT</a:t>
-            </a:r>
-          </a:p>
-          <a:p>
-            <a:pPr algn="l" marL="806532" indent="-403266" lvl="1">
-              <a:lnSpc>
-                <a:spcPts val="5229"/>
-              </a:lnSpc>
-              <a:buAutoNum type="arabicPeriod" startAt="1"/>
-            </a:pPr>
-            <a:r>
-              <a:rPr lang="en-US" b="true" sz="3735">
-                <a:solidFill>
-                  <a:srgbClr val="17548F"/>
-                </a:solidFill>
-                <a:latin typeface="Faustina Bold"/>
-                <a:ea typeface="Faustina Bold"/>
-                <a:cs typeface="Faustina Bold"/>
-                <a:sym typeface="Faustina Bold"/>
-              </a:rPr>
-              <a:t>THỰC NGHIỆM – KẾT QUẢ</a:t>
-            </a:r>
-          </a:p>
-          <a:p>
-            <a:pPr algn="l" marL="806532" indent="-403266" lvl="1">
-              <a:lnSpc>
-                <a:spcPts val="5229"/>
-              </a:lnSpc>
-              <a:buAutoNum type="arabicPeriod" startAt="1"/>
-            </a:pPr>
-            <a:r>
-              <a:rPr lang="en-US" b="true" sz="3735">
-                <a:solidFill>
-                  <a:srgbClr val="17548F"/>
-                </a:solidFill>
-                <a:latin typeface="Faustina Bold"/>
-                <a:ea typeface="Faustina Bold"/>
-                <a:cs typeface="Faustina Bold"/>
-                <a:sym typeface="Faustina Bold"/>
-              </a:rPr>
-              <a:t>KẾT QUẢ ĐỊNH TÍNH</a:t>
-            </a:r>
-          </a:p>
-          <a:p>
-            <a:pPr algn="l" marL="806532" indent="-403266" lvl="1">
-              <a:lnSpc>
-                <a:spcPts val="5229"/>
-              </a:lnSpc>
-              <a:buAutoNum type="arabicPeriod" startAt="1"/>
-            </a:pPr>
-            <a:r>
-              <a:rPr lang="en-US" b="true" sz="3735">
-                <a:solidFill>
-                  <a:srgbClr val="17548F"/>
-                </a:solidFill>
-                <a:latin typeface="Faustina Bold"/>
-                <a:ea typeface="Faustina Bold"/>
-                <a:cs typeface="Faustina Bold"/>
-                <a:sym typeface="Faustina Bold"/>
-              </a:rPr>
-              <a:t>ĐÓNG GÓP MỚI CỦA ĐỀ TÀI</a:t>
-            </a:r>
-          </a:p>
-          <a:p>
-            <a:pPr algn="l" marL="806532" indent="-403266" lvl="1">
-              <a:lnSpc>
-                <a:spcPts val="5229"/>
-              </a:lnSpc>
-              <a:buAutoNum type="arabicPeriod" startAt="1"/>
-            </a:pPr>
-            <a:r>
-              <a:rPr lang="en-US" b="true" sz="3735">
-                <a:solidFill>
-                  <a:srgbClr val="17548F"/>
-                </a:solidFill>
-                <a:latin typeface="Faustina Bold"/>
-                <a:ea typeface="Faustina Bold"/>
-                <a:cs typeface="Faustina Bold"/>
-                <a:sym typeface="Faustina Bold"/>
-              </a:rPr>
-              <a:t>HẠN CHẾ CỦA ĐỀ TÀI</a:t>
-            </a:r>
-          </a:p>
-          <a:p>
-            <a:pPr algn="l" marL="806532" indent="-403266" lvl="1">
-              <a:lnSpc>
-                <a:spcPts val="5229"/>
-              </a:lnSpc>
-              <a:buAutoNum type="arabicPeriod" startAt="1"/>
-            </a:pPr>
-            <a:r>
-              <a:rPr lang="en-US" b="true" sz="3735">
-                <a:solidFill>
-                  <a:srgbClr val="17548F"/>
-                </a:solidFill>
-                <a:latin typeface="Faustina Bold"/>
-                <a:ea typeface="Faustina Bold"/>
-                <a:cs typeface="Faustina Bold"/>
-                <a:sym typeface="Faustina Bold"/>
-              </a:rPr>
-              <a:t>HƯỚNG PHÁT TRIỂN TƯƠNG LAI</a:t>
-            </a:r>
-          </a:p>
-          <a:p>
-            <a:pPr algn="l" marL="806532" indent="-403266" lvl="1">
-              <a:lnSpc>
-                <a:spcPts val="5229"/>
-              </a:lnSpc>
-              <a:spcBef>
-                <a:spcPct val="0"/>
-              </a:spcBef>
-              <a:buAutoNum type="arabicPeriod" startAt="1"/>
-            </a:pPr>
-            <a:r>
-              <a:rPr lang="en-US" b="true" sz="3735">
-                <a:solidFill>
-                  <a:srgbClr val="17548F"/>
-                </a:solidFill>
-                <a:latin typeface="Faustina Bold"/>
-                <a:ea typeface="Faustina Bold"/>
-                <a:cs typeface="Faustina Bold"/>
-                <a:sym typeface="Faustina Bold"/>
-              </a:rPr>
-              <a:t>KẾT LUẬN</a:t>
-            </a:r>
-          </a:p>
-        </p:txBody>
       </p:sp>
     </p:spTree>
   </p:cSld>
@@ -9482,8 +10657,8 @@
         </p:nvSpPr>
         <p:spPr>
           <a:xfrm flipH="false" flipV="true" rot="0">
-            <a:off x="-746708" y="-439976"/>
-            <a:ext cx="3131075" cy="1810331"/>
+            <a:off x="15635604" y="9222587"/>
+            <a:ext cx="2870265" cy="1317378"/>
           </a:xfrm>
           <a:custGeom>
             <a:avLst/>
@@ -9492,21 +10667,21 @@
             <a:cxnLst/>
             <a:rect r="r" b="b" t="t" l="l"/>
             <a:pathLst>
-              <a:path h="1810331" w="3131075">
+              <a:path h="1317378" w="2870265">
                 <a:moveTo>
-                  <a:pt x="0" y="1810331"/>
+                  <a:pt x="0" y="1317378"/>
                 </a:moveTo>
                 <a:lnTo>
-                  <a:pt x="3131075" y="1810331"/>
-                </a:lnTo>
-                <a:lnTo>
-                  <a:pt x="3131075" y="0"/>
-                </a:lnTo>
-                <a:lnTo>
-                  <a:pt x="0" y="0"/>
-                </a:lnTo>
-                <a:lnTo>
-                  <a:pt x="0" y="1810331"/>
+                  <a:pt x="2870265" y="1317378"/>
+                </a:lnTo>
+                <a:lnTo>
+                  <a:pt x="2870265" y="0"/>
+                </a:lnTo>
+                <a:lnTo>
+                  <a:pt x="0" y="0"/>
+                </a:lnTo>
+                <a:lnTo>
+                  <a:pt x="0" y="1317378"/>
                 </a:lnTo>
                 <a:close/>
               </a:path>
@@ -9528,66 +10703,14 @@
       </p:sp>
       <p:sp>
         <p:nvSpPr>
-          <p:cNvPr name="Freeform 7" id="7"/>
-          <p:cNvSpPr/>
-          <p:nvPr/>
-        </p:nvSpPr>
-        <p:spPr>
-          <a:xfrm flipH="false" flipV="true" rot="0">
-            <a:off x="15635604" y="9222587"/>
-            <a:ext cx="2870265" cy="1317378"/>
-          </a:xfrm>
-          <a:custGeom>
-            <a:avLst/>
-            <a:gdLst/>
-            <a:ahLst/>
-            <a:cxnLst/>
-            <a:rect r="r" b="b" t="t" l="l"/>
-            <a:pathLst>
-              <a:path h="1317378" w="2870265">
-                <a:moveTo>
-                  <a:pt x="0" y="1317378"/>
-                </a:moveTo>
-                <a:lnTo>
-                  <a:pt x="2870265" y="1317378"/>
-                </a:lnTo>
-                <a:lnTo>
-                  <a:pt x="2870265" y="0"/>
-                </a:lnTo>
-                <a:lnTo>
-                  <a:pt x="0" y="0"/>
-                </a:lnTo>
-                <a:lnTo>
-                  <a:pt x="0" y="1317378"/>
-                </a:lnTo>
-                <a:close/>
-              </a:path>
-            </a:pathLst>
-          </a:custGeom>
-          <a:blipFill>
-            <a:blip r:embed="rId10">
-              <a:extLst>
-                <a:ext uri="{96DAC541-7B7A-43D3-8B79-37D633B846F1}">
-                  <asvg:svgBlip xmlns:asvg="http://schemas.microsoft.com/office/drawing/2016/SVG/main" r:embed="rId11"/>
-                </a:ext>
-              </a:extLst>
-            </a:blip>
-            <a:stretch>
-              <a:fillRect l="0" t="0" r="0" b="0"/>
-            </a:stretch>
-          </a:blipFill>
-        </p:spPr>
-      </p:sp>
-      <p:sp>
-        <p:nvSpPr>
-          <p:cNvPr name="TextBox 8" id="8"/>
+          <p:cNvPr name="TextBox 7" id="7"/>
           <p:cNvSpPr txBox="true"/>
           <p:nvPr/>
         </p:nvSpPr>
         <p:spPr>
           <a:xfrm rot="0">
-            <a:off x="1388046" y="-121136"/>
-            <a:ext cx="15871254" cy="1193800"/>
+            <a:off x="3139296" y="923925"/>
+            <a:ext cx="12009409" cy="936625"/>
           </a:xfrm>
           <a:prstGeom prst="rect">
             <a:avLst/>
@@ -9601,49 +10724,61 @@
           <a:p>
             <a:pPr algn="ctr">
               <a:lnSpc>
-                <a:spcPts val="9799"/>
+                <a:spcPts val="7699"/>
               </a:lnSpc>
               <a:spcBef>
                 <a:spcPct val="0"/>
               </a:spcBef>
             </a:pPr>
             <a:r>
-              <a:rPr lang="en-US" b="true" sz="6999">
-                <a:solidFill>
-                  <a:srgbClr val="17548F"/>
-                </a:solidFill>
-                <a:latin typeface="Faustina Bold"/>
-                <a:ea typeface="Faustina Bold"/>
-                <a:cs typeface="Faustina Bold"/>
-                <a:sym typeface="Faustina Bold"/>
-              </a:rPr>
-              <a:t>1. </a:t>
-            </a:r>
-            <a:r>
-              <a:rPr lang="en-US" b="true" sz="6999">
-                <a:solidFill>
-                  <a:srgbClr val="17548F"/>
-                </a:solidFill>
-                <a:latin typeface="Faustina Bold"/>
-                <a:ea typeface="Faustina Bold"/>
-                <a:cs typeface="Faustina Bold"/>
-                <a:sym typeface="Faustina Bold"/>
-              </a:rPr>
-              <a:t>Lý do chọn đề tài - tính cấp thiết</a:t>
+              <a:rPr lang="en-US" b="true" sz="5499">
+                <a:solidFill>
+                  <a:srgbClr val="17548F"/>
+                </a:solidFill>
+                <a:latin typeface="Faustina Bold"/>
+                <a:ea typeface="Faustina Bold"/>
+                <a:cs typeface="Faustina Bold"/>
+                <a:sym typeface="Faustina Bold"/>
+              </a:rPr>
+              <a:t>2</a:t>
+            </a:r>
+            <a:r>
+              <a:rPr lang="en-US" b="true" sz="5499">
+                <a:solidFill>
+                  <a:srgbClr val="17548F"/>
+                </a:solidFill>
+                <a:latin typeface="Faustina Bold"/>
+                <a:ea typeface="Faustina Bold"/>
+                <a:cs typeface="Faustina Bold"/>
+                <a:sym typeface="Faustina Bold"/>
+              </a:rPr>
+              <a:t>. Mụ</a:t>
+            </a:r>
+            <a:r>
+              <a:rPr lang="en-US" b="true" sz="5499">
+                <a:solidFill>
+                  <a:srgbClr val="17548F"/>
+                </a:solidFill>
+                <a:latin typeface="Faustina Bold"/>
+                <a:ea typeface="Faustina Bold"/>
+                <a:cs typeface="Faustina Bold"/>
+                <a:sym typeface="Faustina Bold"/>
+              </a:rPr>
+              <a:t>c tiêu nghiên cứu</a:t>
             </a:r>
           </a:p>
         </p:txBody>
       </p:sp>
       <p:sp>
         <p:nvSpPr>
-          <p:cNvPr name="TextBox 9" id="9"/>
+          <p:cNvPr name="TextBox 8" id="8"/>
           <p:cNvSpPr txBox="true"/>
           <p:nvPr/>
         </p:nvSpPr>
         <p:spPr>
           <a:xfrm rot="0">
-            <a:off x="1317307" y="2015639"/>
-            <a:ext cx="15653385" cy="4940300"/>
+            <a:off x="1317307" y="2932352"/>
+            <a:ext cx="15653385" cy="5559425"/>
           </a:xfrm>
           <a:prstGeom prst="rect">
             <a:avLst/>
@@ -9654,25 +10789,6 @@
             <a:spAutoFit/>
           </a:bodyPr>
           <a:lstStyle/>
-          <a:p>
-            <a:pPr algn="just">
-              <a:lnSpc>
-                <a:spcPts val="4900"/>
-              </a:lnSpc>
-            </a:pPr>
-            <a:r>
-              <a:rPr lang="en-US" sz="3500" b="true">
-                <a:solidFill>
-                  <a:srgbClr val="17548F"/>
-                </a:solidFill>
-                <a:latin typeface="Faustina Bold"/>
-                <a:ea typeface="Faustina Bold"/>
-                <a:cs typeface="Faustina Bold"/>
-                <a:sym typeface="Faustina Bold"/>
-              </a:rPr>
-              <a:t>Vấn đề thực tiễn:</a:t>
-            </a:r>
-          </a:p>
           <a:p>
             <a:pPr algn="just" marL="755651" indent="-377825" lvl="1">
               <a:lnSpc>
@@ -9691,7 +10807,7 @@
                 <a:cs typeface="Faustina Bold"/>
                 <a:sym typeface="Faustina Bold"/>
               </a:rPr>
-              <a:t>U</a:t>
+              <a:t>Mục tiêu</a:t>
             </a:r>
             <a:r>
               <a:rPr lang="en-US" b="true" sz="3500">
@@ -9703,7 +10819,7 @@
                 <a:cs typeface="Faustina Bold"/>
                 <a:sym typeface="Faustina Bold"/>
               </a:rPr>
-              <a:t> não (Glioma) cực kỳ nguy hiểm, cần chẩn đoán sớm và chính xác </a:t>
+              <a:t> tổng quát: Xây dựng hệ thống tự động phân vùng 3 thành phần k</a:t>
             </a:r>
             <a:r>
               <a:rPr lang="en-US" b="true" sz="3500">
@@ -9715,7 +10831,121 @@
                 <a:cs typeface="Faustina Bold"/>
                 <a:sym typeface="Faustina Bold"/>
               </a:rPr>
-              <a:t>.</a:t>
+              <a:t>hối u (Hoại tử, Phù nề, Tăng quang) từ ảnh MRI đa kênh.</a:t>
+            </a:r>
+          </a:p>
+          <a:p>
+            <a:pPr algn="just" marL="755651" indent="-377825" lvl="1">
+              <a:lnSpc>
+                <a:spcPts val="4900"/>
+              </a:lnSpc>
+              <a:buFont typeface="Arial"/>
+              <a:buChar char="•"/>
+            </a:pPr>
+            <a:r>
+              <a:rPr lang="en-US" b="true" sz="3500">
+                <a:solidFill>
+                  <a:srgbClr val="17548F"/>
+                </a:solidFill>
+                <a:latin typeface="Faustina Bold"/>
+                <a:ea typeface="Faustina Bold"/>
+                <a:cs typeface="Faustina Bold"/>
+                <a:sym typeface="Faustina Bold"/>
+              </a:rPr>
+              <a:t>Mục tiêu cụ thể: </a:t>
+            </a:r>
+          </a:p>
+          <a:p>
+            <a:pPr algn="just" marL="1511301" indent="-503767" lvl="2">
+              <a:lnSpc>
+                <a:spcPts val="4900"/>
+              </a:lnSpc>
+              <a:spcBef>
+                <a:spcPct val="0"/>
+              </a:spcBef>
+              <a:buAutoNum type="alphaLcPeriod" startAt="1"/>
+            </a:pPr>
+            <a:r>
+              <a:rPr lang="en-US" b="true" sz="3500">
+                <a:solidFill>
+                  <a:srgbClr val="17548F"/>
+                </a:solidFill>
+                <a:latin typeface="Faustina Bold"/>
+                <a:ea typeface="Faustina Bold"/>
+                <a:cs typeface="Faustina Bold"/>
+                <a:sym typeface="Faustina Bold"/>
+              </a:rPr>
+              <a:t>Xây dựng pipeline tiền xử lý</a:t>
+            </a:r>
+            <a:r>
+              <a:rPr lang="en-US" b="true" sz="3500">
+                <a:solidFill>
+                  <a:srgbClr val="17548F"/>
+                </a:solidFill>
+                <a:latin typeface="Faustina Bold"/>
+                <a:ea typeface="Faustina Bold"/>
+                <a:cs typeface="Faustina Bold"/>
+                <a:sym typeface="Faustina Bold"/>
+              </a:rPr>
+              <a:t> dữ liệu chuẩn (BraTS).</a:t>
+            </a:r>
+          </a:p>
+          <a:p>
+            <a:pPr algn="just" marL="1511301" indent="-503767" lvl="2">
+              <a:lnSpc>
+                <a:spcPts val="4900"/>
+              </a:lnSpc>
+              <a:spcBef>
+                <a:spcPct val="0"/>
+              </a:spcBef>
+              <a:buAutoNum type="alphaLcPeriod" startAt="1"/>
+            </a:pPr>
+            <a:r>
+              <a:rPr lang="en-US" b="true" sz="3500">
+                <a:solidFill>
+                  <a:srgbClr val="17548F"/>
+                </a:solidFill>
+                <a:latin typeface="Faustina Bold"/>
+                <a:ea typeface="Faustina Bold"/>
+                <a:cs typeface="Faustina Bold"/>
+                <a:sym typeface="Faustina Bold"/>
+              </a:rPr>
+              <a:t>T</a:t>
+            </a:r>
+            <a:r>
+              <a:rPr lang="en-US" b="true" sz="3500">
+                <a:solidFill>
+                  <a:srgbClr val="17548F"/>
+                </a:solidFill>
+                <a:latin typeface="Faustina Bold"/>
+                <a:ea typeface="Faustina Bold"/>
+                <a:cs typeface="Faustina Bold"/>
+                <a:sym typeface="Faustina Bold"/>
+              </a:rPr>
+              <a:t>ối ưu kiến trúc U-Net 2D.</a:t>
+            </a:r>
+          </a:p>
+          <a:p>
+            <a:pPr algn="just" marL="1511301" indent="-503767" lvl="2">
+              <a:lnSpc>
+                <a:spcPts val="4900"/>
+              </a:lnSpc>
+              <a:spcBef>
+                <a:spcPct val="0"/>
+              </a:spcBef>
+              <a:buAutoNum type="alphaLcPeriod" startAt="1"/>
+            </a:pPr>
+            <a:r>
+              <a:rPr lang="en-US" b="true" sz="3500">
+                <a:solidFill>
+                  <a:srgbClr val="17548F"/>
+                </a:solidFill>
+                <a:latin typeface="Faustina Bold"/>
+                <a:ea typeface="Faustina Bold"/>
+                <a:cs typeface="Faustina Bold"/>
+                <a:sym typeface="Faustina Bold"/>
+              </a:rPr>
+              <a:t>Đề xuất hàm mất mát kết hợp (Combined Loss) để xử lý mất cân bằng dữ liệu.</a:t>
             </a:r>
           </a:p>
           <a:p>
@@ -9739,19 +10969,7 @@
                 <a:cs typeface="Faustina Bold"/>
                 <a:sym typeface="Faustina Bold"/>
               </a:rPr>
-              <a:t>Thực trạng: Bác sĩ khoanh vùng thủ công tốn 3-5 giờ/ca, kết quả phụ thuộc chủ quan, dễ sai sót</a:t>
-            </a:r>
-            <a:r>
-              <a:rPr lang="en-US" b="true" sz="3500">
-                <a:solidFill>
-                  <a:srgbClr val="17548F"/>
-                </a:solidFill>
-                <a:latin typeface="Faustina Bold"/>
-                <a:ea typeface="Faustina Bold"/>
-                <a:cs typeface="Faustina Bold"/>
-                <a:sym typeface="Faustina Bold"/>
-              </a:rPr>
-              <a:t> do mệt mỏi .</a:t>
+              <a:t>Yêu cầu kỹ thuật: Độ chính xác (Dice Score) &gt; 0.80; Thời gian xử lý &lt; 30 giây/ca.</a:t>
             </a:r>
           </a:p>
           <a:p>
@@ -9763,42 +10981,54 @@
                 <a:spcPct val="0"/>
               </a:spcBef>
             </a:pPr>
-            <a:r>
-              <a:rPr lang="en-US" b="true" sz="3500">
-                <a:solidFill>
-                  <a:srgbClr val="17548F"/>
-                </a:solidFill>
-                <a:latin typeface="Faustina Bold"/>
-                <a:ea typeface="Faustina Bold"/>
-                <a:cs typeface="Faustina Bold"/>
-                <a:sym typeface="Faustina Bold"/>
-              </a:rPr>
-              <a:t>Khoảng trống nghiên cứu: Các mô hình 3D hiện đại (nnU-Net) quá nặng, đòi hỏi siêu máy tính, khó triển khai tại bệnh viện tuyến dưới ở Việt Nam.</a:t>
-            </a:r>
-          </a:p>
-          <a:p>
-            <a:pPr algn="just">
-              <a:lnSpc>
-                <a:spcPts val="4900"/>
-              </a:lnSpc>
-              <a:spcBef>
-                <a:spcPct val="0"/>
-              </a:spcBef>
-            </a:pPr>
-            <a:r>
-              <a:rPr lang="en-US" b="true" sz="3500">
-                <a:solidFill>
-                  <a:srgbClr val="17548F"/>
-                </a:solidFill>
-                <a:latin typeface="Faustina Bold"/>
-                <a:ea typeface="Faustina Bold"/>
-                <a:cs typeface="Faustina Bold"/>
-                <a:sym typeface="Faustina Bold"/>
-              </a:rPr>
-              <a:t>Tính thời sự &amp; Ứng dụng: Ứng dụng AI (Deep Learning) hỗ trợ chẩn đoán hình ảnh là xu hướng tất yếu của Y tế 4.0.</a:t>
-            </a:r>
           </a:p>
         </p:txBody>
+      </p:sp>
+      <p:sp>
+        <p:nvSpPr>
+          <p:cNvPr name="Freeform 9" id="9"/>
+          <p:cNvSpPr/>
+          <p:nvPr/>
+        </p:nvSpPr>
+        <p:spPr>
+          <a:xfrm flipH="false" flipV="false" rot="0">
+            <a:off x="247041" y="263470"/>
+            <a:ext cx="2683548" cy="765230"/>
+          </a:xfrm>
+          <a:custGeom>
+            <a:avLst/>
+            <a:gdLst/>
+            <a:ahLst/>
+            <a:cxnLst/>
+            <a:rect r="r" b="b" t="t" l="l"/>
+            <a:pathLst>
+              <a:path h="765230" w="2683548">
+                <a:moveTo>
+                  <a:pt x="0" y="0"/>
+                </a:moveTo>
+                <a:lnTo>
+                  <a:pt x="2683548" y="0"/>
+                </a:lnTo>
+                <a:lnTo>
+                  <a:pt x="2683548" y="765230"/>
+                </a:lnTo>
+                <a:lnTo>
+                  <a:pt x="0" y="765230"/>
+                </a:lnTo>
+                <a:lnTo>
+                  <a:pt x="0" y="0"/>
+                </a:lnTo>
+                <a:close/>
+              </a:path>
+            </a:pathLst>
+          </a:custGeom>
+          <a:blipFill>
+            <a:blip r:embed="rId10"/>
+            <a:stretch>
+              <a:fillRect l="0" t="0" r="0" b="0"/>
+            </a:stretch>
+          </a:blipFill>
+        </p:spPr>
       </p:sp>
     </p:spTree>
   </p:cSld>
@@ -10050,8 +11280,8 @@
         </p:nvSpPr>
         <p:spPr>
           <a:xfrm flipH="false" flipV="true" rot="0">
-            <a:off x="-746708" y="-439976"/>
-            <a:ext cx="3131075" cy="1810331"/>
+            <a:off x="15635604" y="9222587"/>
+            <a:ext cx="2870265" cy="1317378"/>
           </a:xfrm>
           <a:custGeom>
             <a:avLst/>
@@ -10060,21 +11290,21 @@
             <a:cxnLst/>
             <a:rect r="r" b="b" t="t" l="l"/>
             <a:pathLst>
-              <a:path h="1810331" w="3131075">
+              <a:path h="1317378" w="2870265">
                 <a:moveTo>
-                  <a:pt x="0" y="1810331"/>
+                  <a:pt x="0" y="1317378"/>
                 </a:moveTo>
                 <a:lnTo>
-                  <a:pt x="3131075" y="1810331"/>
-                </a:lnTo>
-                <a:lnTo>
-                  <a:pt x="3131075" y="0"/>
-                </a:lnTo>
-                <a:lnTo>
-                  <a:pt x="0" y="0"/>
-                </a:lnTo>
-                <a:lnTo>
-                  <a:pt x="0" y="1810331"/>
+                  <a:pt x="2870265" y="1317378"/>
+                </a:lnTo>
+                <a:lnTo>
+                  <a:pt x="2870265" y="0"/>
+                </a:lnTo>
+                <a:lnTo>
+                  <a:pt x="0" y="0"/>
+                </a:lnTo>
+                <a:lnTo>
+                  <a:pt x="0" y="1317378"/>
                 </a:lnTo>
                 <a:close/>
               </a:path>
@@ -10096,66 +11326,14 @@
       </p:sp>
       <p:sp>
         <p:nvSpPr>
-          <p:cNvPr name="Freeform 7" id="7"/>
-          <p:cNvSpPr/>
-          <p:nvPr/>
-        </p:nvSpPr>
-        <p:spPr>
-          <a:xfrm flipH="false" flipV="true" rot="0">
-            <a:off x="15635604" y="9222587"/>
-            <a:ext cx="2870265" cy="1317378"/>
-          </a:xfrm>
-          <a:custGeom>
-            <a:avLst/>
-            <a:gdLst/>
-            <a:ahLst/>
-            <a:cxnLst/>
-            <a:rect r="r" b="b" t="t" l="l"/>
-            <a:pathLst>
-              <a:path h="1317378" w="2870265">
-                <a:moveTo>
-                  <a:pt x="0" y="1317378"/>
-                </a:moveTo>
-                <a:lnTo>
-                  <a:pt x="2870265" y="1317378"/>
-                </a:lnTo>
-                <a:lnTo>
-                  <a:pt x="2870265" y="0"/>
-                </a:lnTo>
-                <a:lnTo>
-                  <a:pt x="0" y="0"/>
-                </a:lnTo>
-                <a:lnTo>
-                  <a:pt x="0" y="1317378"/>
-                </a:lnTo>
-                <a:close/>
-              </a:path>
-            </a:pathLst>
-          </a:custGeom>
-          <a:blipFill>
-            <a:blip r:embed="rId10">
-              <a:extLst>
-                <a:ext uri="{96DAC541-7B7A-43D3-8B79-37D633B846F1}">
-                  <asvg:svgBlip xmlns:asvg="http://schemas.microsoft.com/office/drawing/2016/SVG/main" r:embed="rId11"/>
-                </a:ext>
-              </a:extLst>
-            </a:blip>
-            <a:stretch>
-              <a:fillRect l="0" t="0" r="0" b="0"/>
-            </a:stretch>
-          </a:blipFill>
-        </p:spPr>
-      </p:sp>
-      <p:sp>
-        <p:nvSpPr>
-          <p:cNvPr name="TextBox 8" id="8"/>
+          <p:cNvPr name="TextBox 7" id="7"/>
           <p:cNvSpPr txBox="true"/>
           <p:nvPr/>
         </p:nvSpPr>
         <p:spPr>
           <a:xfrm rot="0">
-            <a:off x="2919115" y="-133350"/>
-            <a:ext cx="12009409" cy="1193800"/>
+            <a:off x="2586008" y="923925"/>
+            <a:ext cx="13115985" cy="936625"/>
           </a:xfrm>
           <a:prstGeom prst="rect">
             <a:avLst/>
@@ -10169,61 +11347,61 @@
           <a:p>
             <a:pPr algn="ctr">
               <a:lnSpc>
-                <a:spcPts val="9799"/>
+                <a:spcPts val="7699"/>
               </a:lnSpc>
               <a:spcBef>
                 <a:spcPct val="0"/>
               </a:spcBef>
             </a:pPr>
             <a:r>
-              <a:rPr lang="en-US" b="true" sz="6999">
-                <a:solidFill>
-                  <a:srgbClr val="17548F"/>
-                </a:solidFill>
-                <a:latin typeface="Faustina Bold"/>
-                <a:ea typeface="Faustina Bold"/>
-                <a:cs typeface="Faustina Bold"/>
-                <a:sym typeface="Faustina Bold"/>
-              </a:rPr>
-              <a:t>2</a:t>
-            </a:r>
-            <a:r>
-              <a:rPr lang="en-US" b="true" sz="6999">
-                <a:solidFill>
-                  <a:srgbClr val="17548F"/>
-                </a:solidFill>
-                <a:latin typeface="Faustina Bold"/>
-                <a:ea typeface="Faustina Bold"/>
-                <a:cs typeface="Faustina Bold"/>
-                <a:sym typeface="Faustina Bold"/>
-              </a:rPr>
-              <a:t>. Mụ</a:t>
-            </a:r>
-            <a:r>
-              <a:rPr lang="en-US" b="true" sz="6999">
-                <a:solidFill>
-                  <a:srgbClr val="17548F"/>
-                </a:solidFill>
-                <a:latin typeface="Faustina Bold"/>
-                <a:ea typeface="Faustina Bold"/>
-                <a:cs typeface="Faustina Bold"/>
-                <a:sym typeface="Faustina Bold"/>
-              </a:rPr>
-              <a:t>c tiêu nghiên cứu</a:t>
+              <a:rPr lang="en-US" b="true" sz="5499">
+                <a:solidFill>
+                  <a:srgbClr val="17548F"/>
+                </a:solidFill>
+                <a:latin typeface="Faustina Bold"/>
+                <a:ea typeface="Faustina Bold"/>
+                <a:cs typeface="Faustina Bold"/>
+                <a:sym typeface="Faustina Bold"/>
+              </a:rPr>
+              <a:t>3</a:t>
+            </a:r>
+            <a:r>
+              <a:rPr lang="en-US" b="true" sz="5499">
+                <a:solidFill>
+                  <a:srgbClr val="17548F"/>
+                </a:solidFill>
+                <a:latin typeface="Faustina Bold"/>
+                <a:ea typeface="Faustina Bold"/>
+                <a:cs typeface="Faustina Bold"/>
+                <a:sym typeface="Faustina Bold"/>
+              </a:rPr>
+              <a:t>. Phạm</a:t>
+            </a:r>
+            <a:r>
+              <a:rPr lang="en-US" b="true" sz="5499">
+                <a:solidFill>
+                  <a:srgbClr val="17548F"/>
+                </a:solidFill>
+                <a:latin typeface="Faustina Bold"/>
+                <a:ea typeface="Faustina Bold"/>
+                <a:cs typeface="Faustina Bold"/>
+                <a:sym typeface="Faustina Bold"/>
+              </a:rPr>
+              <a:t> vi và giới hạn đề tài</a:t>
             </a:r>
           </a:p>
         </p:txBody>
       </p:sp>
       <p:sp>
         <p:nvSpPr>
-          <p:cNvPr name="TextBox 9" id="9"/>
+          <p:cNvPr name="TextBox 8" id="8"/>
           <p:cNvSpPr txBox="true"/>
           <p:nvPr/>
         </p:nvSpPr>
         <p:spPr>
           <a:xfrm rot="0">
-            <a:off x="1317307" y="2117998"/>
-            <a:ext cx="15653385" cy="5559425"/>
+            <a:off x="1317307" y="2996806"/>
+            <a:ext cx="15653385" cy="4940300"/>
           </a:xfrm>
           <a:prstGeom prst="rect">
             <a:avLst/>
@@ -10252,7 +11430,7 @@
                 <a:cs typeface="Faustina Bold"/>
                 <a:sym typeface="Faustina Bold"/>
               </a:rPr>
-              <a:t>Mục tiêu</a:t>
+              <a:t>Đối</a:t>
             </a:r>
             <a:r>
               <a:rPr lang="en-US" b="true" sz="3500">
@@ -10264,7 +11442,7 @@
                 <a:cs typeface="Faustina Bold"/>
                 <a:sym typeface="Faustina Bold"/>
               </a:rPr>
-              <a:t> tổng quát: Xây dựng hệ thống tự động phân vùng 3 thành phần k</a:t>
+              <a:t> tượng nghiên cứu: Ảnh MRI não đa phương thức (4 c</a:t>
             </a:r>
             <a:r>
               <a:rPr lang="en-US" b="true" sz="3500">
@@ -10276,121 +11454,7 @@
                 <a:cs typeface="Faustina Bold"/>
                 <a:sym typeface="Faustina Bold"/>
               </a:rPr>
-              <a:t>hối u (Hoại tử, Phù nề, Tăng quang) từ ảnh MRI đa kênh.</a:t>
-            </a:r>
-          </a:p>
-          <a:p>
-            <a:pPr algn="just" marL="755651" indent="-377825" lvl="1">
-              <a:lnSpc>
-                <a:spcPts val="4900"/>
-              </a:lnSpc>
-              <a:buFont typeface="Arial"/>
-              <a:buChar char="•"/>
-            </a:pPr>
-            <a:r>
-              <a:rPr lang="en-US" b="true" sz="3500">
-                <a:solidFill>
-                  <a:srgbClr val="17548F"/>
-                </a:solidFill>
-                <a:latin typeface="Faustina Bold"/>
-                <a:ea typeface="Faustina Bold"/>
-                <a:cs typeface="Faustina Bold"/>
-                <a:sym typeface="Faustina Bold"/>
-              </a:rPr>
-              <a:t>Mục tiêu cụ thể: </a:t>
-            </a:r>
-          </a:p>
-          <a:p>
-            <a:pPr algn="just" marL="1511301" indent="-503767" lvl="2">
-              <a:lnSpc>
-                <a:spcPts val="4900"/>
-              </a:lnSpc>
-              <a:spcBef>
-                <a:spcPct val="0"/>
-              </a:spcBef>
-              <a:buAutoNum type="alphaLcPeriod" startAt="1"/>
-            </a:pPr>
-            <a:r>
-              <a:rPr lang="en-US" b="true" sz="3500">
-                <a:solidFill>
-                  <a:srgbClr val="17548F"/>
-                </a:solidFill>
-                <a:latin typeface="Faustina Bold"/>
-                <a:ea typeface="Faustina Bold"/>
-                <a:cs typeface="Faustina Bold"/>
-                <a:sym typeface="Faustina Bold"/>
-              </a:rPr>
-              <a:t>Xây dựng pipeline tiền xử lý</a:t>
-            </a:r>
-            <a:r>
-              <a:rPr lang="en-US" b="true" sz="3500">
-                <a:solidFill>
-                  <a:srgbClr val="17548F"/>
-                </a:solidFill>
-                <a:latin typeface="Faustina Bold"/>
-                <a:ea typeface="Faustina Bold"/>
-                <a:cs typeface="Faustina Bold"/>
-                <a:sym typeface="Faustina Bold"/>
-              </a:rPr>
-              <a:t> dữ liệu chuẩn (BraTS).</a:t>
-            </a:r>
-          </a:p>
-          <a:p>
-            <a:pPr algn="just" marL="1511301" indent="-503767" lvl="2">
-              <a:lnSpc>
-                <a:spcPts val="4900"/>
-              </a:lnSpc>
-              <a:spcBef>
-                <a:spcPct val="0"/>
-              </a:spcBef>
-              <a:buAutoNum type="alphaLcPeriod" startAt="1"/>
-            </a:pPr>
-            <a:r>
-              <a:rPr lang="en-US" b="true" sz="3500">
-                <a:solidFill>
-                  <a:srgbClr val="17548F"/>
-                </a:solidFill>
-                <a:latin typeface="Faustina Bold"/>
-                <a:ea typeface="Faustina Bold"/>
-                <a:cs typeface="Faustina Bold"/>
-                <a:sym typeface="Faustina Bold"/>
-              </a:rPr>
-              <a:t>T</a:t>
-            </a:r>
-            <a:r>
-              <a:rPr lang="en-US" b="true" sz="3500">
-                <a:solidFill>
-                  <a:srgbClr val="17548F"/>
-                </a:solidFill>
-                <a:latin typeface="Faustina Bold"/>
-                <a:ea typeface="Faustina Bold"/>
-                <a:cs typeface="Faustina Bold"/>
-                <a:sym typeface="Faustina Bold"/>
-              </a:rPr>
-              <a:t>hiết kế và tối ưu kiến trúc U-Net 2D.</a:t>
-            </a:r>
-          </a:p>
-          <a:p>
-            <a:pPr algn="just" marL="1511301" indent="-503767" lvl="2">
-              <a:lnSpc>
-                <a:spcPts val="4900"/>
-              </a:lnSpc>
-              <a:spcBef>
-                <a:spcPct val="0"/>
-              </a:spcBef>
-              <a:buAutoNum type="alphaLcPeriod" startAt="1"/>
-            </a:pPr>
-            <a:r>
-              <a:rPr lang="en-US" b="true" sz="3500">
-                <a:solidFill>
-                  <a:srgbClr val="17548F"/>
-                </a:solidFill>
-                <a:latin typeface="Faustina Bold"/>
-                <a:ea typeface="Faustina Bold"/>
-                <a:cs typeface="Faustina Bold"/>
-                <a:sym typeface="Faustina Bold"/>
-              </a:rPr>
-              <a:t>Đề xuất hàm mất mát kết hợp (Combined Loss) để xử lý mất cân bằng dữ liệu.</a:t>
+              <a:t>huỗi xung: T1, T1ce, T2, FLAIR) của bệnh nhân U thần kinh đệm (Glioma).</a:t>
             </a:r>
           </a:p>
           <a:p>
@@ -10414,7 +11478,79 @@
                 <a:cs typeface="Faustina Bold"/>
                 <a:sym typeface="Faustina Bold"/>
               </a:rPr>
-              <a:t>Yêu cầu kỹ thuật: Độ chính xác (Dice Score) &gt; 0.80; Thời gian xử lý &lt; 30 giây/ca.</a:t>
+              <a:t>Dữ liệu: Bộ</a:t>
+            </a:r>
+            <a:r>
+              <a:rPr lang="en-US" b="true" sz="3500">
+                <a:solidFill>
+                  <a:srgbClr val="17548F"/>
+                </a:solidFill>
+                <a:latin typeface="Faustina Bold"/>
+                <a:ea typeface="Faustina Bold"/>
+                <a:cs typeface="Faustina Bold"/>
+                <a:sym typeface="Faustina Bold"/>
+              </a:rPr>
+              <a:t> dữ liệu chuẩn quốc tế BraTS Challenge (BraTS 2021/2023).</a:t>
+            </a:r>
+          </a:p>
+          <a:p>
+            <a:pPr algn="just" marL="755651" indent="-377825" lvl="1">
+              <a:lnSpc>
+                <a:spcPts val="4900"/>
+              </a:lnSpc>
+              <a:spcBef>
+                <a:spcPct val="0"/>
+              </a:spcBef>
+              <a:buFont typeface="Arial"/>
+              <a:buChar char="•"/>
+            </a:pPr>
+            <a:r>
+              <a:rPr lang="en-US" b="true" sz="3500">
+                <a:solidFill>
+                  <a:srgbClr val="17548F"/>
+                </a:solidFill>
+                <a:latin typeface="Faustina Bold"/>
+                <a:ea typeface="Faustina Bold"/>
+                <a:cs typeface="Faustina Bold"/>
+                <a:sym typeface="Faustina Bold"/>
+              </a:rPr>
+              <a:t>P</a:t>
+            </a:r>
+            <a:r>
+              <a:rPr lang="en-US" b="true" sz="3500">
+                <a:solidFill>
+                  <a:srgbClr val="17548F"/>
+                </a:solidFill>
+                <a:latin typeface="Faustina Bold"/>
+                <a:ea typeface="Faustina Bold"/>
+                <a:cs typeface="Faustina Bold"/>
+                <a:sym typeface="Faustina Bold"/>
+              </a:rPr>
+              <a:t>hạm vi thuật toán: Tập trung vào kiến trúc 2D CNN (U-Net), không nghiên cứu các mô hình 3D phức tạp do giới hạn phần cứng.</a:t>
+            </a:r>
+          </a:p>
+          <a:p>
+            <a:pPr algn="just" marL="755651" indent="-377825" lvl="1">
+              <a:lnSpc>
+                <a:spcPts val="4900"/>
+              </a:lnSpc>
+              <a:spcBef>
+                <a:spcPct val="0"/>
+              </a:spcBef>
+              <a:buFont typeface="Arial"/>
+              <a:buChar char="•"/>
+            </a:pPr>
+            <a:r>
+              <a:rPr lang="en-US" b="true" sz="3500">
+                <a:solidFill>
+                  <a:srgbClr val="17548F"/>
+                </a:solidFill>
+                <a:latin typeface="Faustina Bold"/>
+                <a:ea typeface="Faustina Bold"/>
+                <a:cs typeface="Faustina Bold"/>
+                <a:sym typeface="Faustina Bold"/>
+              </a:rPr>
+              <a:t>Giới hạn: Kết quả dựa trên đánh giá kỹ thuật, chưa thử nghiệm lâm sàng trên bệnh nhân thực tế tại bệnh viện.</a:t>
             </a:r>
           </a:p>
           <a:p>
@@ -10428,6 +11564,52 @@
             </a:pPr>
           </a:p>
         </p:txBody>
+      </p:sp>
+      <p:sp>
+        <p:nvSpPr>
+          <p:cNvPr name="Freeform 9" id="9"/>
+          <p:cNvSpPr/>
+          <p:nvPr/>
+        </p:nvSpPr>
+        <p:spPr>
+          <a:xfrm flipH="false" flipV="false" rot="0">
+            <a:off x="247041" y="263470"/>
+            <a:ext cx="2683548" cy="765230"/>
+          </a:xfrm>
+          <a:custGeom>
+            <a:avLst/>
+            <a:gdLst/>
+            <a:ahLst/>
+            <a:cxnLst/>
+            <a:rect r="r" b="b" t="t" l="l"/>
+            <a:pathLst>
+              <a:path h="765230" w="2683548">
+                <a:moveTo>
+                  <a:pt x="0" y="0"/>
+                </a:moveTo>
+                <a:lnTo>
+                  <a:pt x="2683548" y="0"/>
+                </a:lnTo>
+                <a:lnTo>
+                  <a:pt x="2683548" y="765230"/>
+                </a:lnTo>
+                <a:lnTo>
+                  <a:pt x="0" y="765230"/>
+                </a:lnTo>
+                <a:lnTo>
+                  <a:pt x="0" y="0"/>
+                </a:lnTo>
+                <a:close/>
+              </a:path>
+            </a:pathLst>
+          </a:custGeom>
+          <a:blipFill>
+            <a:blip r:embed="rId10"/>
+            <a:stretch>
+              <a:fillRect l="0" t="0" r="0" b="0"/>
+            </a:stretch>
+          </a:blipFill>
+        </p:spPr>
       </p:sp>
     </p:spTree>
   </p:cSld>
@@ -10521,59 +11703,6 @@
           <p:nvPr/>
         </p:nvSpPr>
         <p:spPr>
-          <a:xfrm flipH="false" flipV="false" rot="0">
-            <a:off x="-1632185" y="-1480712"/>
-            <a:ext cx="3758453" cy="3758453"/>
-          </a:xfrm>
-          <a:custGeom>
-            <a:avLst/>
-            <a:gdLst/>
-            <a:ahLst/>
-            <a:cxnLst/>
-            <a:rect r="r" b="b" t="t" l="l"/>
-            <a:pathLst>
-              <a:path h="3758453" w="3758453">
-                <a:moveTo>
-                  <a:pt x="0" y="0"/>
-                </a:moveTo>
-                <a:lnTo>
-                  <a:pt x="3758453" y="0"/>
-                </a:lnTo>
-                <a:lnTo>
-                  <a:pt x="3758453" y="3758453"/>
-                </a:lnTo>
-                <a:lnTo>
-                  <a:pt x="0" y="3758453"/>
-                </a:lnTo>
-                <a:lnTo>
-                  <a:pt x="0" y="0"/>
-                </a:lnTo>
-                <a:close/>
-              </a:path>
-            </a:pathLst>
-          </a:custGeom>
-          <a:blipFill>
-            <a:blip r:embed="rId2">
-              <a:alphaModFix amt="15000"/>
-              <a:extLst>
-                <a:ext uri="{96DAC541-7B7A-43D3-8B79-37D633B846F1}">
-                  <asvg:svgBlip xmlns:asvg="http://schemas.microsoft.com/office/drawing/2016/SVG/main" r:embed="rId3"/>
-                </a:ext>
-              </a:extLst>
-            </a:blip>
-            <a:stretch>
-              <a:fillRect l="0" t="0" r="0" b="0"/>
-            </a:stretch>
-          </a:blipFill>
-        </p:spPr>
-      </p:sp>
-      <p:sp>
-        <p:nvSpPr>
-          <p:cNvPr name="Freeform 4" id="4"/>
-          <p:cNvSpPr/>
-          <p:nvPr/>
-        </p:nvSpPr>
-        <p:spPr>
           <a:xfrm flipH="false" flipV="true" rot="0">
             <a:off x="-326967" y="7677423"/>
             <a:ext cx="2711333" cy="2862542"/>
@@ -10621,7 +11750,7 @@
       </p:sp>
       <p:sp>
         <p:nvSpPr>
-          <p:cNvPr name="Freeform 5" id="5"/>
+          <p:cNvPr name="Freeform 4" id="4"/>
           <p:cNvSpPr/>
           <p:nvPr/>
         </p:nvSpPr>
@@ -10673,14 +11802,14 @@
       </p:sp>
       <p:sp>
         <p:nvSpPr>
-          <p:cNvPr name="Freeform 6" id="6"/>
+          <p:cNvPr name="Freeform 5" id="5"/>
           <p:cNvSpPr/>
           <p:nvPr/>
         </p:nvSpPr>
         <p:spPr>
           <a:xfrm flipH="false" flipV="true" rot="0">
-            <a:off x="-746708" y="-439976"/>
-            <a:ext cx="3131075" cy="1810331"/>
+            <a:off x="15635604" y="9222587"/>
+            <a:ext cx="2870265" cy="1317378"/>
           </a:xfrm>
           <a:custGeom>
             <a:avLst/>
@@ -10689,21 +11818,21 @@
             <a:cxnLst/>
             <a:rect r="r" b="b" t="t" l="l"/>
             <a:pathLst>
-              <a:path h="1810331" w="3131075">
+              <a:path h="1317378" w="2870265">
                 <a:moveTo>
-                  <a:pt x="0" y="1810331"/>
+                  <a:pt x="0" y="1317378"/>
                 </a:moveTo>
                 <a:lnTo>
-                  <a:pt x="3131075" y="1810331"/>
-                </a:lnTo>
-                <a:lnTo>
-                  <a:pt x="3131075" y="0"/>
-                </a:lnTo>
-                <a:lnTo>
-                  <a:pt x="0" y="0"/>
-                </a:lnTo>
-                <a:lnTo>
-                  <a:pt x="0" y="1810331"/>
+                  <a:pt x="2870265" y="1317378"/>
+                </a:lnTo>
+                <a:lnTo>
+                  <a:pt x="2870265" y="0"/>
+                </a:lnTo>
+                <a:lnTo>
+                  <a:pt x="0" y="0"/>
+                </a:lnTo>
+                <a:lnTo>
+                  <a:pt x="0" y="1317378"/>
                 </a:lnTo>
                 <a:close/>
               </a:path>
@@ -10725,66 +11854,14 @@
       </p:sp>
       <p:sp>
         <p:nvSpPr>
-          <p:cNvPr name="Freeform 7" id="7"/>
-          <p:cNvSpPr/>
-          <p:nvPr/>
-        </p:nvSpPr>
-        <p:spPr>
-          <a:xfrm flipH="false" flipV="true" rot="0">
-            <a:off x="15635604" y="9222587"/>
-            <a:ext cx="2870265" cy="1317378"/>
-          </a:xfrm>
-          <a:custGeom>
-            <a:avLst/>
-            <a:gdLst/>
-            <a:ahLst/>
-            <a:cxnLst/>
-            <a:rect r="r" b="b" t="t" l="l"/>
-            <a:pathLst>
-              <a:path h="1317378" w="2870265">
-                <a:moveTo>
-                  <a:pt x="0" y="1317378"/>
-                </a:moveTo>
-                <a:lnTo>
-                  <a:pt x="2870265" y="1317378"/>
-                </a:lnTo>
-                <a:lnTo>
-                  <a:pt x="2870265" y="0"/>
-                </a:lnTo>
-                <a:lnTo>
-                  <a:pt x="0" y="0"/>
-                </a:lnTo>
-                <a:lnTo>
-                  <a:pt x="0" y="1317378"/>
-                </a:lnTo>
-                <a:close/>
-              </a:path>
-            </a:pathLst>
-          </a:custGeom>
-          <a:blipFill>
-            <a:blip r:embed="rId10">
-              <a:extLst>
-                <a:ext uri="{96DAC541-7B7A-43D3-8B79-37D633B846F1}">
-                  <asvg:svgBlip xmlns:asvg="http://schemas.microsoft.com/office/drawing/2016/SVG/main" r:embed="rId11"/>
-                </a:ext>
-              </a:extLst>
-            </a:blip>
-            <a:stretch>
-              <a:fillRect l="0" t="0" r="0" b="0"/>
-            </a:stretch>
-          </a:blipFill>
-        </p:spPr>
-      </p:sp>
-      <p:sp>
-        <p:nvSpPr>
-          <p:cNvPr name="TextBox 8" id="8"/>
+          <p:cNvPr name="TextBox 6" id="6"/>
           <p:cNvSpPr txBox="true"/>
           <p:nvPr/>
         </p:nvSpPr>
         <p:spPr>
           <a:xfrm rot="0">
-            <a:off x="2586008" y="-133350"/>
-            <a:ext cx="13115985" cy="1193800"/>
+            <a:off x="-359492" y="923925"/>
+            <a:ext cx="19006985" cy="936625"/>
           </a:xfrm>
           <a:prstGeom prst="rect">
             <a:avLst/>
@@ -10798,61 +11875,49 @@
           <a:p>
             <a:pPr algn="ctr">
               <a:lnSpc>
-                <a:spcPts val="9799"/>
+                <a:spcPts val="7699"/>
               </a:lnSpc>
               <a:spcBef>
                 <a:spcPct val="0"/>
               </a:spcBef>
             </a:pPr>
             <a:r>
-              <a:rPr lang="en-US" b="true" sz="6999">
-                <a:solidFill>
-                  <a:srgbClr val="17548F"/>
-                </a:solidFill>
-                <a:latin typeface="Faustina Bold"/>
-                <a:ea typeface="Faustina Bold"/>
-                <a:cs typeface="Faustina Bold"/>
-                <a:sym typeface="Faustina Bold"/>
-              </a:rPr>
-              <a:t>3</a:t>
-            </a:r>
-            <a:r>
-              <a:rPr lang="en-US" b="true" sz="6999">
-                <a:solidFill>
-                  <a:srgbClr val="17548F"/>
-                </a:solidFill>
-                <a:latin typeface="Faustina Bold"/>
-                <a:ea typeface="Faustina Bold"/>
-                <a:cs typeface="Faustina Bold"/>
-                <a:sym typeface="Faustina Bold"/>
-              </a:rPr>
-              <a:t>. Phạm</a:t>
-            </a:r>
-            <a:r>
-              <a:rPr lang="en-US" b="true" sz="6999">
-                <a:solidFill>
-                  <a:srgbClr val="17548F"/>
-                </a:solidFill>
-                <a:latin typeface="Faustina Bold"/>
-                <a:ea typeface="Faustina Bold"/>
-                <a:cs typeface="Faustina Bold"/>
-                <a:sym typeface="Faustina Bold"/>
-              </a:rPr>
-              <a:t> vi và giới hạn đề tài</a:t>
+              <a:rPr lang="en-US" b="true" sz="5499">
+                <a:solidFill>
+                  <a:srgbClr val="17548F"/>
+                </a:solidFill>
+                <a:latin typeface="Faustina Bold"/>
+                <a:ea typeface="Faustina Bold"/>
+                <a:cs typeface="Faustina Bold"/>
+                <a:sym typeface="Faustina Bold"/>
+              </a:rPr>
+              <a:t>4</a:t>
+            </a:r>
+            <a:r>
+              <a:rPr lang="en-US" b="true" sz="5499">
+                <a:solidFill>
+                  <a:srgbClr val="17548F"/>
+                </a:solidFill>
+                <a:latin typeface="Faustina Bold"/>
+                <a:ea typeface="Faustina Bold"/>
+                <a:cs typeface="Faustina Bold"/>
+                <a:sym typeface="Faustina Bold"/>
+              </a:rPr>
+              <a:t>. Tổng quan bài toán &amp; Nghiên cứu liên quan</a:t>
             </a:r>
           </a:p>
         </p:txBody>
       </p:sp>
       <p:sp>
         <p:nvSpPr>
-          <p:cNvPr name="TextBox 9" id="9"/>
+          <p:cNvPr name="TextBox 7" id="7"/>
           <p:cNvSpPr txBox="true"/>
           <p:nvPr/>
         </p:nvSpPr>
         <p:spPr>
           <a:xfrm rot="0">
-            <a:off x="1317307" y="2117998"/>
-            <a:ext cx="15653385" cy="4940300"/>
+            <a:off x="1317307" y="2403192"/>
+            <a:ext cx="15653385" cy="6178550"/>
           </a:xfrm>
           <a:prstGeom prst="rect">
             <a:avLst/>
@@ -10864,12 +11929,13 @@
           </a:bodyPr>
           <a:lstStyle/>
           <a:p>
-            <a:pPr algn="just" marL="755651" indent="-377825" lvl="1">
+            <a:pPr algn="just">
               <a:lnSpc>
                 <a:spcPts val="4900"/>
               </a:lnSpc>
-              <a:buFont typeface="Arial"/>
-              <a:buChar char="•"/>
+              <a:spcBef>
+                <a:spcPct val="0"/>
+              </a:spcBef>
             </a:pPr>
             <a:r>
               <a:rPr lang="en-US" b="true" sz="3500">
@@ -10881,7 +11947,7 @@
                 <a:cs typeface="Faustina Bold"/>
                 <a:sym typeface="Faustina Bold"/>
               </a:rPr>
-              <a:t>Đối</a:t>
+              <a:t>Các</a:t>
             </a:r>
             <a:r>
               <a:rPr lang="en-US" b="true" sz="3500">
@@ -10893,7 +11959,7 @@
                 <a:cs typeface="Faustina Bold"/>
                 <a:sym typeface="Faustina Bold"/>
               </a:rPr>
-              <a:t> tượng nghiên cứu: Ảnh MRI não đa phương thức (4 c</a:t>
+              <a:t> phương pháp truyền thống: Phân ngưỡng (Thresholding), Phát tr</a:t>
             </a:r>
             <a:r>
               <a:rPr lang="en-US" b="true" sz="3500">
@@ -10905,7 +11971,53 @@
                 <a:cs typeface="Faustina Bold"/>
                 <a:sym typeface="Faustina Bold"/>
               </a:rPr>
-              <a:t>huỗi xung: T1, T1ce, T2, FLAIR) của bệnh nhân U thần kinh đệm (Glioma).</a:t>
+              <a:t>iển vùng (Region Growing) → Nhược điểm: Kém chính xác khi ảnh</a:t>
+            </a:r>
+            <a:r>
+              <a:rPr lang="en-US" b="true" sz="3500">
+                <a:solidFill>
+                  <a:srgbClr val="17548F"/>
+                </a:solidFill>
+                <a:latin typeface="Faustina Bold"/>
+                <a:ea typeface="Faustina Bold"/>
+                <a:cs typeface="Faustina Bold"/>
+                <a:sym typeface="Faustina Bold"/>
+              </a:rPr>
+              <a:t> nhiễu, cần can thiệp thủ công nhiều .</a:t>
+            </a:r>
+          </a:p>
+          <a:p>
+            <a:pPr algn="just">
+              <a:lnSpc>
+                <a:spcPts val="4900"/>
+              </a:lnSpc>
+              <a:spcBef>
+                <a:spcPct val="0"/>
+              </a:spcBef>
+            </a:pPr>
+            <a:r>
+              <a:rPr lang="en-US" b="true" sz="3500">
+                <a:solidFill>
+                  <a:srgbClr val="17548F"/>
+                </a:solidFill>
+                <a:latin typeface="Faustina Bold"/>
+                <a:ea typeface="Faustina Bold"/>
+                <a:cs typeface="Faustina Bold"/>
+                <a:sym typeface="Faustina Bold"/>
+              </a:rPr>
+              <a:t>Các</a:t>
+            </a:r>
+            <a:r>
+              <a:rPr lang="en-US" b="true" sz="3500">
+                <a:solidFill>
+                  <a:srgbClr val="17548F"/>
+                </a:solidFill>
+                <a:latin typeface="Faustina Bold"/>
+                <a:ea typeface="Faustina Bold"/>
+                <a:cs typeface="Faustina Bold"/>
+                <a:sym typeface="Faustina Bold"/>
+              </a:rPr>
+              <a:t> phương pháp hiện đại (Deep Learning):</a:t>
             </a:r>
           </a:p>
           <a:p>
@@ -10929,19 +12041,7 @@
                 <a:cs typeface="Faustina Bold"/>
                 <a:sym typeface="Faustina Bold"/>
               </a:rPr>
-              <a:t>Dữ liệu: Bộ</a:t>
-            </a:r>
-            <a:r>
-              <a:rPr lang="en-US" b="true" sz="3500">
-                <a:solidFill>
-                  <a:srgbClr val="17548F"/>
-                </a:solidFill>
-                <a:latin typeface="Faustina Bold"/>
-                <a:ea typeface="Faustina Bold"/>
-                <a:cs typeface="Faustina Bold"/>
-                <a:sym typeface="Faustina Bold"/>
-              </a:rPr>
-              <a:t> dữ liệu chuẩn quốc tế BraTS Challenge (BraTS 2021/2023).</a:t>
+              <a:t>U-Net (2015): Kiến trúc Encoder-Decoder chuẩn mực.</a:t>
             </a:r>
           </a:p>
           <a:p>
@@ -10965,19 +12065,7 @@
                 <a:cs typeface="Faustina Bold"/>
                 <a:sym typeface="Faustina Bold"/>
               </a:rPr>
-              <a:t>P</a:t>
-            </a:r>
-            <a:r>
-              <a:rPr lang="en-US" b="true" sz="3500">
-                <a:solidFill>
-                  <a:srgbClr val="17548F"/>
-                </a:solidFill>
-                <a:latin typeface="Faustina Bold"/>
-                <a:ea typeface="Faustina Bold"/>
-                <a:cs typeface="Faustina Bold"/>
-                <a:sym typeface="Faustina Bold"/>
-              </a:rPr>
-              <a:t>hạm vi thuật toán: Tập trung vào kiến trúc 2D CNN (U-Net), không nghiên cứu các mô hình 3D phức tạp do giới hạn phần cứng.</a:t>
+              <a:t>3D U-Net / Attention U-Net: Độ chính xác cao nhưng tốn tài nguyên tính toán lớn.</a:t>
             </a:r>
           </a:p>
           <a:p>
@@ -11001,7 +12089,7 @@
                 <a:cs typeface="Faustina Bold"/>
                 <a:sym typeface="Faustina Bold"/>
               </a:rPr>
-              <a:t>Giới hạn: Kết quả dựa trên đánh giá kỹ thuật, chưa thử nghiệm lâm sàng trên bệnh nhân thực tế tại bệnh viện.</a:t>
+              <a:t>Lý do cần nghiên cứu mới: Cần một giải pháp "Nhẹ - Nhanh - Chính xác", chạy được trên GPU phổ thông mà vẫn đảm bảo hiệu suất chẩn đoán.</a:t>
             </a:r>
           </a:p>
           <a:p>
@@ -11015,6 +12103,52 @@
             </a:pPr>
           </a:p>
         </p:txBody>
+      </p:sp>
+      <p:sp>
+        <p:nvSpPr>
+          <p:cNvPr name="Freeform 8" id="8"/>
+          <p:cNvSpPr/>
+          <p:nvPr/>
+        </p:nvSpPr>
+        <p:spPr>
+          <a:xfrm flipH="false" flipV="false" rot="0">
+            <a:off x="247041" y="263470"/>
+            <a:ext cx="2683548" cy="765230"/>
+          </a:xfrm>
+          <a:custGeom>
+            <a:avLst/>
+            <a:gdLst/>
+            <a:ahLst/>
+            <a:cxnLst/>
+            <a:rect r="r" b="b" t="t" l="l"/>
+            <a:pathLst>
+              <a:path h="765230" w="2683548">
+                <a:moveTo>
+                  <a:pt x="0" y="0"/>
+                </a:moveTo>
+                <a:lnTo>
+                  <a:pt x="2683548" y="0"/>
+                </a:lnTo>
+                <a:lnTo>
+                  <a:pt x="2683548" y="765230"/>
+                </a:lnTo>
+                <a:lnTo>
+                  <a:pt x="0" y="765230"/>
+                </a:lnTo>
+                <a:lnTo>
+                  <a:pt x="0" y="0"/>
+                </a:lnTo>
+                <a:close/>
+              </a:path>
+            </a:pathLst>
+          </a:custGeom>
+          <a:blipFill>
+            <a:blip r:embed="rId10"/>
+            <a:stretch>
+              <a:fillRect l="0" t="0" r="0" b="0"/>
+            </a:stretch>
+          </a:blipFill>
+        </p:spPr>
       </p:sp>
     </p:spTree>
   </p:cSld>
@@ -11108,59 +12242,6 @@
           <p:nvPr/>
         </p:nvSpPr>
         <p:spPr>
-          <a:xfrm flipH="false" flipV="false" rot="0">
-            <a:off x="-1632185" y="-1480712"/>
-            <a:ext cx="3758453" cy="3758453"/>
-          </a:xfrm>
-          <a:custGeom>
-            <a:avLst/>
-            <a:gdLst/>
-            <a:ahLst/>
-            <a:cxnLst/>
-            <a:rect r="r" b="b" t="t" l="l"/>
-            <a:pathLst>
-              <a:path h="3758453" w="3758453">
-                <a:moveTo>
-                  <a:pt x="0" y="0"/>
-                </a:moveTo>
-                <a:lnTo>
-                  <a:pt x="3758453" y="0"/>
-                </a:lnTo>
-                <a:lnTo>
-                  <a:pt x="3758453" y="3758453"/>
-                </a:lnTo>
-                <a:lnTo>
-                  <a:pt x="0" y="3758453"/>
-                </a:lnTo>
-                <a:lnTo>
-                  <a:pt x="0" y="0"/>
-                </a:lnTo>
-                <a:close/>
-              </a:path>
-            </a:pathLst>
-          </a:custGeom>
-          <a:blipFill>
-            <a:blip r:embed="rId2">
-              <a:alphaModFix amt="15000"/>
-              <a:extLst>
-                <a:ext uri="{96DAC541-7B7A-43D3-8B79-37D633B846F1}">
-                  <asvg:svgBlip xmlns:asvg="http://schemas.microsoft.com/office/drawing/2016/SVG/main" r:embed="rId3"/>
-                </a:ext>
-              </a:extLst>
-            </a:blip>
-            <a:stretch>
-              <a:fillRect l="0" t="0" r="0" b="0"/>
-            </a:stretch>
-          </a:blipFill>
-        </p:spPr>
-      </p:sp>
-      <p:sp>
-        <p:nvSpPr>
-          <p:cNvPr name="Freeform 4" id="4"/>
-          <p:cNvSpPr/>
-          <p:nvPr/>
-        </p:nvSpPr>
-        <p:spPr>
           <a:xfrm flipH="false" flipV="true" rot="0">
             <a:off x="-326967" y="7677423"/>
             <a:ext cx="2711333" cy="2862542"/>
@@ -11208,7 +12289,7 @@
       </p:sp>
       <p:sp>
         <p:nvSpPr>
-          <p:cNvPr name="Freeform 5" id="5"/>
+          <p:cNvPr name="Freeform 4" id="4"/>
           <p:cNvSpPr/>
           <p:nvPr/>
         </p:nvSpPr>
@@ -11260,14 +12341,14 @@
       </p:sp>
       <p:sp>
         <p:nvSpPr>
-          <p:cNvPr name="Freeform 6" id="6"/>
+          <p:cNvPr name="Freeform 5" id="5"/>
           <p:cNvSpPr/>
           <p:nvPr/>
         </p:nvSpPr>
         <p:spPr>
           <a:xfrm flipH="false" flipV="true" rot="0">
-            <a:off x="-746708" y="-439976"/>
-            <a:ext cx="3131075" cy="1810331"/>
+            <a:off x="15635604" y="9222587"/>
+            <a:ext cx="2870265" cy="1317378"/>
           </a:xfrm>
           <a:custGeom>
             <a:avLst/>
@@ -11276,21 +12357,21 @@
             <a:cxnLst/>
             <a:rect r="r" b="b" t="t" l="l"/>
             <a:pathLst>
-              <a:path h="1810331" w="3131075">
+              <a:path h="1317378" w="2870265">
                 <a:moveTo>
-                  <a:pt x="0" y="1810331"/>
+                  <a:pt x="0" y="1317378"/>
                 </a:moveTo>
                 <a:lnTo>
-                  <a:pt x="3131075" y="1810331"/>
-                </a:lnTo>
-                <a:lnTo>
-                  <a:pt x="3131075" y="0"/>
-                </a:lnTo>
-                <a:lnTo>
-                  <a:pt x="0" y="0"/>
-                </a:lnTo>
-                <a:lnTo>
-                  <a:pt x="0" y="1810331"/>
+                  <a:pt x="2870265" y="1317378"/>
+                </a:lnTo>
+                <a:lnTo>
+                  <a:pt x="2870265" y="0"/>
+                </a:lnTo>
+                <a:lnTo>
+                  <a:pt x="0" y="0"/>
+                </a:lnTo>
+                <a:lnTo>
+                  <a:pt x="0" y="1317378"/>
                 </a:lnTo>
                 <a:close/>
               </a:path>
@@ -11312,14 +12393,14 @@
       </p:sp>
       <p:sp>
         <p:nvSpPr>
-          <p:cNvPr name="Freeform 7" id="7"/>
+          <p:cNvPr name="Freeform 6" id="6"/>
           <p:cNvSpPr/>
           <p:nvPr/>
         </p:nvSpPr>
         <p:spPr>
-          <a:xfrm flipH="false" flipV="true" rot="0">
-            <a:off x="15635604" y="9222587"/>
-            <a:ext cx="2870265" cy="1317378"/>
+          <a:xfrm flipH="false" flipV="false" rot="0">
+            <a:off x="247041" y="263470"/>
+            <a:ext cx="2683548" cy="765230"/>
           </a:xfrm>
           <a:custGeom>
             <a:avLst/>
@@ -11328,34 +12409,28 @@
             <a:cxnLst/>
             <a:rect r="r" b="b" t="t" l="l"/>
             <a:pathLst>
-              <a:path h="1317378" w="2870265">
+              <a:path h="765230" w="2683548">
                 <a:moveTo>
-                  <a:pt x="0" y="1317378"/>
+                  <a:pt x="0" y="0"/>
                 </a:moveTo>
                 <a:lnTo>
-                  <a:pt x="2870265" y="1317378"/>
-                </a:lnTo>
-                <a:lnTo>
-                  <a:pt x="2870265" y="0"/>
-                </a:lnTo>
-                <a:lnTo>
-                  <a:pt x="0" y="0"/>
-                </a:lnTo>
-                <a:lnTo>
-                  <a:pt x="0" y="1317378"/>
+                  <a:pt x="2683548" y="0"/>
+                </a:lnTo>
+                <a:lnTo>
+                  <a:pt x="2683548" y="765230"/>
+                </a:lnTo>
+                <a:lnTo>
+                  <a:pt x="0" y="765230"/>
+                </a:lnTo>
+                <a:lnTo>
+                  <a:pt x="0" y="0"/>
                 </a:lnTo>
                 <a:close/>
               </a:path>
             </a:pathLst>
           </a:custGeom>
           <a:blipFill>
-            <a:blip r:embed="rId10">
-              <a:extLst>
-                <a:ext uri="{96DAC541-7B7A-43D3-8B79-37D633B846F1}">
-                  <asvg:svgBlip xmlns:asvg="http://schemas.microsoft.com/office/drawing/2016/SVG/main" r:embed="rId11"/>
-                </a:ext>
-              </a:extLst>
-            </a:blip>
+            <a:blip r:embed="rId10"/>
             <a:stretch>
               <a:fillRect l="0" t="0" r="0" b="0"/>
             </a:stretch>
@@ -11364,14 +12439,60 @@
       </p:sp>
       <p:sp>
         <p:nvSpPr>
+          <p:cNvPr name="Freeform 7" id="7"/>
+          <p:cNvSpPr/>
+          <p:nvPr/>
+        </p:nvSpPr>
+        <p:spPr>
+          <a:xfrm flipH="false" flipV="false" rot="0">
+            <a:off x="9368248" y="1343577"/>
+            <a:ext cx="8688388" cy="7996937"/>
+          </a:xfrm>
+          <a:custGeom>
+            <a:avLst/>
+            <a:gdLst/>
+            <a:ahLst/>
+            <a:cxnLst/>
+            <a:rect r="r" b="b" t="t" l="l"/>
+            <a:pathLst>
+              <a:path h="7996937" w="8688388">
+                <a:moveTo>
+                  <a:pt x="0" y="0"/>
+                </a:moveTo>
+                <a:lnTo>
+                  <a:pt x="8688389" y="0"/>
+                </a:lnTo>
+                <a:lnTo>
+                  <a:pt x="8688389" y="7996937"/>
+                </a:lnTo>
+                <a:lnTo>
+                  <a:pt x="0" y="7996937"/>
+                </a:lnTo>
+                <a:lnTo>
+                  <a:pt x="0" y="0"/>
+                </a:lnTo>
+                <a:close/>
+              </a:path>
+            </a:pathLst>
+          </a:custGeom>
+          <a:blipFill>
+            <a:blip r:embed="rId11"/>
+            <a:stretch>
+              <a:fillRect l="0" t="0" r="0" b="0"/>
+            </a:stretch>
+          </a:blipFill>
+        </p:spPr>
+      </p:sp>
+      <p:sp>
+        <p:nvSpPr>
           <p:cNvPr name="TextBox 8" id="8"/>
           <p:cNvSpPr txBox="true"/>
           <p:nvPr/>
         </p:nvSpPr>
         <p:spPr>
           <a:xfrm rot="0">
-            <a:off x="-359492" y="-133350"/>
-            <a:ext cx="19006985" cy="1193800"/>
+            <a:off x="-359492" y="165101"/>
+            <a:ext cx="19006985" cy="936625"/>
           </a:xfrm>
           <a:prstGeom prst="rect">
             <a:avLst/>
@@ -11385,35 +12506,23 @@
           <a:p>
             <a:pPr algn="ctr">
               <a:lnSpc>
-                <a:spcPts val="9799"/>
+                <a:spcPts val="7699"/>
               </a:lnSpc>
               <a:spcBef>
                 <a:spcPct val="0"/>
               </a:spcBef>
             </a:pPr>
             <a:r>
-              <a:rPr lang="en-US" b="true" sz="6999">
-                <a:solidFill>
-                  <a:srgbClr val="17548F"/>
-                </a:solidFill>
-                <a:latin typeface="Faustina Bold"/>
-                <a:ea typeface="Faustina Bold"/>
-                <a:cs typeface="Faustina Bold"/>
-                <a:sym typeface="Faustina Bold"/>
-              </a:rPr>
-              <a:t>4</a:t>
-            </a:r>
-            <a:r>
-              <a:rPr lang="en-US" b="true" sz="6999">
-                <a:solidFill>
-                  <a:srgbClr val="17548F"/>
-                </a:solidFill>
-                <a:latin typeface="Faustina Bold"/>
-                <a:ea typeface="Faustina Bold"/>
-                <a:cs typeface="Faustina Bold"/>
-                <a:sym typeface="Faustina Bold"/>
-              </a:rPr>
-              <a:t>. Tổng quan bài toán &amp; Nghiên cứu liên quan</a:t>
+              <a:rPr lang="en-US" b="true" sz="5499">
+                <a:solidFill>
+                  <a:srgbClr val="17548F"/>
+                </a:solidFill>
+                <a:latin typeface="Faustina Bold"/>
+                <a:ea typeface="Faustina Bold"/>
+                <a:cs typeface="Faustina Bold"/>
+                <a:sym typeface="Faustina Bold"/>
+              </a:rPr>
+              <a:t>5 . Cơ sở lý thuyết</a:t>
             </a:r>
           </a:p>
         </p:txBody>
@@ -11426,8 +12535,8 @@
         </p:nvSpPr>
         <p:spPr>
           <a:xfrm rot="0">
-            <a:off x="1317307" y="2117998"/>
-            <a:ext cx="15653385" cy="6178550"/>
+            <a:off x="456431" y="1397000"/>
+            <a:ext cx="8687569" cy="8299450"/>
           </a:xfrm>
           <a:prstGeom prst="rect">
             <a:avLst/>
@@ -11439,177 +12548,278 @@
           </a:bodyPr>
           <a:lstStyle/>
           <a:p>
-            <a:pPr algn="just" marL="755651" indent="-377825" lvl="1">
+            <a:pPr algn="just">
               <a:lnSpc>
-                <a:spcPts val="4900"/>
+                <a:spcPts val="3499"/>
               </a:lnSpc>
-              <a:spcBef>
-                <a:spcPct val="0"/>
-              </a:spcBef>
+            </a:pPr>
+            <a:r>
+              <a:rPr lang="en-US" sz="2499" b="true">
+                <a:solidFill>
+                  <a:srgbClr val="17548F"/>
+                </a:solidFill>
+                <a:latin typeface="Faustina Bold"/>
+                <a:ea typeface="Faustina Bold"/>
+                <a:cs typeface="Faustina Bold"/>
+                <a:sym typeface="Faustina Bold"/>
+              </a:rPr>
+              <a:t>Đặc điểm các kênh MRI trong phân vùng u não:</a:t>
+            </a:r>
+          </a:p>
+          <a:p>
+            <a:pPr algn="just" marL="539749" indent="-269875" lvl="1">
+              <a:lnSpc>
+                <a:spcPts val="3499"/>
+              </a:lnSpc>
               <a:buFont typeface="Arial"/>
               <a:buChar char="•"/>
             </a:pPr>
             <a:r>
-              <a:rPr lang="en-US" b="true" sz="3500">
-                <a:solidFill>
-                  <a:srgbClr val="17548F"/>
-                </a:solidFill>
-                <a:latin typeface="Faustina Bold"/>
-                <a:ea typeface="Faustina Bold"/>
-                <a:cs typeface="Faustina Bold"/>
-                <a:sym typeface="Faustina Bold"/>
-              </a:rPr>
-              <a:t>Các</a:t>
-            </a:r>
-            <a:r>
-              <a:rPr lang="en-US" b="true" sz="3500">
-                <a:solidFill>
-                  <a:srgbClr val="17548F"/>
-                </a:solidFill>
-                <a:latin typeface="Faustina Bold"/>
-                <a:ea typeface="Faustina Bold"/>
-                <a:cs typeface="Faustina Bold"/>
-                <a:sym typeface="Faustina Bold"/>
-              </a:rPr>
-              <a:t> phương pháp truyền thống: Phân ngưỡng (Thresholding), Phát tr</a:t>
-            </a:r>
-            <a:r>
-              <a:rPr lang="en-US" b="true" sz="3500">
-                <a:solidFill>
-                  <a:srgbClr val="17548F"/>
-                </a:solidFill>
-                <a:latin typeface="Faustina Bold"/>
-                <a:ea typeface="Faustina Bold"/>
-                <a:cs typeface="Faustina Bold"/>
-                <a:sym typeface="Faustina Bold"/>
-              </a:rPr>
-              <a:t>iển vùng (Region Growing) → Nhược điểm: Kém chính xác khi ảnh</a:t>
-            </a:r>
-            <a:r>
-              <a:rPr lang="en-US" b="true" sz="3500">
-                <a:solidFill>
-                  <a:srgbClr val="17548F"/>
-                </a:solidFill>
-                <a:latin typeface="Faustina Bold"/>
-                <a:ea typeface="Faustina Bold"/>
-                <a:cs typeface="Faustina Bold"/>
-                <a:sym typeface="Faustina Bold"/>
-              </a:rPr>
-              <a:t> nhiễu, cần can thiệp thủ công nhiều .</a:t>
-            </a:r>
-          </a:p>
-          <a:p>
-            <a:pPr algn="just" marL="755651" indent="-377825" lvl="1">
+              <a:rPr lang="en-US" b="true" sz="2499">
+                <a:solidFill>
+                  <a:srgbClr val="17548F"/>
+                </a:solidFill>
+                <a:latin typeface="Faustina Bold"/>
+                <a:ea typeface="Faustina Bold"/>
+                <a:cs typeface="Faustina Bold"/>
+                <a:sym typeface="Faustina Bold"/>
+              </a:rPr>
+              <a:t>T1: Ảnh trọng số T1, hiển thị tốt cấu trúc giải phẫu. CSF tối.</a:t>
+            </a:r>
+          </a:p>
+          <a:p>
+            <a:pPr algn="just" marL="539749" indent="-269875" lvl="1">
               <a:lnSpc>
-                <a:spcPts val="4900"/>
+                <a:spcPts val="3499"/>
               </a:lnSpc>
-              <a:spcBef>
-                <a:spcPct val="0"/>
-              </a:spcBef>
               <a:buFont typeface="Arial"/>
               <a:buChar char="•"/>
             </a:pPr>
             <a:r>
-              <a:rPr lang="en-US" b="true" sz="3500">
-                <a:solidFill>
-                  <a:srgbClr val="17548F"/>
-                </a:solidFill>
-                <a:latin typeface="Faustina Bold"/>
-                <a:ea typeface="Faustina Bold"/>
-                <a:cs typeface="Faustina Bold"/>
-                <a:sym typeface="Faustina Bold"/>
-              </a:rPr>
-              <a:t>Các</a:t>
-            </a:r>
-            <a:r>
-              <a:rPr lang="en-US" b="true" sz="3500">
-                <a:solidFill>
-                  <a:srgbClr val="17548F"/>
-                </a:solidFill>
-                <a:latin typeface="Faustina Bold"/>
-                <a:ea typeface="Faustina Bold"/>
-                <a:cs typeface="Faustina Bold"/>
-                <a:sym typeface="Faustina Bold"/>
-              </a:rPr>
-              <a:t> phương pháp hiện đại (Deep Learning):</a:t>
-            </a:r>
-          </a:p>
-          <a:p>
-            <a:pPr algn="just" marL="755651" indent="-377825" lvl="1">
+              <a:rPr lang="en-US" b="true" sz="2499">
+                <a:solidFill>
+                  <a:srgbClr val="17548F"/>
+                </a:solidFill>
+                <a:latin typeface="Faustina Bold"/>
+                <a:ea typeface="Faustina Bold"/>
+                <a:cs typeface="Faustina Bold"/>
+                <a:sym typeface="Faustina Bold"/>
+              </a:rPr>
+              <a:t>T2: Ảnh trọng số T2, nhạy với nước. Phù nề và dịch → sáng.</a:t>
+            </a:r>
+          </a:p>
+          <a:p>
+            <a:pPr algn="just" marL="539749" indent="-269875" lvl="1">
               <a:lnSpc>
-                <a:spcPts val="4900"/>
+                <a:spcPts val="3499"/>
               </a:lnSpc>
-              <a:spcBef>
-                <a:spcPct val="0"/>
-              </a:spcBef>
               <a:buFont typeface="Arial"/>
               <a:buChar char="•"/>
             </a:pPr>
             <a:r>
-              <a:rPr lang="en-US" b="true" sz="3500">
-                <a:solidFill>
-                  <a:srgbClr val="17548F"/>
-                </a:solidFill>
-                <a:latin typeface="Faustina Bold"/>
-                <a:ea typeface="Faustina Bold"/>
-                <a:cs typeface="Faustina Bold"/>
-                <a:sym typeface="Faustina Bold"/>
-              </a:rPr>
-              <a:t>U-Net (2015): Kiến trúc Encoder-Decoder chuẩn mực.</a:t>
-            </a:r>
-          </a:p>
-          <a:p>
-            <a:pPr algn="just" marL="755651" indent="-377825" lvl="1">
+              <a:rPr lang="en-US" b="true" sz="2499">
+                <a:solidFill>
+                  <a:srgbClr val="17548F"/>
+                </a:solidFill>
+                <a:latin typeface="Faustina Bold"/>
+                <a:ea typeface="Faustina Bold"/>
+                <a:cs typeface="Faustina Bold"/>
+                <a:sym typeface="Faustina Bold"/>
+              </a:rPr>
+              <a:t>T1ce: T1 có tiêm chất tương phản. Làm nổi bật vùng u tăng bắt thuốc (ET).</a:t>
+            </a:r>
+          </a:p>
+          <a:p>
+            <a:pPr algn="just" marL="539749" indent="-269875" lvl="1">
               <a:lnSpc>
-                <a:spcPts val="4900"/>
+                <a:spcPts val="3499"/>
               </a:lnSpc>
-              <a:spcBef>
-                <a:spcPct val="0"/>
-              </a:spcBef>
               <a:buFont typeface="Arial"/>
               <a:buChar char="•"/>
             </a:pPr>
             <a:r>
-              <a:rPr lang="en-US" b="true" sz="3500">
-                <a:solidFill>
-                  <a:srgbClr val="17548F"/>
-                </a:solidFill>
-                <a:latin typeface="Faustina Bold"/>
-                <a:ea typeface="Faustina Bold"/>
-                <a:cs typeface="Faustina Bold"/>
-                <a:sym typeface="Faustina Bold"/>
-              </a:rPr>
-              <a:t>3D U-Net / Attention U-Net: Độ chính xác cao nhưng tốn tài nguyên tính toán lớn.</a:t>
-            </a:r>
-          </a:p>
-          <a:p>
-            <a:pPr algn="just" marL="755651" indent="-377825" lvl="1">
+              <a:rPr lang="en-US" b="true" sz="2499">
+                <a:solidFill>
+                  <a:srgbClr val="17548F"/>
+                </a:solidFill>
+                <a:latin typeface="Faustina Bold"/>
+                <a:ea typeface="Faustina Bold"/>
+                <a:cs typeface="Faustina Bold"/>
+                <a:sym typeface="Faustina Bold"/>
+              </a:rPr>
+              <a:t>FLAIR: Ảnh T2 loại bỏ tín hiệu CSF. Dễ thấy phù quanh u (ED).</a:t>
+            </a:r>
+          </a:p>
+          <a:p>
+            <a:pPr algn="just">
               <a:lnSpc>
-                <a:spcPts val="4900"/>
+                <a:spcPts val="3499"/>
               </a:lnSpc>
-              <a:spcBef>
-                <a:spcPct val="0"/>
-              </a:spcBef>
+            </a:pPr>
+            <a:r>
+              <a:rPr lang="en-US" sz="2499" b="true">
+                <a:solidFill>
+                  <a:srgbClr val="17548F"/>
+                </a:solidFill>
+                <a:latin typeface="Faustina Bold"/>
+                <a:ea typeface="Faustina Bold"/>
+                <a:cs typeface="Faustina Bold"/>
+                <a:sym typeface="Faustina Bold"/>
+              </a:rPr>
+              <a:t>U-Net – mô hình kinh điển cho phân vùng y sinh:</a:t>
+            </a:r>
+          </a:p>
+          <a:p>
+            <a:pPr algn="just" marL="539749" indent="-269875" lvl="1">
+              <a:lnSpc>
+                <a:spcPts val="3499"/>
+              </a:lnSpc>
               <a:buFont typeface="Arial"/>
               <a:buChar char="•"/>
             </a:pPr>
             <a:r>
-              <a:rPr lang="en-US" b="true" sz="3500">
-                <a:solidFill>
-                  <a:srgbClr val="17548F"/>
-                </a:solidFill>
-                <a:latin typeface="Faustina Bold"/>
-                <a:ea typeface="Faustina Bold"/>
-                <a:cs typeface="Faustina Bold"/>
-                <a:sym typeface="Faustina Bold"/>
-              </a:rPr>
-              <a:t>Lý do cần nghiên cứu mới: Cần một giải pháp "Nhẹ - Nhanh - Chính xác", chạy được trên GPU phổ thông mà vẫn đảm bảo hiệu suất chẩn đoán.</a:t>
+              <a:rPr lang="en-US" b="true" sz="2499">
+                <a:solidFill>
+                  <a:srgbClr val="17548F"/>
+                </a:solidFill>
+                <a:latin typeface="Faustina Bold"/>
+                <a:ea typeface="Faustina Bold"/>
+                <a:cs typeface="Faustina Bold"/>
+                <a:sym typeface="Faustina Bold"/>
+              </a:rPr>
+              <a:t>Cấu trúc hình chữ U đối xứng gồm:</a:t>
+            </a:r>
+          </a:p>
+          <a:p>
+            <a:pPr algn="just" marL="1079499" indent="-359833" lvl="2">
+              <a:lnSpc>
+                <a:spcPts val="3499"/>
+              </a:lnSpc>
+              <a:buFont typeface="Arial"/>
+              <a:buChar char="⚬"/>
+            </a:pPr>
+            <a:r>
+              <a:rPr lang="en-US" b="true" sz="2499">
+                <a:solidFill>
+                  <a:srgbClr val="17548F"/>
+                </a:solidFill>
+                <a:latin typeface="Faustina Bold"/>
+                <a:ea typeface="Faustina Bold"/>
+                <a:cs typeface="Faustina Bold"/>
+                <a:sym typeface="Faustina Bold"/>
+              </a:rPr>
+              <a:t>Encoder: Trích xuất đặc trưng, giảm kích thước ảnh.</a:t>
+            </a:r>
+          </a:p>
+          <a:p>
+            <a:pPr algn="just" marL="1079499" indent="-359833" lvl="2">
+              <a:lnSpc>
+                <a:spcPts val="3499"/>
+              </a:lnSpc>
+              <a:buFont typeface="Arial"/>
+              <a:buChar char="⚬"/>
+            </a:pPr>
+            <a:r>
+              <a:rPr lang="en-US" b="true" sz="2499">
+                <a:solidFill>
+                  <a:srgbClr val="17548F"/>
+                </a:solidFill>
+                <a:latin typeface="Faustina Bold"/>
+                <a:ea typeface="Faustina Bold"/>
+                <a:cs typeface="Faustina Bold"/>
+                <a:sym typeface="Faustina Bold"/>
+              </a:rPr>
+              <a:t>Decoder: Khôi phục kích thước để tạo bản đồ phân vùng.</a:t>
+            </a:r>
+          </a:p>
+          <a:p>
+            <a:pPr algn="just" marL="539749" indent="-269875" lvl="1">
+              <a:lnSpc>
+                <a:spcPts val="3499"/>
+              </a:lnSpc>
+              <a:buFont typeface="Arial"/>
+              <a:buChar char="•"/>
+            </a:pPr>
+            <a:r>
+              <a:rPr lang="en-US" b="true" sz="2499">
+                <a:solidFill>
+                  <a:srgbClr val="17548F"/>
+                </a:solidFill>
+                <a:latin typeface="Faustina Bold"/>
+                <a:ea typeface="Faustina Bold"/>
+                <a:cs typeface="Faustina Bold"/>
+                <a:sym typeface="Faustina Bold"/>
+              </a:rPr>
+              <a:t>Skip Connections:</a:t>
+            </a:r>
+          </a:p>
+          <a:p>
+            <a:pPr algn="just" marL="1079499" indent="-359833" lvl="2">
+              <a:lnSpc>
+                <a:spcPts val="3499"/>
+              </a:lnSpc>
+              <a:buFont typeface="Arial"/>
+              <a:buChar char="⚬"/>
+            </a:pPr>
+            <a:r>
+              <a:rPr lang="en-US" b="true" sz="2499">
+                <a:solidFill>
+                  <a:srgbClr val="17548F"/>
+                </a:solidFill>
+                <a:latin typeface="Faustina Bold"/>
+                <a:ea typeface="Faustina Bold"/>
+                <a:cs typeface="Faustina Bold"/>
+                <a:sym typeface="Faustina Bold"/>
+              </a:rPr>
+              <a:t>Truyền trực tiếp thông tin không gian từ Encoder sang Decoder.</a:t>
+            </a:r>
+          </a:p>
+          <a:p>
+            <a:pPr algn="just" marL="1079499" indent="-359833" lvl="2">
+              <a:lnSpc>
+                <a:spcPts val="3499"/>
+              </a:lnSpc>
+              <a:buFont typeface="Arial"/>
+              <a:buChar char="⚬"/>
+            </a:pPr>
+            <a:r>
+              <a:rPr lang="en-US" b="true" sz="2499">
+                <a:solidFill>
+                  <a:srgbClr val="17548F"/>
+                </a:solidFill>
+                <a:latin typeface="Faustina Bold"/>
+                <a:ea typeface="Faustina Bold"/>
+                <a:cs typeface="Faustina Bold"/>
+                <a:sym typeface="Faustina Bold"/>
+              </a:rPr>
+              <a:t>Giúp mô hình giữ biên tốt, tái tạo chi tiết chính xác.</a:t>
+            </a:r>
+          </a:p>
+          <a:p>
+            <a:pPr algn="just" marL="539749" indent="-269875" lvl="1">
+              <a:lnSpc>
+                <a:spcPts val="3499"/>
+              </a:lnSpc>
+              <a:buFont typeface="Arial"/>
+              <a:buChar char="•"/>
+            </a:pPr>
+            <a:r>
+              <a:rPr lang="en-US" b="true" sz="2499">
+                <a:solidFill>
+                  <a:srgbClr val="17548F"/>
+                </a:solidFill>
+                <a:latin typeface="Faustina Bold"/>
+                <a:ea typeface="Faustina Bold"/>
+                <a:cs typeface="Faustina Bold"/>
+                <a:sym typeface="Faustina Bold"/>
+              </a:rPr>
+              <a:t>Ưu điểm: Hiệu quả cao trong phân vùng ảnh y tế – đặc biệt với cấu trúc phức tạp như khối u não.</a:t>
             </a:r>
           </a:p>
           <a:p>
             <a:pPr algn="just">
               <a:lnSpc>
-                <a:spcPts val="4900"/>
+                <a:spcPts val="3499"/>
               </a:lnSpc>
               <a:spcBef>
                 <a:spcPct val="0"/>
@@ -11710,59 +12920,6 @@
           <p:nvPr/>
         </p:nvSpPr>
         <p:spPr>
-          <a:xfrm flipH="false" flipV="false" rot="0">
-            <a:off x="-1632185" y="-1480712"/>
-            <a:ext cx="3758453" cy="3758453"/>
-          </a:xfrm>
-          <a:custGeom>
-            <a:avLst/>
-            <a:gdLst/>
-            <a:ahLst/>
-            <a:cxnLst/>
-            <a:rect r="r" b="b" t="t" l="l"/>
-            <a:pathLst>
-              <a:path h="3758453" w="3758453">
-                <a:moveTo>
-                  <a:pt x="0" y="0"/>
-                </a:moveTo>
-                <a:lnTo>
-                  <a:pt x="3758453" y="0"/>
-                </a:lnTo>
-                <a:lnTo>
-                  <a:pt x="3758453" y="3758453"/>
-                </a:lnTo>
-                <a:lnTo>
-                  <a:pt x="0" y="3758453"/>
-                </a:lnTo>
-                <a:lnTo>
-                  <a:pt x="0" y="0"/>
-                </a:lnTo>
-                <a:close/>
-              </a:path>
-            </a:pathLst>
-          </a:custGeom>
-          <a:blipFill>
-            <a:blip r:embed="rId2">
-              <a:alphaModFix amt="15000"/>
-              <a:extLst>
-                <a:ext uri="{96DAC541-7B7A-43D3-8B79-37D633B846F1}">
-                  <asvg:svgBlip xmlns:asvg="http://schemas.microsoft.com/office/drawing/2016/SVG/main" r:embed="rId3"/>
-                </a:ext>
-              </a:extLst>
-            </a:blip>
-            <a:stretch>
-              <a:fillRect l="0" t="0" r="0" b="0"/>
-            </a:stretch>
-          </a:blipFill>
-        </p:spPr>
-      </p:sp>
-      <p:sp>
-        <p:nvSpPr>
-          <p:cNvPr name="Freeform 4" id="4"/>
-          <p:cNvSpPr/>
-          <p:nvPr/>
-        </p:nvSpPr>
-        <p:spPr>
           <a:xfrm flipH="false" flipV="true" rot="0">
             <a:off x="-326967" y="7677423"/>
             <a:ext cx="2711333" cy="2862542"/>
@@ -11810,7 +12967,7 @@
       </p:sp>
       <p:sp>
         <p:nvSpPr>
-          <p:cNvPr name="Freeform 5" id="5"/>
+          <p:cNvPr name="Freeform 4" id="4"/>
           <p:cNvSpPr/>
           <p:nvPr/>
         </p:nvSpPr>
@@ -11862,14 +13019,14 @@
       </p:sp>
       <p:sp>
         <p:nvSpPr>
-          <p:cNvPr name="Freeform 6" id="6"/>
+          <p:cNvPr name="Freeform 5" id="5"/>
           <p:cNvSpPr/>
           <p:nvPr/>
         </p:nvSpPr>
         <p:spPr>
           <a:xfrm flipH="false" flipV="true" rot="0">
-            <a:off x="-2306842" y="-595260"/>
-            <a:ext cx="3131075" cy="1810331"/>
+            <a:off x="15635604" y="9222587"/>
+            <a:ext cx="2870265" cy="1317378"/>
           </a:xfrm>
           <a:custGeom>
             <a:avLst/>
@@ -11878,21 +13035,21 @@
             <a:cxnLst/>
             <a:rect r="r" b="b" t="t" l="l"/>
             <a:pathLst>
-              <a:path h="1810331" w="3131075">
+              <a:path h="1317378" w="2870265">
                 <a:moveTo>
-                  <a:pt x="0" y="1810330"/>
+                  <a:pt x="0" y="1317378"/>
                 </a:moveTo>
                 <a:lnTo>
-                  <a:pt x="3131075" y="1810330"/>
-                </a:lnTo>
-                <a:lnTo>
-                  <a:pt x="3131075" y="0"/>
-                </a:lnTo>
-                <a:lnTo>
-                  <a:pt x="0" y="0"/>
-                </a:lnTo>
-                <a:lnTo>
-                  <a:pt x="0" y="1810330"/>
+                  <a:pt x="2870265" y="1317378"/>
+                </a:lnTo>
+                <a:lnTo>
+                  <a:pt x="2870265" y="0"/>
+                </a:lnTo>
+                <a:lnTo>
+                  <a:pt x="0" y="0"/>
+                </a:lnTo>
+                <a:lnTo>
+                  <a:pt x="0" y="1317378"/>
                 </a:lnTo>
                 <a:close/>
               </a:path>
@@ -11914,14 +13071,14 @@
       </p:sp>
       <p:sp>
         <p:nvSpPr>
-          <p:cNvPr name="Freeform 7" id="7"/>
+          <p:cNvPr name="Freeform 6" id="6"/>
           <p:cNvSpPr/>
           <p:nvPr/>
         </p:nvSpPr>
         <p:spPr>
-          <a:xfrm flipH="false" flipV="true" rot="0">
-            <a:off x="15635604" y="9222587"/>
-            <a:ext cx="2870265" cy="1317378"/>
+          <a:xfrm flipH="false" flipV="false" rot="0">
+            <a:off x="247041" y="263470"/>
+            <a:ext cx="2683548" cy="765230"/>
           </a:xfrm>
           <a:custGeom>
             <a:avLst/>
@@ -11930,34 +13087,28 @@
             <a:cxnLst/>
             <a:rect r="r" b="b" t="t" l="l"/>
             <a:pathLst>
-              <a:path h="1317378" w="2870265">
+              <a:path h="765230" w="2683548">
                 <a:moveTo>
-                  <a:pt x="0" y="1317378"/>
+                  <a:pt x="0" y="0"/>
                 </a:moveTo>
                 <a:lnTo>
-                  <a:pt x="2870265" y="1317378"/>
-                </a:lnTo>
-                <a:lnTo>
-                  <a:pt x="2870265" y="0"/>
-                </a:lnTo>
-                <a:lnTo>
-                  <a:pt x="0" y="0"/>
-                </a:lnTo>
-                <a:lnTo>
-                  <a:pt x="0" y="1317378"/>
+                  <a:pt x="2683548" y="0"/>
+                </a:lnTo>
+                <a:lnTo>
+                  <a:pt x="2683548" y="765230"/>
+                </a:lnTo>
+                <a:lnTo>
+                  <a:pt x="0" y="765230"/>
+                </a:lnTo>
+                <a:lnTo>
+                  <a:pt x="0" y="0"/>
                 </a:lnTo>
                 <a:close/>
               </a:path>
             </a:pathLst>
           </a:custGeom>
           <a:blipFill>
-            <a:blip r:embed="rId10">
-              <a:extLst>
-                <a:ext uri="{96DAC541-7B7A-43D3-8B79-37D633B846F1}">
-                  <asvg:svgBlip xmlns:asvg="http://schemas.microsoft.com/office/drawing/2016/SVG/main" r:embed="rId11"/>
-                </a:ext>
-              </a:extLst>
-            </a:blip>
+            <a:blip r:embed="rId10"/>
             <a:stretch>
               <a:fillRect l="0" t="0" r="0" b="0"/>
             </a:stretch>
@@ -11966,14 +13117,60 @@
       </p:sp>
       <p:sp>
         <p:nvSpPr>
+          <p:cNvPr name="Freeform 7" id="7"/>
+          <p:cNvSpPr/>
+          <p:nvPr/>
+        </p:nvSpPr>
+        <p:spPr>
+          <a:xfrm flipH="false" flipV="false" rot="0">
+            <a:off x="2750795" y="1408112"/>
+            <a:ext cx="12786410" cy="8518946"/>
+          </a:xfrm>
+          <a:custGeom>
+            <a:avLst/>
+            <a:gdLst/>
+            <a:ahLst/>
+            <a:cxnLst/>
+            <a:rect r="r" b="b" t="t" l="l"/>
+            <a:pathLst>
+              <a:path h="8518946" w="12786410">
+                <a:moveTo>
+                  <a:pt x="0" y="0"/>
+                </a:moveTo>
+                <a:lnTo>
+                  <a:pt x="12786410" y="0"/>
+                </a:lnTo>
+                <a:lnTo>
+                  <a:pt x="12786410" y="8518946"/>
+                </a:lnTo>
+                <a:lnTo>
+                  <a:pt x="0" y="8518946"/>
+                </a:lnTo>
+                <a:lnTo>
+                  <a:pt x="0" y="0"/>
+                </a:lnTo>
+                <a:close/>
+              </a:path>
+            </a:pathLst>
+          </a:custGeom>
+          <a:blipFill>
+            <a:blip r:embed="rId11"/>
+            <a:stretch>
+              <a:fillRect l="0" t="0" r="0" b="0"/>
+            </a:stretch>
+          </a:blipFill>
+        </p:spPr>
+      </p:sp>
+      <p:sp>
+        <p:nvSpPr>
           <p:cNvPr name="TextBox 8" id="8"/>
           <p:cNvSpPr txBox="true"/>
           <p:nvPr/>
         </p:nvSpPr>
         <p:spPr>
           <a:xfrm rot="0">
-            <a:off x="-446905" y="-133350"/>
-            <a:ext cx="19181811" cy="1193800"/>
+            <a:off x="-359492" y="165101"/>
+            <a:ext cx="19006985" cy="936625"/>
           </a:xfrm>
           <a:prstGeom prst="rect">
             <a:avLst/>
@@ -11987,274 +13184,24 @@
           <a:p>
             <a:pPr algn="ctr">
               <a:lnSpc>
-                <a:spcPts val="9799"/>
+                <a:spcPts val="7699"/>
               </a:lnSpc>
               <a:spcBef>
                 <a:spcPct val="0"/>
               </a:spcBef>
             </a:pPr>
             <a:r>
-              <a:rPr lang="en-US" b="true" sz="6999">
-                <a:solidFill>
-                  <a:srgbClr val="17548F"/>
-                </a:solidFill>
-                <a:latin typeface="Faustina Bold"/>
-                <a:ea typeface="Faustina Bold"/>
-                <a:cs typeface="Faustina Bold"/>
-                <a:sym typeface="Faustina Bold"/>
-              </a:rPr>
-              <a:t>5</a:t>
-            </a:r>
-            <a:r>
-              <a:rPr lang="en-US" b="true" sz="6999">
-                <a:solidFill>
-                  <a:srgbClr val="17548F"/>
-                </a:solidFill>
-                <a:latin typeface="Faustina Bold"/>
-                <a:ea typeface="Faustina Bold"/>
-                <a:cs typeface="Faustina Bold"/>
-                <a:sym typeface="Faustina Bold"/>
-              </a:rPr>
-              <a:t>. Phương pháp thực hiện &amp; Mô hình đề xuất </a:t>
-            </a:r>
-          </a:p>
-        </p:txBody>
-      </p:sp>
-      <p:sp>
-        <p:nvSpPr>
-          <p:cNvPr name="TextBox 9" id="9"/>
-          <p:cNvSpPr txBox="true"/>
-          <p:nvPr/>
-        </p:nvSpPr>
-        <p:spPr>
-          <a:xfrm rot="0">
-            <a:off x="1317307" y="2117998"/>
-            <a:ext cx="15653385" cy="6797675"/>
-          </a:xfrm>
-          <a:prstGeom prst="rect">
-            <a:avLst/>
-          </a:prstGeom>
-        </p:spPr>
-        <p:txBody>
-          <a:bodyPr anchor="t" rtlCol="false" tIns="0" lIns="0" bIns="0" rIns="0">
-            <a:spAutoFit/>
-          </a:bodyPr>
-          <a:lstStyle/>
-          <a:p>
-            <a:pPr algn="just">
-              <a:lnSpc>
-                <a:spcPts val="4900"/>
-              </a:lnSpc>
-            </a:pPr>
-            <a:r>
-              <a:rPr lang="en-US" sz="3500" b="true">
-                <a:solidFill>
-                  <a:srgbClr val="17548F"/>
-                </a:solidFill>
-                <a:latin typeface="Faustina Bold"/>
-                <a:ea typeface="Faustina Bold"/>
-                <a:cs typeface="Faustina Bold"/>
-                <a:sym typeface="Faustina Bold"/>
-              </a:rPr>
-              <a:t>Sơ</a:t>
-            </a:r>
-            <a:r>
-              <a:rPr lang="en-US" sz="3500" b="true">
-                <a:solidFill>
-                  <a:srgbClr val="17548F"/>
-                </a:solidFill>
-                <a:latin typeface="Faustina Bold"/>
-                <a:ea typeface="Faustina Bold"/>
-                <a:cs typeface="Faustina Bold"/>
-                <a:sym typeface="Faustina Bold"/>
-              </a:rPr>
-              <a:t> đồ quy trình (Pipeline):</a:t>
-            </a:r>
-          </a:p>
-          <a:p>
-            <a:pPr algn="just" marL="755651" indent="-377825" lvl="1">
-              <a:lnSpc>
-                <a:spcPts val="4900"/>
-              </a:lnSpc>
-              <a:buFont typeface="Arial"/>
-              <a:buChar char="•"/>
-            </a:pPr>
-            <a:r>
-              <a:rPr lang="en-US" b="true" sz="3500">
-                <a:solidFill>
-                  <a:srgbClr val="17548F"/>
-                </a:solidFill>
-                <a:latin typeface="Faustina Bold"/>
-                <a:ea typeface="Faustina Bold"/>
-                <a:cs typeface="Faustina Bold"/>
-                <a:sym typeface="Faustina Bold"/>
-              </a:rPr>
-              <a:t>Input: 4 kênh MRI → Tiền xử lý: Chuẩn hóa Z-score,</a:t>
-            </a:r>
-            <a:r>
-              <a:rPr lang="en-US" b="true" sz="3500">
-                <a:solidFill>
-                  <a:srgbClr val="17548F"/>
-                </a:solidFill>
-                <a:latin typeface="Faustina Bold"/>
-                <a:ea typeface="Faustina Bold"/>
-                <a:cs typeface="Faustina Bold"/>
-                <a:sym typeface="Faustina Bold"/>
-              </a:rPr>
-              <a:t> Cắt bỏ lát rỗng (Slice Selection) .</a:t>
-            </a:r>
-          </a:p>
-          <a:p>
-            <a:pPr algn="just" marL="755651" indent="-377825" lvl="1">
-              <a:lnSpc>
-                <a:spcPts val="4900"/>
-              </a:lnSpc>
-              <a:spcBef>
-                <a:spcPct val="0"/>
-              </a:spcBef>
-              <a:buFont typeface="Arial"/>
-              <a:buChar char="•"/>
-            </a:pPr>
-            <a:r>
-              <a:rPr lang="en-US" b="true" sz="3500">
-                <a:solidFill>
-                  <a:srgbClr val="17548F"/>
-                </a:solidFill>
-                <a:latin typeface="Faustina Bold"/>
-                <a:ea typeface="Faustina Bold"/>
-                <a:cs typeface="Faustina Bold"/>
-                <a:sym typeface="Faustina Bold"/>
-              </a:rPr>
-              <a:t>Augme</a:t>
-            </a:r>
-            <a:r>
-              <a:rPr lang="en-US" b="true" sz="3500">
-                <a:solidFill>
-                  <a:srgbClr val="17548F"/>
-                </a:solidFill>
-                <a:latin typeface="Faustina Bold"/>
-                <a:ea typeface="Faustina Bold"/>
-                <a:cs typeface="Faustina Bold"/>
-                <a:sym typeface="Faustina Bold"/>
-              </a:rPr>
-              <a:t>ntat</a:t>
-            </a:r>
-            <a:r>
-              <a:rPr lang="en-US" b="true" sz="3500">
-                <a:solidFill>
-                  <a:srgbClr val="17548F"/>
-                </a:solidFill>
-                <a:latin typeface="Faustina Bold"/>
-                <a:ea typeface="Faustina Bold"/>
-                <a:cs typeface="Faustina Bold"/>
-                <a:sym typeface="Faustina Bold"/>
-              </a:rPr>
-              <a:t>ion: Xoay, lật, chỉnh độ sáng, nhiễu Gaussian (Tăng đa dạng dữ liệu).</a:t>
-            </a:r>
-          </a:p>
-          <a:p>
-            <a:pPr algn="just" marL="755651" indent="-377825" lvl="1">
-              <a:lnSpc>
-                <a:spcPts val="4900"/>
-              </a:lnSpc>
-              <a:spcBef>
-                <a:spcPct val="0"/>
-              </a:spcBef>
-              <a:buFont typeface="Arial"/>
-              <a:buChar char="•"/>
-            </a:pPr>
-            <a:r>
-              <a:rPr lang="en-US" b="true" sz="3500">
-                <a:solidFill>
-                  <a:srgbClr val="17548F"/>
-                </a:solidFill>
-                <a:latin typeface="Faustina Bold"/>
-                <a:ea typeface="Faustina Bold"/>
-                <a:cs typeface="Faustina Bold"/>
-                <a:sym typeface="Faustina Bold"/>
-              </a:rPr>
-              <a:t>Model: U-Net 2D (Encoder 4 tầng, Bottleneck 512 filters).</a:t>
-            </a:r>
-          </a:p>
-          <a:p>
-            <a:pPr algn="just">
-              <a:lnSpc>
-                <a:spcPts val="4900"/>
-              </a:lnSpc>
-              <a:spcBef>
-                <a:spcPct val="0"/>
-              </a:spcBef>
-            </a:pPr>
-            <a:r>
-              <a:rPr lang="en-US" b="true" sz="3500">
-                <a:solidFill>
-                  <a:srgbClr val="17548F"/>
-                </a:solidFill>
-                <a:latin typeface="Faustina Bold"/>
-                <a:ea typeface="Faustina Bold"/>
-                <a:cs typeface="Faustina Bold"/>
-                <a:sym typeface="Faustina Bold"/>
-              </a:rPr>
-              <a:t>Điểm mới - Hàm Loss đề xuất: </a:t>
-            </a:r>
-          </a:p>
-          <a:p>
-            <a:pPr algn="just" marL="755651" indent="-377825" lvl="1">
-              <a:lnSpc>
-                <a:spcPts val="4900"/>
-              </a:lnSpc>
-              <a:spcBef>
-                <a:spcPct val="0"/>
-              </a:spcBef>
-              <a:buFont typeface="Arial"/>
-              <a:buChar char="•"/>
-            </a:pPr>
-            <a:r>
-              <a:rPr lang="en-US" b="true" sz="3500">
-                <a:solidFill>
-                  <a:srgbClr val="17548F"/>
-                </a:solidFill>
-                <a:latin typeface="Faustina Bold"/>
-                <a:ea typeface="Faustina Bold"/>
-                <a:cs typeface="Faustina Bold"/>
-                <a:sym typeface="Faustina Bold"/>
-              </a:rPr>
-              <a:t>Công thức: L{total} = 0.4 CE + 0.4 Dice + 0.2 Focal</a:t>
-            </a:r>
-          </a:p>
-          <a:p>
-            <a:pPr algn="just" marL="755651" indent="-377825" lvl="1">
-              <a:lnSpc>
-                <a:spcPts val="4900"/>
-              </a:lnSpc>
-              <a:spcBef>
-                <a:spcPct val="0"/>
-              </a:spcBef>
-              <a:buFont typeface="Arial"/>
-              <a:buChar char="•"/>
-            </a:pPr>
-            <a:r>
-              <a:rPr lang="en-US" b="true" sz="3500">
-                <a:solidFill>
-                  <a:srgbClr val="17548F"/>
-                </a:solidFill>
-                <a:latin typeface="Faustina Bold"/>
-                <a:ea typeface="Faustina Bold"/>
-                <a:cs typeface="Faustina Bold"/>
-                <a:sym typeface="Faustina Bold"/>
-              </a:rPr>
-              <a:t>Class Weights: [0.1, 2.0, 2.0, 3.0] →  Tập trung tối đa vào vùng lõi u (ET) nhỏ và khó.</a:t>
-            </a:r>
-          </a:p>
-          <a:p>
-            <a:pPr algn="just">
-              <a:lnSpc>
-                <a:spcPts val="4900"/>
-              </a:lnSpc>
-              <a:spcBef>
-                <a:spcPct val="0"/>
-              </a:spcBef>
-            </a:pPr>
+              <a:rPr lang="en-US" b="true" sz="5499">
+                <a:solidFill>
+                  <a:srgbClr val="17548F"/>
+                </a:solidFill>
+                <a:latin typeface="Faustina Bold"/>
+                <a:ea typeface="Faustina Bold"/>
+                <a:cs typeface="Faustina Bold"/>
+                <a:sym typeface="Faustina Bold"/>
+              </a:rPr>
+              <a:t>5 . Cơ sở lý thuyết</a:t>
+            </a:r>
           </a:p>
         </p:txBody>
       </p:sp>
@@ -12508,8 +13455,8 @@
         </p:nvSpPr>
         <p:spPr>
           <a:xfrm flipH="false" flipV="true" rot="0">
-            <a:off x="-746708" y="-439976"/>
-            <a:ext cx="3131075" cy="1810331"/>
+            <a:off x="15635604" y="9222587"/>
+            <a:ext cx="2870265" cy="1317378"/>
           </a:xfrm>
           <a:custGeom>
             <a:avLst/>
@@ -12518,21 +13465,21 @@
             <a:cxnLst/>
             <a:rect r="r" b="b" t="t" l="l"/>
             <a:pathLst>
-              <a:path h="1810331" w="3131075">
+              <a:path h="1317378" w="2870265">
                 <a:moveTo>
-                  <a:pt x="0" y="1810331"/>
+                  <a:pt x="0" y="1317378"/>
                 </a:moveTo>
                 <a:lnTo>
-                  <a:pt x="3131075" y="1810331"/>
-                </a:lnTo>
-                <a:lnTo>
-                  <a:pt x="3131075" y="0"/>
-                </a:lnTo>
-                <a:lnTo>
-                  <a:pt x="0" y="0"/>
-                </a:lnTo>
-                <a:lnTo>
-                  <a:pt x="0" y="1810331"/>
+                  <a:pt x="2870265" y="1317378"/>
+                </a:lnTo>
+                <a:lnTo>
+                  <a:pt x="2870265" y="0"/>
+                </a:lnTo>
+                <a:lnTo>
+                  <a:pt x="0" y="0"/>
+                </a:lnTo>
+                <a:lnTo>
+                  <a:pt x="0" y="1317378"/>
                 </a:lnTo>
                 <a:close/>
               </a:path>
@@ -12559,9 +13506,9 @@
           <p:nvPr/>
         </p:nvSpPr>
         <p:spPr>
-          <a:xfrm flipH="false" flipV="true" rot="0">
-            <a:off x="15635604" y="9222587"/>
-            <a:ext cx="2870265" cy="1317378"/>
+          <a:xfrm flipH="false" flipV="false" rot="0">
+            <a:off x="247041" y="263470"/>
+            <a:ext cx="2683548" cy="765230"/>
           </a:xfrm>
           <a:custGeom>
             <a:avLst/>
@@ -12570,34 +13517,28 @@
             <a:cxnLst/>
             <a:rect r="r" b="b" t="t" l="l"/>
             <a:pathLst>
-              <a:path h="1317378" w="2870265">
+              <a:path h="765230" w="2683548">
                 <a:moveTo>
-                  <a:pt x="0" y="1317378"/>
+                  <a:pt x="0" y="0"/>
                 </a:moveTo>
                 <a:lnTo>
-                  <a:pt x="2870265" y="1317378"/>
-                </a:lnTo>
-                <a:lnTo>
-                  <a:pt x="2870265" y="0"/>
-                </a:lnTo>
-                <a:lnTo>
-                  <a:pt x="0" y="0"/>
-                </a:lnTo>
-                <a:lnTo>
-                  <a:pt x="0" y="1317378"/>
+                  <a:pt x="2683548" y="0"/>
+                </a:lnTo>
+                <a:lnTo>
+                  <a:pt x="2683548" y="765230"/>
+                </a:lnTo>
+                <a:lnTo>
+                  <a:pt x="0" y="765230"/>
+                </a:lnTo>
+                <a:lnTo>
+                  <a:pt x="0" y="0"/>
                 </a:lnTo>
                 <a:close/>
               </a:path>
             </a:pathLst>
           </a:custGeom>
           <a:blipFill>
-            <a:blip r:embed="rId10">
-              <a:extLst>
-                <a:ext uri="{96DAC541-7B7A-43D3-8B79-37D633B846F1}">
-                  <asvg:svgBlip xmlns:asvg="http://schemas.microsoft.com/office/drawing/2016/SVG/main" r:embed="rId11"/>
-                </a:ext>
-              </a:extLst>
-            </a:blip>
+            <a:blip r:embed="rId10"/>
             <a:stretch>
               <a:fillRect l="0" t="0" r="0" b="0"/>
             </a:stretch>
@@ -12612,8 +13553,8 @@
         </p:nvSpPr>
         <p:spPr>
           <a:xfrm flipH="false" flipV="false" rot="0">
-            <a:off x="1525511" y="1563433"/>
-            <a:ext cx="15236979" cy="8317843"/>
+            <a:off x="8512445" y="4792885"/>
+            <a:ext cx="8889236" cy="2328980"/>
           </a:xfrm>
           <a:custGeom>
             <a:avLst/>
@@ -12622,18 +13563,64 @@
             <a:cxnLst/>
             <a:rect r="r" b="b" t="t" l="l"/>
             <a:pathLst>
-              <a:path h="8317843" w="15236979">
+              <a:path h="2328980" w="8889236">
                 <a:moveTo>
                   <a:pt x="0" y="0"/>
                 </a:moveTo>
                 <a:lnTo>
-                  <a:pt x="15236978" y="0"/>
-                </a:lnTo>
-                <a:lnTo>
-                  <a:pt x="15236978" y="8317843"/>
-                </a:lnTo>
-                <a:lnTo>
-                  <a:pt x="0" y="8317843"/>
+                  <a:pt x="8889236" y="0"/>
+                </a:lnTo>
+                <a:lnTo>
+                  <a:pt x="8889236" y="2328980"/>
+                </a:lnTo>
+                <a:lnTo>
+                  <a:pt x="0" y="2328980"/>
+                </a:lnTo>
+                <a:lnTo>
+                  <a:pt x="0" y="0"/>
+                </a:lnTo>
+                <a:close/>
+              </a:path>
+            </a:pathLst>
+          </a:custGeom>
+          <a:blipFill>
+            <a:blip r:embed="rId11"/>
+            <a:stretch>
+              <a:fillRect l="0" t="0" r="0" b="0"/>
+            </a:stretch>
+          </a:blipFill>
+        </p:spPr>
+      </p:sp>
+      <p:sp>
+        <p:nvSpPr>
+          <p:cNvPr name="Freeform 9" id="9"/>
+          <p:cNvSpPr/>
+          <p:nvPr/>
+        </p:nvSpPr>
+        <p:spPr>
+          <a:xfrm flipH="false" flipV="false" rot="0">
+            <a:off x="2094715" y="8773195"/>
+            <a:ext cx="14098571" cy="898784"/>
+          </a:xfrm>
+          <a:custGeom>
+            <a:avLst/>
+            <a:gdLst/>
+            <a:ahLst/>
+            <a:cxnLst/>
+            <a:rect r="r" b="b" t="t" l="l"/>
+            <a:pathLst>
+              <a:path h="898784" w="14098571">
+                <a:moveTo>
+                  <a:pt x="0" y="0"/>
+                </a:moveTo>
+                <a:lnTo>
+                  <a:pt x="14098570" y="0"/>
+                </a:lnTo>
+                <a:lnTo>
+                  <a:pt x="14098570" y="898784"/>
+                </a:lnTo>
+                <a:lnTo>
+                  <a:pt x="0" y="898784"/>
                 </a:lnTo>
                 <a:lnTo>
                   <a:pt x="0" y="0"/>
@@ -12652,14 +13639,60 @@
       </p:sp>
       <p:sp>
         <p:nvSpPr>
-          <p:cNvPr name="TextBox 9" id="9"/>
+          <p:cNvPr name="Freeform 10" id="10"/>
+          <p:cNvSpPr/>
+          <p:nvPr/>
+        </p:nvSpPr>
+        <p:spPr>
+          <a:xfrm flipH="false" flipV="false" rot="0">
+            <a:off x="8512445" y="2887522"/>
+            <a:ext cx="8889236" cy="1050737"/>
+          </a:xfrm>
+          <a:custGeom>
+            <a:avLst/>
+            <a:gdLst/>
+            <a:ahLst/>
+            <a:cxnLst/>
+            <a:rect r="r" b="b" t="t" l="l"/>
+            <a:pathLst>
+              <a:path h="1050737" w="8889236">
+                <a:moveTo>
+                  <a:pt x="0" y="0"/>
+                </a:moveTo>
+                <a:lnTo>
+                  <a:pt x="8889236" y="0"/>
+                </a:lnTo>
+                <a:lnTo>
+                  <a:pt x="8889236" y="1050737"/>
+                </a:lnTo>
+                <a:lnTo>
+                  <a:pt x="0" y="1050737"/>
+                </a:lnTo>
+                <a:lnTo>
+                  <a:pt x="0" y="0"/>
+                </a:lnTo>
+                <a:close/>
+              </a:path>
+            </a:pathLst>
+          </a:custGeom>
+          <a:blipFill>
+            <a:blip r:embed="rId13"/>
+            <a:stretch>
+              <a:fillRect l="0" t="0" r="0" b="0"/>
+            </a:stretch>
+          </a:blipFill>
+        </p:spPr>
+      </p:sp>
+      <p:sp>
+        <p:nvSpPr>
+          <p:cNvPr name="TextBox 11" id="11"/>
           <p:cNvSpPr txBox="true"/>
           <p:nvPr/>
         </p:nvSpPr>
         <p:spPr>
           <a:xfrm rot="0">
-            <a:off x="-521532" y="-133350"/>
-            <a:ext cx="19331064" cy="1193800"/>
+            <a:off x="748464" y="1947209"/>
+            <a:ext cx="7173122" cy="6915150"/>
           </a:xfrm>
           <a:prstGeom prst="rect">
             <a:avLst/>
@@ -12671,28 +13704,266 @@
           </a:bodyPr>
           <a:lstStyle/>
           <a:p>
-            <a:pPr algn="ctr">
+            <a:pPr algn="just">
               <a:lnSpc>
-                <a:spcPts val="9799"/>
+                <a:spcPts val="4200"/>
+              </a:lnSpc>
+            </a:pPr>
+            <a:r>
+              <a:rPr lang="en-US" sz="3000" b="true">
+                <a:solidFill>
+                  <a:srgbClr val="17548F"/>
+                </a:solidFill>
+                <a:latin typeface="Faustina Bold"/>
+                <a:ea typeface="Faustina Bold"/>
+                <a:cs typeface="Faustina Bold"/>
+                <a:sym typeface="Faustina Bold"/>
+              </a:rPr>
+              <a:t>Sơ</a:t>
+            </a:r>
+            <a:r>
+              <a:rPr lang="en-US" sz="3000" b="true">
+                <a:solidFill>
+                  <a:srgbClr val="17548F"/>
+                </a:solidFill>
+                <a:latin typeface="Faustina Bold"/>
+                <a:ea typeface="Faustina Bold"/>
+                <a:cs typeface="Faustina Bold"/>
+                <a:sym typeface="Faustina Bold"/>
+              </a:rPr>
+              <a:t> đồ quy trình (Pipeline):</a:t>
+            </a:r>
+          </a:p>
+          <a:p>
+            <a:pPr algn="just" marL="647700" indent="-323850" lvl="1">
+              <a:lnSpc>
+                <a:spcPts val="4200"/>
+              </a:lnSpc>
+              <a:buFont typeface="Arial"/>
+              <a:buChar char="•"/>
+            </a:pPr>
+            <a:r>
+              <a:rPr lang="en-US" b="true" sz="3000">
+                <a:solidFill>
+                  <a:srgbClr val="17548F"/>
+                </a:solidFill>
+                <a:latin typeface="Faustina Bold"/>
+                <a:ea typeface="Faustina Bold"/>
+                <a:cs typeface="Faustina Bold"/>
+                <a:sym typeface="Faustina Bold"/>
+              </a:rPr>
+              <a:t>Input: 4 kênh MRI → Tiền xử lý: Chuẩn hóa Z-score,</a:t>
+            </a:r>
+            <a:r>
+              <a:rPr lang="en-US" b="true" sz="3000">
+                <a:solidFill>
+                  <a:srgbClr val="17548F"/>
+                </a:solidFill>
+                <a:latin typeface="Faustina Bold"/>
+                <a:ea typeface="Faustina Bold"/>
+                <a:cs typeface="Faustina Bold"/>
+                <a:sym typeface="Faustina Bold"/>
+              </a:rPr>
+              <a:t> Cắt bỏ lát rỗng (Slice Selection) .</a:t>
+            </a:r>
+          </a:p>
+          <a:p>
+            <a:pPr algn="just" marL="647700" indent="-323850" lvl="1">
+              <a:lnSpc>
+                <a:spcPts val="4200"/>
+              </a:lnSpc>
+              <a:spcBef>
+                <a:spcPct val="0"/>
+              </a:spcBef>
+              <a:buFont typeface="Arial"/>
+              <a:buChar char="•"/>
+            </a:pPr>
+            <a:r>
+              <a:rPr lang="en-US" b="true" sz="3000">
+                <a:solidFill>
+                  <a:srgbClr val="17548F"/>
+                </a:solidFill>
+                <a:latin typeface="Faustina Bold"/>
+                <a:ea typeface="Faustina Bold"/>
+                <a:cs typeface="Faustina Bold"/>
+                <a:sym typeface="Faustina Bold"/>
+              </a:rPr>
+              <a:t>Augme</a:t>
+            </a:r>
+            <a:r>
+              <a:rPr lang="en-US" b="true" sz="3000">
+                <a:solidFill>
+                  <a:srgbClr val="17548F"/>
+                </a:solidFill>
+                <a:latin typeface="Faustina Bold"/>
+                <a:ea typeface="Faustina Bold"/>
+                <a:cs typeface="Faustina Bold"/>
+                <a:sym typeface="Faustina Bold"/>
+              </a:rPr>
+              <a:t>ntat</a:t>
+            </a:r>
+            <a:r>
+              <a:rPr lang="en-US" b="true" sz="3000">
+                <a:solidFill>
+                  <a:srgbClr val="17548F"/>
+                </a:solidFill>
+                <a:latin typeface="Faustina Bold"/>
+                <a:ea typeface="Faustina Bold"/>
+                <a:cs typeface="Faustina Bold"/>
+                <a:sym typeface="Faustina Bold"/>
+              </a:rPr>
+              <a:t>ion: Xoay, lật, chỉnh độ sáng, nhiễu Gaussian.</a:t>
+            </a:r>
+          </a:p>
+          <a:p>
+            <a:pPr algn="just" marL="647700" indent="-323850" lvl="1">
+              <a:lnSpc>
+                <a:spcPts val="4200"/>
+              </a:lnSpc>
+              <a:spcBef>
+                <a:spcPct val="0"/>
+              </a:spcBef>
+              <a:buFont typeface="Arial"/>
+              <a:buChar char="•"/>
+            </a:pPr>
+            <a:r>
+              <a:rPr lang="en-US" b="true" sz="3000">
+                <a:solidFill>
+                  <a:srgbClr val="17548F"/>
+                </a:solidFill>
+                <a:latin typeface="Faustina Bold"/>
+                <a:ea typeface="Faustina Bold"/>
+                <a:cs typeface="Faustina Bold"/>
+                <a:sym typeface="Faustina Bold"/>
+              </a:rPr>
+              <a:t>Model: U-Net 2D (Encoder 4 tầng, Bottleneck 512 filters).</a:t>
+            </a:r>
+          </a:p>
+          <a:p>
+            <a:pPr algn="just">
+              <a:lnSpc>
+                <a:spcPts val="4200"/>
               </a:lnSpc>
               <a:spcBef>
                 <a:spcPct val="0"/>
               </a:spcBef>
             </a:pPr>
             <a:r>
-              <a:rPr lang="en-US" b="true" sz="6999">
-                <a:solidFill>
-                  <a:srgbClr val="17548F"/>
-                </a:solidFill>
-                <a:latin typeface="Faustina Bold"/>
-                <a:ea typeface="Faustina Bold"/>
-                <a:cs typeface="Faustina Bold"/>
-                <a:sym typeface="Faustina Bold"/>
-              </a:rPr>
-              <a:t>5</a:t>
-            </a:r>
-            <a:r>
-              <a:rPr lang="en-US" b="true" sz="6999">
+              <a:rPr lang="en-US" b="true" sz="3000">
+                <a:solidFill>
+                  <a:srgbClr val="17548F"/>
+                </a:solidFill>
+                <a:latin typeface="Faustina Bold"/>
+                <a:ea typeface="Faustina Bold"/>
+                <a:cs typeface="Faustina Bold"/>
+                <a:sym typeface="Faustina Bold"/>
+              </a:rPr>
+              <a:t>Điểm mới - Hàm Loss đề xuất: </a:t>
+            </a:r>
+          </a:p>
+          <a:p>
+            <a:pPr algn="just" marL="647700" indent="-323850" lvl="1">
+              <a:lnSpc>
+                <a:spcPts val="4200"/>
+              </a:lnSpc>
+              <a:spcBef>
+                <a:spcPct val="0"/>
+              </a:spcBef>
+              <a:buFont typeface="Arial"/>
+              <a:buChar char="•"/>
+            </a:pPr>
+            <a:r>
+              <a:rPr lang="en-US" b="true" sz="3000">
+                <a:solidFill>
+                  <a:srgbClr val="17548F"/>
+                </a:solidFill>
+                <a:latin typeface="Faustina Bold"/>
+                <a:ea typeface="Faustina Bold"/>
+                <a:cs typeface="Faustina Bold"/>
+                <a:sym typeface="Faustina Bold"/>
+              </a:rPr>
+              <a:t>Công thức L_total</a:t>
+            </a:r>
+          </a:p>
+          <a:p>
+            <a:pPr algn="just" marL="647700" indent="-323850" lvl="1">
+              <a:lnSpc>
+                <a:spcPts val="4200"/>
+              </a:lnSpc>
+              <a:spcBef>
+                <a:spcPct val="0"/>
+              </a:spcBef>
+              <a:buFont typeface="Arial"/>
+              <a:buChar char="•"/>
+            </a:pPr>
+            <a:r>
+              <a:rPr lang="en-US" b="true" sz="3000">
+                <a:solidFill>
+                  <a:srgbClr val="17548F"/>
+                </a:solidFill>
+                <a:latin typeface="Faustina Bold"/>
+                <a:ea typeface="Faustina Bold"/>
+                <a:cs typeface="Faustina Bold"/>
+                <a:sym typeface="Faustina Bold"/>
+              </a:rPr>
+              <a:t>Class Weights: [0.1, 2.0, 2.0, 3.0] →  Tập trung tối đa vào vùng lõi u nhỏ và khó.</a:t>
+            </a:r>
+          </a:p>
+          <a:p>
+            <a:pPr algn="just">
+              <a:lnSpc>
+                <a:spcPts val="4200"/>
+              </a:lnSpc>
+              <a:spcBef>
+                <a:spcPct val="0"/>
+              </a:spcBef>
+            </a:pPr>
+          </a:p>
+        </p:txBody>
+      </p:sp>
+      <p:sp>
+        <p:nvSpPr>
+          <p:cNvPr name="TextBox 12" id="12"/>
+          <p:cNvSpPr txBox="true"/>
+          <p:nvPr/>
+        </p:nvSpPr>
+        <p:spPr>
+          <a:xfrm rot="0">
+            <a:off x="-446905" y="923925"/>
+            <a:ext cx="19181811" cy="936625"/>
+          </a:xfrm>
+          <a:prstGeom prst="rect">
+            <a:avLst/>
+          </a:prstGeom>
+        </p:spPr>
+        <p:txBody>
+          <a:bodyPr anchor="t" rtlCol="false" tIns="0" lIns="0" bIns="0" rIns="0">
+            <a:spAutoFit/>
+          </a:bodyPr>
+          <a:lstStyle/>
+          <a:p>
+            <a:pPr algn="ctr">
+              <a:lnSpc>
+                <a:spcPts val="7699"/>
+              </a:lnSpc>
+              <a:spcBef>
+                <a:spcPct val="0"/>
+              </a:spcBef>
+            </a:pPr>
+            <a:r>
+              <a:rPr lang="en-US" b="true" sz="5499">
+                <a:solidFill>
+                  <a:srgbClr val="17548F"/>
+                </a:solidFill>
+                <a:latin typeface="Faustina Bold"/>
+                <a:ea typeface="Faustina Bold"/>
+                <a:cs typeface="Faustina Bold"/>
+                <a:sym typeface="Faustina Bold"/>
+              </a:rPr>
+              <a:t>6</a:t>
+            </a:r>
+            <a:r>
+              <a:rPr lang="en-US" b="true" sz="5499">
                 <a:solidFill>
                   <a:srgbClr val="17548F"/>
                 </a:solidFill>
@@ -12956,8 +14227,8 @@
         </p:nvSpPr>
         <p:spPr>
           <a:xfrm flipH="false" flipV="true" rot="0">
-            <a:off x="-746708" y="-439976"/>
-            <a:ext cx="3131075" cy="1810331"/>
+            <a:off x="15635604" y="9222587"/>
+            <a:ext cx="2870265" cy="1317378"/>
           </a:xfrm>
           <a:custGeom>
             <a:avLst/>
@@ -12966,21 +14237,21 @@
             <a:cxnLst/>
             <a:rect r="r" b="b" t="t" l="l"/>
             <a:pathLst>
-              <a:path h="1810331" w="3131075">
+              <a:path h="1317378" w="2870265">
                 <a:moveTo>
-                  <a:pt x="0" y="1810331"/>
+                  <a:pt x="0" y="1317378"/>
                 </a:moveTo>
                 <a:lnTo>
-                  <a:pt x="3131075" y="1810331"/>
-                </a:lnTo>
-                <a:lnTo>
-                  <a:pt x="3131075" y="0"/>
-                </a:lnTo>
-                <a:lnTo>
-                  <a:pt x="0" y="0"/>
-                </a:lnTo>
-                <a:lnTo>
-                  <a:pt x="0" y="1810331"/>
+                  <a:pt x="2870265" y="1317378"/>
+                </a:lnTo>
+                <a:lnTo>
+                  <a:pt x="2870265" y="0"/>
+                </a:lnTo>
+                <a:lnTo>
+                  <a:pt x="0" y="0"/>
+                </a:lnTo>
+                <a:lnTo>
+                  <a:pt x="0" y="1317378"/>
                 </a:lnTo>
                 <a:close/>
               </a:path>
@@ -13007,9 +14278,9 @@
           <p:nvPr/>
         </p:nvSpPr>
         <p:spPr>
-          <a:xfrm flipH="false" flipV="true" rot="0">
-            <a:off x="15635604" y="9222587"/>
-            <a:ext cx="2870265" cy="1317378"/>
+          <a:xfrm flipH="false" flipV="false" rot="0">
+            <a:off x="1525511" y="1563433"/>
+            <a:ext cx="15236979" cy="8317843"/>
           </a:xfrm>
           <a:custGeom>
             <a:avLst/>
@@ -13018,34 +14289,28 @@
             <a:cxnLst/>
             <a:rect r="r" b="b" t="t" l="l"/>
             <a:pathLst>
-              <a:path h="1317378" w="2870265">
+              <a:path h="8317843" w="15236979">
                 <a:moveTo>
-                  <a:pt x="0" y="1317378"/>
+                  <a:pt x="0" y="0"/>
                 </a:moveTo>
                 <a:lnTo>
-                  <a:pt x="2870265" y="1317378"/>
-                </a:lnTo>
-                <a:lnTo>
-                  <a:pt x="2870265" y="0"/>
-                </a:lnTo>
-                <a:lnTo>
-                  <a:pt x="0" y="0"/>
-                </a:lnTo>
-                <a:lnTo>
-                  <a:pt x="0" y="1317378"/>
+                  <a:pt x="15236978" y="0"/>
+                </a:lnTo>
+                <a:lnTo>
+                  <a:pt x="15236978" y="8317843"/>
+                </a:lnTo>
+                <a:lnTo>
+                  <a:pt x="0" y="8317843"/>
+                </a:lnTo>
+                <a:lnTo>
+                  <a:pt x="0" y="0"/>
                 </a:lnTo>
                 <a:close/>
               </a:path>
             </a:pathLst>
           </a:custGeom>
           <a:blipFill>
-            <a:blip r:embed="rId10">
-              <a:extLst>
-                <a:ext uri="{96DAC541-7B7A-43D3-8B79-37D633B846F1}">
-                  <asvg:svgBlip xmlns:asvg="http://schemas.microsoft.com/office/drawing/2016/SVG/main" r:embed="rId11"/>
-                </a:ext>
-              </a:extLst>
-            </a:blip>
+            <a:blip r:embed="rId10"/>
             <a:stretch>
               <a:fillRect l="0" t="0" r="0" b="0"/>
             </a:stretch>
@@ -13054,14 +14319,58 @@
       </p:sp>
       <p:sp>
         <p:nvSpPr>
-          <p:cNvPr name="Freeform 8" id="8"/>
+          <p:cNvPr name="TextBox 8" id="8"/>
+          <p:cNvSpPr txBox="true"/>
+          <p:nvPr/>
+        </p:nvSpPr>
+        <p:spPr>
+          <a:xfrm rot="0">
+            <a:off x="-521532" y="541310"/>
+            <a:ext cx="19331064" cy="936625"/>
+          </a:xfrm>
+          <a:prstGeom prst="rect">
+            <a:avLst/>
+          </a:prstGeom>
+        </p:spPr>
+        <p:txBody>
+          <a:bodyPr anchor="t" rtlCol="false" tIns="0" lIns="0" bIns="0" rIns="0">
+            <a:spAutoFit/>
+          </a:bodyPr>
+          <a:lstStyle/>
+          <a:p>
+            <a:pPr algn="ctr">
+              <a:lnSpc>
+                <a:spcPts val="7699"/>
+              </a:lnSpc>
+              <a:spcBef>
+                <a:spcPct val="0"/>
+              </a:spcBef>
+            </a:pPr>
+            <a:r>
+              <a:rPr lang="en-US" b="true" sz="5499">
+                <a:solidFill>
+                  <a:srgbClr val="17548F"/>
+                </a:solidFill>
+                <a:latin typeface="Faustina Bold"/>
+                <a:ea typeface="Faustina Bold"/>
+                <a:cs typeface="Faustina Bold"/>
+                <a:sym typeface="Faustina Bold"/>
+              </a:rPr>
+              <a:t>U-net 2D</a:t>
+            </a:r>
+          </a:p>
+        </p:txBody>
+      </p:sp>
+      <p:sp>
+        <p:nvSpPr>
+          <p:cNvPr name="Freeform 9" id="9"/>
           <p:cNvSpPr/>
           <p:nvPr/>
         </p:nvSpPr>
         <p:spPr>
           <a:xfrm flipH="false" flipV="false" rot="0">
-            <a:off x="9144000" y="1962286"/>
-            <a:ext cx="8115300" cy="2034264"/>
+            <a:off x="247041" y="263470"/>
+            <a:ext cx="2683548" cy="765230"/>
           </a:xfrm>
           <a:custGeom>
             <a:avLst/>
@@ -13070,18 +14379,18 @@
             <a:cxnLst/>
             <a:rect r="r" b="b" t="t" l="l"/>
             <a:pathLst>
-              <a:path h="2034264" w="8115300">
+              <a:path h="765230" w="2683548">
                 <a:moveTo>
                   <a:pt x="0" y="0"/>
                 </a:moveTo>
                 <a:lnTo>
-                  <a:pt x="8115300" y="0"/>
-                </a:lnTo>
-                <a:lnTo>
-                  <a:pt x="8115300" y="2034264"/>
-                </a:lnTo>
-                <a:lnTo>
-                  <a:pt x="0" y="2034264"/>
+                  <a:pt x="2683548" y="0"/>
+                </a:lnTo>
+                <a:lnTo>
+                  <a:pt x="2683548" y="765230"/>
+                </a:lnTo>
+                <a:lnTo>
+                  <a:pt x="0" y="765230"/>
                 </a:lnTo>
                 <a:lnTo>
                   <a:pt x="0" y="0"/>
@@ -13091,278 +14400,12 @@
             </a:pathLst>
           </a:custGeom>
           <a:blipFill>
-            <a:blip r:embed="rId12"/>
+            <a:blip r:embed="rId11"/>
             <a:stretch>
               <a:fillRect l="0" t="0" r="0" b="0"/>
             </a:stretch>
           </a:blipFill>
         </p:spPr>
-      </p:sp>
-      <p:sp>
-        <p:nvSpPr>
-          <p:cNvPr name="Freeform 9" id="9"/>
-          <p:cNvSpPr/>
-          <p:nvPr/>
-        </p:nvSpPr>
-        <p:spPr>
-          <a:xfrm flipH="false" flipV="false" rot="0">
-            <a:off x="9144000" y="4380416"/>
-            <a:ext cx="8117056" cy="5316671"/>
-          </a:xfrm>
-          <a:custGeom>
-            <a:avLst/>
-            <a:gdLst/>
-            <a:ahLst/>
-            <a:cxnLst/>
-            <a:rect r="r" b="b" t="t" l="l"/>
-            <a:pathLst>
-              <a:path h="5316671" w="8117056">
-                <a:moveTo>
-                  <a:pt x="0" y="0"/>
-                </a:moveTo>
-                <a:lnTo>
-                  <a:pt x="8117056" y="0"/>
-                </a:lnTo>
-                <a:lnTo>
-                  <a:pt x="8117056" y="5316672"/>
-                </a:lnTo>
-                <a:lnTo>
-                  <a:pt x="0" y="5316672"/>
-                </a:lnTo>
-                <a:lnTo>
-                  <a:pt x="0" y="0"/>
-                </a:lnTo>
-                <a:close/>
-              </a:path>
-            </a:pathLst>
-          </a:custGeom>
-          <a:blipFill>
-            <a:blip r:embed="rId13"/>
-            <a:stretch>
-              <a:fillRect l="0" t="0" r="0" b="0"/>
-            </a:stretch>
-          </a:blipFill>
-        </p:spPr>
-      </p:sp>
-      <p:sp>
-        <p:nvSpPr>
-          <p:cNvPr name="TextBox 10" id="10"/>
-          <p:cNvSpPr txBox="true"/>
-          <p:nvPr/>
-        </p:nvSpPr>
-        <p:spPr>
-          <a:xfrm rot="0">
-            <a:off x="1689540" y="-133350"/>
-            <a:ext cx="14908919" cy="1193800"/>
-          </a:xfrm>
-          <a:prstGeom prst="rect">
-            <a:avLst/>
-          </a:prstGeom>
-        </p:spPr>
-        <p:txBody>
-          <a:bodyPr anchor="t" rtlCol="false" tIns="0" lIns="0" bIns="0" rIns="0">
-            <a:spAutoFit/>
-          </a:bodyPr>
-          <a:lstStyle/>
-          <a:p>
-            <a:pPr algn="ctr">
-              <a:lnSpc>
-                <a:spcPts val="9799"/>
-              </a:lnSpc>
-              <a:spcBef>
-                <a:spcPct val="0"/>
-              </a:spcBef>
-            </a:pPr>
-            <a:r>
-              <a:rPr lang="en-US" b="true" sz="6999">
-                <a:solidFill>
-                  <a:srgbClr val="17548F"/>
-                </a:solidFill>
-                <a:latin typeface="Faustina Bold"/>
-                <a:ea typeface="Faustina Bold"/>
-                <a:cs typeface="Faustina Bold"/>
-                <a:sym typeface="Faustina Bold"/>
-              </a:rPr>
-              <a:t>6</a:t>
-            </a:r>
-            <a:r>
-              <a:rPr lang="en-US" b="true" sz="6999">
-                <a:solidFill>
-                  <a:srgbClr val="17548F"/>
-                </a:solidFill>
-                <a:latin typeface="Faustina Bold"/>
-                <a:ea typeface="Faustina Bold"/>
-                <a:cs typeface="Faustina Bold"/>
-                <a:sym typeface="Faustina Bold"/>
-              </a:rPr>
-              <a:t>. Thực nghiệm - Kết quả </a:t>
-            </a:r>
-          </a:p>
-        </p:txBody>
-      </p:sp>
-      <p:sp>
-        <p:nvSpPr>
-          <p:cNvPr name="TextBox 11" id="11"/>
-          <p:cNvSpPr txBox="true"/>
-          <p:nvPr/>
-        </p:nvSpPr>
-        <p:spPr>
-          <a:xfrm rot="0">
-            <a:off x="1174963" y="1886086"/>
-            <a:ext cx="6194084" cy="1844675"/>
-          </a:xfrm>
-          <a:prstGeom prst="rect">
-            <a:avLst/>
-          </a:prstGeom>
-        </p:spPr>
-        <p:txBody>
-          <a:bodyPr anchor="t" rtlCol="false" tIns="0" lIns="0" bIns="0" rIns="0">
-            <a:spAutoFit/>
-          </a:bodyPr>
-          <a:lstStyle/>
-          <a:p>
-            <a:pPr algn="just">
-              <a:lnSpc>
-                <a:spcPts val="4900"/>
-              </a:lnSpc>
-              <a:spcBef>
-                <a:spcPct val="0"/>
-              </a:spcBef>
-            </a:pPr>
-            <a:r>
-              <a:rPr lang="en-US" b="true" sz="3500">
-                <a:solidFill>
-                  <a:srgbClr val="17548F"/>
-                </a:solidFill>
-                <a:latin typeface="Faustina Bold"/>
-                <a:ea typeface="Faustina Bold"/>
-                <a:cs typeface="Faustina Bold"/>
-                <a:sym typeface="Faustina Bold"/>
-              </a:rPr>
-              <a:t>Dữ liệu: Gồm 1000 tập brats được chuyển thành .h5 Chia tập 70% Train - 20% Val - 10% Test. </a:t>
-            </a:r>
-          </a:p>
-        </p:txBody>
-      </p:sp>
-      <p:sp>
-        <p:nvSpPr>
-          <p:cNvPr name="TextBox 12" id="12"/>
-          <p:cNvSpPr txBox="true"/>
-          <p:nvPr/>
-        </p:nvSpPr>
-        <p:spPr>
-          <a:xfrm rot="0">
-            <a:off x="1174963" y="5234846"/>
-            <a:ext cx="7583578" cy="3082925"/>
-          </a:xfrm>
-          <a:prstGeom prst="rect">
-            <a:avLst/>
-          </a:prstGeom>
-        </p:spPr>
-        <p:txBody>
-          <a:bodyPr anchor="t" rtlCol="false" tIns="0" lIns="0" bIns="0" rIns="0">
-            <a:spAutoFit/>
-          </a:bodyPr>
-          <a:lstStyle/>
-          <a:p>
-            <a:pPr algn="just">
-              <a:lnSpc>
-                <a:spcPts val="4900"/>
-              </a:lnSpc>
-            </a:pPr>
-            <a:r>
-              <a:rPr lang="en-US" sz="3500" b="true">
-                <a:solidFill>
-                  <a:srgbClr val="17548F"/>
-                </a:solidFill>
-                <a:latin typeface="Faustina Bold"/>
-                <a:ea typeface="Faustina Bold"/>
-                <a:cs typeface="Faustina Bold"/>
-                <a:sym typeface="Faustina Bold"/>
-              </a:rPr>
-              <a:t>T1 : cấu trúc não bộ</a:t>
-            </a:r>
-          </a:p>
-          <a:p>
-            <a:pPr algn="just">
-              <a:lnSpc>
-                <a:spcPts val="4900"/>
-              </a:lnSpc>
-            </a:pPr>
-            <a:r>
-              <a:rPr lang="en-US" sz="3500" b="true">
-                <a:solidFill>
-                  <a:srgbClr val="17548F"/>
-                </a:solidFill>
-                <a:latin typeface="Faustina Bold"/>
-                <a:ea typeface="Faustina Bold"/>
-                <a:cs typeface="Faustina Bold"/>
-                <a:sym typeface="Faustina Bold"/>
-              </a:rPr>
-              <a:t>T1EC : khối u bắt thuốc</a:t>
-            </a:r>
-          </a:p>
-          <a:p>
-            <a:pPr algn="just">
-              <a:lnSpc>
-                <a:spcPts val="4900"/>
-              </a:lnSpc>
-            </a:pPr>
-            <a:r>
-              <a:rPr lang="en-US" sz="3500" b="true">
-                <a:solidFill>
-                  <a:srgbClr val="17548F"/>
-                </a:solidFill>
-                <a:latin typeface="Faustina Bold"/>
-                <a:ea typeface="Faustina Bold"/>
-                <a:cs typeface="Faustina Bold"/>
-                <a:sym typeface="Faustina Bold"/>
-              </a:rPr>
-              <a:t>T2 : phù nề</a:t>
-            </a:r>
-          </a:p>
-          <a:p>
-            <a:pPr algn="just">
-              <a:lnSpc>
-                <a:spcPts val="4900"/>
-              </a:lnSpc>
-            </a:pPr>
-            <a:r>
-              <a:rPr lang="en-US" sz="3500" b="true">
-                <a:solidFill>
-                  <a:srgbClr val="17548F"/>
-                </a:solidFill>
-                <a:latin typeface="Faustina Bold"/>
-                <a:ea typeface="Faustina Bold"/>
-                <a:cs typeface="Faustina Bold"/>
-                <a:sym typeface="Faustina Bold"/>
-              </a:rPr>
-              <a:t>Flair : vùng phù nề với dịch não tủy</a:t>
-            </a:r>
-          </a:p>
-          <a:p>
-            <a:pPr algn="just">
-              <a:lnSpc>
-                <a:spcPts val="4900"/>
-              </a:lnSpc>
-              <a:spcBef>
-                <a:spcPct val="0"/>
-              </a:spcBef>
-            </a:pPr>
-            <a:r>
-              <a:rPr lang="en-US" b="true" sz="3500">
-                <a:solidFill>
-                  <a:srgbClr val="17548F"/>
-                </a:solidFill>
-                <a:latin typeface="Faustina Bold"/>
-                <a:ea typeface="Faustina Bold"/>
-                <a:cs typeface="Faustina Bold"/>
-                <a:sym typeface="Faustina Bold"/>
-              </a:rPr>
-              <a:t>Seg : ảnh nhãn</a:t>
-            </a:r>
-          </a:p>
-        </p:txBody>
       </p:sp>
     </p:spTree>
   </p:cSld>
